--- a/Part2_CoordFrames/ref/산출물/좌표계와_좌표변환.pptx
+++ b/Part2_CoordFrames/ref/산출물/좌표계와_좌표변환.pptx
@@ -2891,29 +2891,7 @@
                 <a:ea typeface="맑은 고딕" pitchFamily="34" charset="-122"/>
                 <a:cs typeface="맑은 고딕" pitchFamily="34" charset="-120"/>
               </a:rPr>
-              <a:t>2026</a:t>
-            </a:r>
-            <a:r>
-              <a:rPr lang="en-US" sz="1100" dirty="0">
-                <a:solidFill>
-                  <a:srgbClr val="AEB6C0"/>
-                </a:solidFill>
-                <a:latin typeface="맑은 고딕" pitchFamily="34" charset="0"/>
-                <a:ea typeface="맑은 고딕" pitchFamily="34" charset="-122"/>
-                <a:cs typeface="맑은 고딕" pitchFamily="34" charset="-120"/>
-              </a:rPr>
-              <a:t>. </a:t>
-            </a:r>
-            <a:r>
-              <a:rPr lang="en-US" sz="1100" dirty="0" smtClean="0">
-                <a:solidFill>
-                  <a:srgbClr val="AEB6C0"/>
-                </a:solidFill>
-                <a:latin typeface="맑은 고딕" pitchFamily="34" charset="0"/>
-                <a:ea typeface="맑은 고딕" pitchFamily="34" charset="-122"/>
-                <a:cs typeface="맑은 고딕" pitchFamily="34" charset="-120"/>
-              </a:rPr>
-              <a:t>09.10</a:t>
+              <a:t>2026. 09. 10</a:t>
             </a:r>
             <a:endParaRPr lang="en-US" sz="1250" dirty="0"/>
           </a:p>
@@ -4472,8 +4450,8 @@
         </p:nvSpPr>
         <p:spPr>
           <a:xfrm>
-            <a:off x="5212080" y="3950208"/>
-            <a:ext cx="1005840" cy="201168"/>
+            <a:off x="5175504" y="3931920"/>
+            <a:ext cx="1325880" cy="201168"/>
           </a:xfrm>
           <a:prstGeom prst="rect">
             <a:avLst/>
@@ -4489,7 +4467,7 @@
               <a:buNone/>
             </a:pPr>
             <a:r>
-              <a:rPr lang="en-US" sz="850" dirty="0">
+              <a:rPr lang="en-US" sz="750" dirty="0">
                 <a:solidFill>
                   <a:srgbClr val="1A1A1A"/>
                 </a:solidFill>
@@ -4771,8 +4749,8 @@
         </p:nvSpPr>
         <p:spPr>
           <a:xfrm>
-            <a:off x="8156448" y="3145536"/>
-            <a:ext cx="2926080" cy="475488"/>
+            <a:off x="8065008" y="3145536"/>
+            <a:ext cx="3108960" cy="475488"/>
           </a:xfrm>
           <a:prstGeom prst="roundRect">
             <a:avLst>
@@ -4793,8 +4771,8 @@
         </p:nvSpPr>
         <p:spPr>
           <a:xfrm>
-            <a:off x="8156448" y="3145536"/>
-            <a:ext cx="2926080" cy="475488"/>
+            <a:off x="8065008" y="3145536"/>
+            <a:ext cx="3108960" cy="475488"/>
           </a:xfrm>
           <a:prstGeom prst="rect">
             <a:avLst/>
@@ -4810,15 +4788,15 @@
               <a:buNone/>
             </a:pPr>
             <a:r>
-              <a:rPr lang="en-US" sz="1250" dirty="0">
-                <a:solidFill>
-                  <a:srgbClr val="1A1A1A"/>
-                </a:solidFill>
-                <a:latin typeface="맑은 고딕" pitchFamily="34" charset="0"/>
-                <a:ea typeface="맑은 고딕" pitchFamily="34" charset="-122"/>
-                <a:cs typeface="맑은 고딕" pitchFamily="34" charset="-120"/>
-              </a:rPr>
-              <a:t>= -k(m · d · u + n · d · v)</a:t>
+              <a:rPr lang="en-US" sz="1100" dirty="0">
+                <a:solidFill>
+                  <a:srgbClr val="1A1A1A"/>
+                </a:solidFill>
+                <a:latin typeface="맑은 고딕" pitchFamily="34" charset="0"/>
+                <a:ea typeface="맑은 고딕" pitchFamily="34" charset="-122"/>
+                <a:cs typeface="맑은 고딕" pitchFamily="34" charset="-120"/>
+              </a:rPr>
+              <a:t>φ(m, n) = −k ( m·d·u + n·d·v )</a:t>
             </a:r>
             <a:endParaRPr lang="en-US" sz="1250" dirty="0"/>
           </a:p>
@@ -4833,7 +4811,7 @@
         <p:spPr>
           <a:xfrm>
             <a:off x="8193024" y="3785616"/>
-            <a:ext cx="2926080" cy="1371600"/>
+            <a:ext cx="3017520" cy="1097280"/>
           </a:xfrm>
           <a:prstGeom prst="rect">
             <a:avLst/>
@@ -4855,7 +4833,7 @@
               <a:buNone/>
             </a:pPr>
             <a:r>
-              <a:rPr lang="en-US" sz="900" i="1" dirty="0">
+              <a:rPr lang="en-US" sz="850" i="1" dirty="0">
                 <a:solidFill>
                   <a:srgbClr val="555555"/>
                 </a:solidFill>
@@ -4863,7 +4841,7 @@
                 <a:ea typeface="맑은 고딕" pitchFamily="34" charset="-122"/>
                 <a:cs typeface="맑은 고딕" pitchFamily="34" charset="-120"/>
               </a:rPr>
-              <a:t>소자 번호에 u, v 를 곱하기만 하면 된다.</a:t>
+              <a:t>k = 2π/λ · d 소자 간격 · m, n 소자 번호</a:t>
             </a:r>
             <a:endParaRPr lang="en-US" sz="900" dirty="0"/>
           </a:p>
@@ -4878,7 +4856,7 @@
               <a:buNone/>
             </a:pPr>
             <a:r>
-              <a:rPr lang="en-US" sz="900" i="1" dirty="0">
+              <a:rPr lang="en-US" sz="850" i="1" dirty="0">
                 <a:solidFill>
                   <a:srgbClr val="555555"/>
                 </a:solidFill>
@@ -4886,7 +4864,7 @@
                 <a:ea typeface="맑은 고딕" pitchFamily="34" charset="-122"/>
                 <a:cs typeface="맑은 고딕" pitchFamily="34" charset="-120"/>
               </a:rPr>
-              <a:t>각도 (Az, El) 로는 이렇게 단순해지지 않는다.</a:t>
+              <a:t>소자 번호에 u, v 를 곱하기만 하면 된다.</a:t>
             </a:r>
             <a:endParaRPr lang="en-US" sz="900" dirty="0"/>
           </a:p>
@@ -4901,7 +4879,7 @@
               <a:buNone/>
             </a:pPr>
             <a:r>
-              <a:rPr lang="en-US" sz="900" i="1" dirty="0">
+              <a:rPr lang="en-US" sz="850" i="1" dirty="0">
                 <a:solidFill>
                   <a:srgbClr val="555555"/>
                 </a:solidFill>
@@ -4909,7 +4887,7 @@
                 <a:ea typeface="맑은 고딕" pitchFamily="34" charset="-122"/>
                 <a:cs typeface="맑은 고딕" pitchFamily="34" charset="-120"/>
               </a:rPr>
-              <a:t>되돌릴 때는 asin 대신 atan2 를 쓴다.</a:t>
+              <a:t>각도 (Az, El) 로는 이렇게 단순해지지 않는다.</a:t>
             </a:r>
             <a:endParaRPr lang="en-US" sz="900" dirty="0"/>
           </a:p>
@@ -4924,7 +4902,7 @@
               <a:buNone/>
             </a:pPr>
             <a:r>
-              <a:rPr lang="en-US" sz="900" i="1" dirty="0">
+              <a:rPr lang="en-US" sz="850" i="1" dirty="0">
                 <a:solidFill>
                   <a:srgbClr val="555555"/>
                 </a:solidFill>
@@ -4932,7 +4910,7 @@
                 <a:ea typeface="맑은 고딕" pitchFamily="34" charset="-122"/>
                 <a:cs typeface="맑은 고딕" pitchFamily="34" charset="-120"/>
               </a:rPr>
-              <a:t>Az = atan2(u,w)</a:t>
+              <a:t>격자로브 : d &gt; λ/2 이면 원치 않는 제2 빔이 생긴다.</a:t>
             </a:r>
             <a:endParaRPr lang="en-US" sz="900" dirty="0"/>
           </a:p>
@@ -4944,7 +4922,47 @@
               <a:buNone/>
             </a:pPr>
             <a:r>
-              <a:rPr lang="en-US" sz="900" i="1" dirty="0">
+              <a:rPr lang="en-US" sz="850" i="1" dirty="0">
+                <a:solidFill>
+                  <a:srgbClr val="555555"/>
+                </a:solidFill>
+                <a:latin typeface="맑은 고딕" pitchFamily="34" charset="0"/>
+                <a:ea typeface="맑은 고딕" pitchFamily="34" charset="-122"/>
+                <a:cs typeface="맑은 고딕" pitchFamily="34" charset="-120"/>
+              </a:rPr>
+              <a:t>되돌릴 때는 asin 대신 atan2 를 쓴다.</a:t>
+            </a:r>
+            <a:endParaRPr lang="en-US" sz="900" dirty="0"/>
+          </a:p>
+          <a:p>
+            <a:pPr marL="0" indent="0" algn="l">
+              <a:lnSpc>
+                <a:spcPct val="105000"/>
+              </a:lnSpc>
+              <a:buNone/>
+            </a:pPr>
+            <a:r>
+              <a:rPr lang="en-US" sz="850" i="1" dirty="0">
+                <a:solidFill>
+                  <a:srgbClr val="555555"/>
+                </a:solidFill>
+                <a:latin typeface="맑은 고딕" pitchFamily="34" charset="0"/>
+                <a:ea typeface="맑은 고딕" pitchFamily="34" charset="-122"/>
+                <a:cs typeface="맑은 고딕" pitchFamily="34" charset="-120"/>
+              </a:rPr>
+              <a:t>Az = atan2(u, w)</a:t>
+            </a:r>
+            <a:endParaRPr lang="en-US" sz="900" dirty="0"/>
+          </a:p>
+          <a:p>
+            <a:pPr marL="0" indent="0" algn="l">
+              <a:lnSpc>
+                <a:spcPct val="105000"/>
+              </a:lnSpc>
+              <a:buNone/>
+            </a:pPr>
+            <a:r>
+              <a:rPr lang="en-US" sz="850" i="1" dirty="0">
                 <a:solidFill>
                   <a:srgbClr val="555555"/>
                 </a:solidFill>
@@ -6893,7 +6911,7 @@
                 <a:ea typeface="맑은 고딕" pitchFamily="34" charset="-122"/>
                 <a:cs typeface="맑은 고딕" pitchFamily="34" charset="-120"/>
               </a:rPr>
-              <a:t>레버암 (-30, 0, -10) m</a:t>
+              <a:t>레버암 (−30, 0, −10) m</a:t>
             </a:r>
             <a:endParaRPr lang="en-US" sz="950" dirty="0"/>
           </a:p>
@@ -6908,7 +6926,7 @@
         <p:spPr>
           <a:xfrm>
             <a:off x="914400" y="4791456"/>
-            <a:ext cx="3127248" cy="1097280"/>
+            <a:ext cx="3127248" cy="1170432"/>
           </a:xfrm>
           <a:prstGeom prst="roundRect">
             <a:avLst>
@@ -7041,7 +7059,7 @@
         <p:spPr>
           <a:xfrm>
             <a:off x="4261104" y="4791456"/>
-            <a:ext cx="7013448" cy="1097280"/>
+            <a:ext cx="7013448" cy="1170432"/>
           </a:xfrm>
           <a:prstGeom prst="roundRect">
             <a:avLst>
@@ -7167,7 +7185,7 @@
         </p:nvSpPr>
         <p:spPr>
           <a:xfrm>
-            <a:off x="4370832" y="5458968"/>
+            <a:off x="4370832" y="5394960"/>
             <a:ext cx="2212848" cy="201168"/>
           </a:xfrm>
           <a:prstGeom prst="rect">
@@ -7297,7 +7315,7 @@
         </p:nvSpPr>
         <p:spPr>
           <a:xfrm>
-            <a:off x="6464808" y="5458968"/>
+            <a:off x="6464808" y="5394960"/>
             <a:ext cx="1024128" cy="201168"/>
           </a:xfrm>
           <a:prstGeom prst="rect">
@@ -7427,7 +7445,7 @@
         </p:nvSpPr>
         <p:spPr>
           <a:xfrm>
-            <a:off x="7370064" y="5458968"/>
+            <a:off x="7370064" y="5394960"/>
             <a:ext cx="1133856" cy="201168"/>
           </a:xfrm>
           <a:prstGeom prst="rect">
@@ -7557,7 +7575,7 @@
         </p:nvSpPr>
         <p:spPr>
           <a:xfrm>
-            <a:off x="8385048" y="5458968"/>
+            <a:off x="8385048" y="5394960"/>
             <a:ext cx="1280160" cy="201168"/>
           </a:xfrm>
           <a:prstGeom prst="rect">
@@ -7687,7 +7705,7 @@
         </p:nvSpPr>
         <p:spPr>
           <a:xfrm>
-            <a:off x="9546336" y="5458968"/>
+            <a:off x="9546336" y="5394960"/>
             <a:ext cx="1005840" cy="201168"/>
           </a:xfrm>
           <a:prstGeom prst="rect">
@@ -7817,8 +7835,8 @@
         </p:nvSpPr>
         <p:spPr>
           <a:xfrm>
-            <a:off x="4462272" y="5632704"/>
-            <a:ext cx="6675120" cy="182880"/>
+            <a:off x="4462272" y="5614416"/>
+            <a:ext cx="6803136" cy="274320"/>
           </a:xfrm>
           <a:prstGeom prst="rect">
             <a:avLst/>
@@ -7834,7 +7852,7 @@
               <a:buNone/>
             </a:pPr>
             <a:r>
-              <a:rPr lang="en-US" sz="780" dirty="0">
+              <a:rPr lang="en-US" sz="750" dirty="0">
                 <a:solidFill>
                   <a:srgbClr val="555555"/>
                 </a:solidFill>
@@ -7842,7 +7860,24 @@
                 <a:ea typeface="맑은 고딕" pitchFamily="34" charset="-122"/>
                 <a:cs typeface="맑은 고딕" pitchFamily="34" charset="-120"/>
               </a:rPr>
-              <a:t>식으로 쓰면  p동체 = Rz(설치방위) · Ry(백틸트) · A · p안테나 + 레버암      A 는 안테나 면 기준 축을 동체 축으로 돌려 놓는 상수 행렬 (참고자료 2.2.9)</a:t>
+              <a:t>식으로 쓰면   p동체 = Rz(설치방위) · Ry(백틸트) · A · p안테나 + 레버암</a:t>
+            </a:r>
+            <a:endParaRPr lang="en-US" sz="780" dirty="0"/>
+          </a:p>
+          <a:p>
+            <a:pPr marL="0" indent="0">
+              <a:buNone/>
+            </a:pPr>
+            <a:r>
+              <a:rPr lang="en-US" sz="750" dirty="0">
+                <a:solidFill>
+                  <a:srgbClr val="555555"/>
+                </a:solidFill>
+                <a:latin typeface="맑은 고딕" pitchFamily="34" charset="0"/>
+                <a:ea typeface="맑은 고딕" pitchFamily="34" charset="-122"/>
+                <a:cs typeface="맑은 고딕" pitchFamily="34" charset="-120"/>
+              </a:rPr>
+              <a:t>A = Rz(−90°)·Rx(−90°) — 안테나 면 기준 축을 동체 축으로 돌려 놓는 상수 행렬 (참고자료 : CIWS-II 데이터처리를 위한 좌표계 및 좌표변환 §2.2.9)</a:t>
             </a:r>
             <a:endParaRPr lang="en-US" sz="780" dirty="0"/>
           </a:p>
@@ -9969,7 +10004,7 @@
                 <a:ea typeface="맑은 고딕" pitchFamily="34" charset="-122"/>
                 <a:cs typeface="맑은 고딕" pitchFamily="34" charset="-120"/>
               </a:rPr>
-              <a:t>이번 과제에선 x</a:t>
+              <a:t>이번 과제에선 사용 안 함</a:t>
             </a:r>
             <a:endParaRPr lang="en-US" sz="950" dirty="0"/>
           </a:p>
@@ -10457,9 +10492,9 @@
           <p:nvPr/>
         </p:nvSpPr>
         <p:spPr>
-          <a:xfrm rot="-5400000">
-            <a:off x="2029968" y="2743200"/>
-            <a:ext cx="731520" cy="0"/>
+          <a:xfrm rot="17579323">
+            <a:off x="2195960" y="2807208"/>
+            <a:ext cx="655568" cy="0"/>
           </a:xfrm>
           <a:prstGeom prst="line">
             <a:avLst/>
@@ -10483,7 +10518,7 @@
         </p:nvSpPr>
         <p:spPr>
           <a:xfrm>
-            <a:off x="2468880" y="2322576"/>
+            <a:off x="2706624" y="2395728"/>
             <a:ext cx="640080" cy="201168"/>
           </a:xfrm>
           <a:prstGeom prst="rect">
@@ -10522,7 +10557,7 @@
         </p:nvSpPr>
         <p:spPr>
           <a:xfrm>
-            <a:off x="2194560" y="2487168"/>
+            <a:off x="2359152" y="2706624"/>
             <a:ext cx="182880" cy="201168"/>
           </a:xfrm>
           <a:prstGeom prst="rect">
@@ -11298,7 +11333,7 @@
         <p:spPr>
           <a:xfrm>
             <a:off x="1060704" y="4096512"/>
-            <a:ext cx="3108960" cy="201168"/>
+            <a:ext cx="3383280" cy="201168"/>
           </a:xfrm>
           <a:prstGeom prst="rect">
             <a:avLst/>
@@ -11314,15 +11349,15 @@
               <a:buNone/>
             </a:pPr>
             <a:r>
-              <a:rPr lang="en-US" sz="1100" dirty="0">
-                <a:solidFill>
-                  <a:srgbClr val="1A1A1A"/>
-                </a:solidFill>
-                <a:latin typeface="맑은 고딕" pitchFamily="34" charset="0"/>
-                <a:ea typeface="맑은 고딕" pitchFamily="34" charset="-122"/>
-                <a:cs typeface="맑은 고딕" pitchFamily="34" charset="-120"/>
-              </a:rPr>
-              <a:t>(N −19,340,  E +5,155,  D −10) m</a:t>
+              <a:rPr lang="en-US" sz="1000" dirty="0">
+                <a:solidFill>
+                  <a:srgbClr val="1A1A1A"/>
+                </a:solidFill>
+                <a:latin typeface="맑은 고딕" pitchFamily="34" charset="0"/>
+                <a:ea typeface="맑은 고딕" pitchFamily="34" charset="-122"/>
+                <a:cs typeface="맑은 고딕" pitchFamily="34" charset="-120"/>
+              </a:rPr>
+              <a:t>(N −5,197.59,   E +19,297.30,   D −10.00) m</a:t>
             </a:r>
             <a:endParaRPr lang="en-US" sz="1100" dirty="0"/>
           </a:p>
@@ -11376,7 +11411,7 @@
         <p:spPr>
           <a:xfrm>
             <a:off x="5029200" y="4096512"/>
-            <a:ext cx="3108960" cy="201168"/>
+            <a:ext cx="3383280" cy="201168"/>
           </a:xfrm>
           <a:prstGeom prst="rect">
             <a:avLst/>
@@ -11392,15 +11427,15 @@
               <a:buNone/>
             </a:pPr>
             <a:r>
-              <a:rPr lang="en-US" sz="1100" dirty="0">
-                <a:solidFill>
-                  <a:srgbClr val="1A1A1A"/>
-                </a:solidFill>
-                <a:latin typeface="맑은 고딕" pitchFamily="34" charset="0"/>
-                <a:ea typeface="맑은 고딕" pitchFamily="34" charset="-122"/>
-                <a:cs typeface="맑은 고딕" pitchFamily="34" charset="-120"/>
-              </a:rPr>
-              <a:t>(E +5,155,  N −19,340,  U +10) m</a:t>
+              <a:rPr lang="en-US" sz="1000" dirty="0">
+                <a:solidFill>
+                  <a:srgbClr val="1A1A1A"/>
+                </a:solidFill>
+                <a:latin typeface="맑은 고딕" pitchFamily="34" charset="0"/>
+                <a:ea typeface="맑은 고딕" pitchFamily="34" charset="-122"/>
+                <a:cs typeface="맑은 고딕" pitchFamily="34" charset="-120"/>
+              </a:rPr>
+              <a:t>(E +19,297.30,   N −5,197.59,   U +10.00) m</a:t>
             </a:r>
             <a:endParaRPr lang="en-US" sz="1100" dirty="0"/>
           </a:p>
@@ -12578,8 +12613,8 @@
         </p:nvSpPr>
         <p:spPr>
           <a:xfrm>
-            <a:off x="9692640" y="4937760"/>
-            <a:ext cx="1517904" cy="310896"/>
+            <a:off x="9381744" y="4937760"/>
+            <a:ext cx="1883664" cy="365760"/>
           </a:xfrm>
           <a:prstGeom prst="rect">
             <a:avLst/>
@@ -12601,7 +12636,7 @@
               <a:buNone/>
             </a:pPr>
             <a:r>
-              <a:rPr lang="en-US" sz="700" dirty="0">
+              <a:rPr lang="en-US" sz="650" dirty="0">
                 <a:solidFill>
                   <a:srgbClr val="555555"/>
                 </a:solidFill>
@@ -12609,7 +12644,7 @@
                 <a:ea typeface="맑은 고딕" pitchFamily="34" charset="-122"/>
                 <a:cs typeface="맑은 고딕" pitchFamily="34" charset="-120"/>
               </a:rPr>
-              <a:t>줄임말 : 세 회전행렬의 곱을 C_ned←body 로 쓴다</a:t>
+              <a:t>줄임말 : 세 회전행렬의 곱 = C_ned←body</a:t>
             </a:r>
             <a:endParaRPr lang="en-US" sz="700" dirty="0"/>
           </a:p>
@@ -12621,7 +12656,7 @@
               <a:buNone/>
             </a:pPr>
             <a:r>
-              <a:rPr lang="en-US" sz="700" dirty="0">
+              <a:rPr lang="en-US" sz="650" dirty="0">
                 <a:solidFill>
                   <a:srgbClr val="555555"/>
                 </a:solidFill>
@@ -12629,7 +12664,7 @@
                 <a:ea typeface="맑은 고딕" pitchFamily="34" charset="-122"/>
                 <a:cs typeface="맑은 고딕" pitchFamily="34" charset="-120"/>
               </a:rPr>
-              <a:t>'동체 좌표를 NED 좌표로 바꾸는 행렬' — 설계 장에서 이 줄임말을 쓴다</a:t>
+              <a:t>'동체 → NED 변환 행렬' — 설계 장에서 이 줄임말을 쓴다</a:t>
             </a:r>
             <a:endParaRPr lang="en-US" sz="700" dirty="0"/>
           </a:p>
@@ -15000,7 +15035,7 @@
         </p:nvSpPr>
         <p:spPr>
           <a:xfrm>
-            <a:off x="5760720" y="5248656"/>
+            <a:off x="5760720" y="5193792"/>
             <a:ext cx="1188720" cy="201168"/>
           </a:xfrm>
           <a:prstGeom prst="rect">
@@ -15482,7 +15517,7 @@
         </p:nvSpPr>
         <p:spPr>
           <a:xfrm>
-            <a:off x="5047488" y="5413248"/>
+            <a:off x="5047488" y="5449824"/>
             <a:ext cx="2468880" cy="274320"/>
           </a:xfrm>
           <a:prstGeom prst="rect">
@@ -17563,7 +17598,7 @@
         </p:nvSpPr>
         <p:spPr>
           <a:xfrm>
-            <a:off x="4480560" y="3657600"/>
+            <a:off x="3749039" y="3730752"/>
             <a:ext cx="1737360" cy="201168"/>
           </a:xfrm>
           <a:prstGeom prst="rect">
@@ -17588,7 +17623,7 @@
                 <a:ea typeface="맑은 고딕" pitchFamily="34" charset="-122"/>
                 <a:cs typeface="맑은 고딕" pitchFamily="34" charset="-120"/>
               </a:rPr>
-              <a:t>G   OG = e²R_N sinφ</a:t>
+              <a:t>G  ·  OG = e² · RN · sinφ</a:t>
             </a:r>
             <a:endParaRPr lang="en-US" sz="700" dirty="0"/>
           </a:p>
@@ -17774,15 +17809,15 @@
               <a:buNone/>
             </a:pPr>
             <a:r>
-              <a:rPr lang="en-US" sz="1000" b="1" dirty="0">
-                <a:solidFill>
-                  <a:srgbClr val="1A1A1A"/>
-                </a:solidFill>
-                <a:latin typeface="맑은 고딕" pitchFamily="34" charset="0"/>
-                <a:ea typeface="맑은 고딕" pitchFamily="34" charset="-122"/>
-                <a:cs typeface="맑은 고딕" pitchFamily="34" charset="-120"/>
-              </a:rPr>
-              <a:t>LLA — Latitude · Longitude · Altitude ( 이번 과제 O )</a:t>
+              <a:rPr lang="en-US" sz="900" b="1" dirty="0">
+                <a:solidFill>
+                  <a:srgbClr val="1A1A1A"/>
+                </a:solidFill>
+                <a:latin typeface="맑은 고딕" pitchFamily="34" charset="0"/>
+                <a:ea typeface="맑은 고딕" pitchFamily="34" charset="-122"/>
+                <a:cs typeface="맑은 고딕" pitchFamily="34" charset="-120"/>
+              </a:rPr>
+              <a:t>LLA — Latitude · Longitude · Altitude  (이번 과제 O)</a:t>
             </a:r>
             <a:endParaRPr lang="en-US" sz="1000" dirty="0"/>
           </a:p>
@@ -17961,7 +17996,7 @@
                 <a:ea typeface="맑은 고딕" pitchFamily="34" charset="-122"/>
                 <a:cs typeface="맑은 고딕" pitchFamily="34" charset="-120"/>
               </a:rPr>
-              <a:t>a = 6,378,137.0 m,   b = 6,356,752.3 m,   1/f = 298.257223563</a:t>
+              <a:t>a = 6,378,137.0 m ,   b = 6,356,752.3 m</a:t>
             </a:r>
             <a:endParaRPr lang="en-US" sz="1200" dirty="0"/>
           </a:p>
@@ -17981,7 +18016,27 @@
                 <a:ea typeface="맑은 고딕" pitchFamily="34" charset="-122"/>
                 <a:cs typeface="맑은 고딕" pitchFamily="34" charset="-120"/>
               </a:rPr>
-              <a:t>e² = 1 − b²/a² = 0.00669438 — 아래 공식의 RN 에 들어가는 상수</a:t>
+              <a:t>1/f = 298.257223563</a:t>
+            </a:r>
+            <a:endParaRPr lang="en-US" sz="1200" dirty="0"/>
+          </a:p>
+          <a:p>
+            <a:pPr marL="0" indent="0" algn="l">
+              <a:lnSpc>
+                <a:spcPct val="105000"/>
+              </a:lnSpc>
+              <a:buNone/>
+            </a:pPr>
+            <a:r>
+              <a:rPr lang="en-US" sz="850" dirty="0">
+                <a:solidFill>
+                  <a:srgbClr val="1A1A1A"/>
+                </a:solidFill>
+                <a:latin typeface="맑은 고딕" pitchFamily="34" charset="0"/>
+                <a:ea typeface="맑은 고딕" pitchFamily="34" charset="-122"/>
+                <a:cs typeface="맑은 고딕" pitchFamily="34" charset="-120"/>
+              </a:rPr>
+              <a:t>e² = 1 − b²/a² = 0.00669438   (RN 에 들어가는 상수)</a:t>
             </a:r>
             <a:endParaRPr lang="en-US" sz="1200" dirty="0"/>
           </a:p>
@@ -18035,7 +18090,7 @@
         <p:spPr>
           <a:xfrm>
             <a:off x="914400" y="4919472"/>
-            <a:ext cx="10360152" cy="969264"/>
+            <a:ext cx="10360152" cy="1042415"/>
           </a:xfrm>
           <a:prstGeom prst="roundRect">
             <a:avLst>
@@ -18187,7 +18242,7 @@
         <p:spPr>
           <a:xfrm>
             <a:off x="3639312" y="4974336"/>
-            <a:ext cx="1316736" cy="274320"/>
+            <a:ext cx="1828800" cy="274320"/>
           </a:xfrm>
           <a:prstGeom prst="roundRect">
             <a:avLst>
@@ -18214,7 +18269,7 @@
         <p:spPr>
           <a:xfrm>
             <a:off x="3639312" y="4974336"/>
-            <a:ext cx="1316736" cy="274320"/>
+            <a:ext cx="1828800" cy="274320"/>
           </a:xfrm>
           <a:prstGeom prst="rect">
             <a:avLst/>
@@ -18252,8 +18307,8 @@
         </p:nvSpPr>
         <p:spPr>
           <a:xfrm>
-            <a:off x="3639312" y="5276088"/>
-            <a:ext cx="1316736" cy="201168"/>
+            <a:off x="3639312" y="5266944"/>
+            <a:ext cx="1828800" cy="182880"/>
           </a:xfrm>
           <a:prstGeom prst="rect">
             <a:avLst/>
@@ -18291,7 +18346,7 @@
         </p:nvSpPr>
         <p:spPr>
           <a:xfrm>
-            <a:off x="4974336" y="5111496"/>
+            <a:off x="5559552" y="5111496"/>
             <a:ext cx="146304" cy="0"/>
           </a:xfrm>
           <a:prstGeom prst="line">
@@ -18316,8 +18371,8 @@
         </p:nvSpPr>
         <p:spPr>
           <a:xfrm>
-            <a:off x="5157216" y="4937760"/>
-            <a:ext cx="2231136" cy="347472"/>
+            <a:off x="5742432" y="4937760"/>
+            <a:ext cx="2468880" cy="347472"/>
           </a:xfrm>
           <a:prstGeom prst="roundRect">
             <a:avLst>
@@ -18343,8 +18398,8 @@
         </p:nvSpPr>
         <p:spPr>
           <a:xfrm>
-            <a:off x="5157216" y="4937760"/>
-            <a:ext cx="2231136" cy="347472"/>
+            <a:off x="5742432" y="4937760"/>
+            <a:ext cx="2468880" cy="347472"/>
           </a:xfrm>
           <a:prstGeom prst="rect">
             <a:avLst/>
@@ -18371,8 +18426,8 @@
         </p:nvSpPr>
         <p:spPr>
           <a:xfrm>
-            <a:off x="5193792" y="4965192"/>
-            <a:ext cx="2157984" cy="310896"/>
+            <a:off x="5779008" y="4965192"/>
+            <a:ext cx="2395728" cy="310896"/>
           </a:xfrm>
           <a:prstGeom prst="rect">
             <a:avLst/>
@@ -18459,7 +18514,7 @@
         </p:nvSpPr>
         <p:spPr>
           <a:xfrm>
-            <a:off x="7406640" y="5111496"/>
+            <a:off x="8302752" y="5111496"/>
             <a:ext cx="146304" cy="0"/>
           </a:xfrm>
           <a:prstGeom prst="line">
@@ -18484,7 +18539,7 @@
         </p:nvSpPr>
         <p:spPr>
           <a:xfrm>
-            <a:off x="7589520" y="4992624"/>
+            <a:off x="8485632" y="4992624"/>
             <a:ext cx="1133856" cy="237744"/>
           </a:xfrm>
           <a:prstGeom prst="roundRect">
@@ -18511,7 +18566,7 @@
         </p:nvSpPr>
         <p:spPr>
           <a:xfrm>
-            <a:off x="7589520" y="4992624"/>
+            <a:off x="8485632" y="4992624"/>
             <a:ext cx="1133856" cy="237744"/>
           </a:xfrm>
           <a:prstGeom prst="rect">
@@ -18550,7 +18605,7 @@
         </p:nvSpPr>
         <p:spPr>
           <a:xfrm>
-            <a:off x="7589520" y="5257800"/>
+            <a:off x="8485632" y="5257800"/>
             <a:ext cx="1133856" cy="201168"/>
           </a:xfrm>
           <a:prstGeom prst="rect">
@@ -18589,7 +18644,7 @@
         </p:nvSpPr>
         <p:spPr>
           <a:xfrm>
-            <a:off x="1097280" y="5504688"/>
+            <a:off x="1097280" y="5577840"/>
             <a:ext cx="1280160" cy="201168"/>
           </a:xfrm>
           <a:prstGeom prst="rect">
@@ -18628,7 +18683,7 @@
         </p:nvSpPr>
         <p:spPr>
           <a:xfrm>
-            <a:off x="2432304" y="5394960"/>
+            <a:off x="2432304" y="5468112"/>
             <a:ext cx="1005840" cy="237744"/>
           </a:xfrm>
           <a:prstGeom prst="roundRect">
@@ -18655,7 +18710,7 @@
         </p:nvSpPr>
         <p:spPr>
           <a:xfrm>
-            <a:off x="2432304" y="5394960"/>
+            <a:off x="2432304" y="5468112"/>
             <a:ext cx="1005840" cy="237744"/>
           </a:xfrm>
           <a:prstGeom prst="rect">
@@ -18694,7 +18749,7 @@
         </p:nvSpPr>
         <p:spPr>
           <a:xfrm>
-            <a:off x="3456432" y="5513832"/>
+            <a:off x="3456432" y="5586984"/>
             <a:ext cx="146304" cy="0"/>
           </a:xfrm>
           <a:prstGeom prst="line">
@@ -18719,7 +18774,7 @@
         </p:nvSpPr>
         <p:spPr>
           <a:xfrm>
-            <a:off x="3639312" y="5394960"/>
+            <a:off x="3639312" y="5468112"/>
             <a:ext cx="969264" cy="237744"/>
           </a:xfrm>
           <a:prstGeom prst="roundRect">
@@ -18746,7 +18801,7 @@
         </p:nvSpPr>
         <p:spPr>
           <a:xfrm>
-            <a:off x="3639312" y="5394960"/>
+            <a:off x="3639312" y="5468112"/>
             <a:ext cx="969264" cy="237744"/>
           </a:xfrm>
           <a:prstGeom prst="rect">
@@ -18785,7 +18840,7 @@
         </p:nvSpPr>
         <p:spPr>
           <a:xfrm>
-            <a:off x="4626864" y="5513832"/>
+            <a:off x="4626864" y="5586984"/>
             <a:ext cx="128016" cy="0"/>
           </a:xfrm>
           <a:prstGeom prst="line">
@@ -18810,7 +18865,7 @@
         </p:nvSpPr>
         <p:spPr>
           <a:xfrm>
-            <a:off x="4773168" y="5394960"/>
+            <a:off x="4773168" y="5468112"/>
             <a:ext cx="1097280" cy="237744"/>
           </a:xfrm>
           <a:prstGeom prst="roundRect">
@@ -18837,7 +18892,7 @@
         </p:nvSpPr>
         <p:spPr>
           <a:xfrm>
-            <a:off x="4773168" y="5394960"/>
+            <a:off x="4773168" y="5468112"/>
             <a:ext cx="1097280" cy="237744"/>
           </a:xfrm>
           <a:prstGeom prst="rect">
@@ -18876,7 +18931,7 @@
         </p:nvSpPr>
         <p:spPr>
           <a:xfrm>
-            <a:off x="5888736" y="5513832"/>
+            <a:off x="5888736" y="5586984"/>
             <a:ext cx="128016" cy="0"/>
           </a:xfrm>
           <a:prstGeom prst="line">
@@ -18901,7 +18956,7 @@
         </p:nvSpPr>
         <p:spPr>
           <a:xfrm>
-            <a:off x="6035040" y="5394960"/>
+            <a:off x="6035040" y="5468112"/>
             <a:ext cx="1700784" cy="237744"/>
           </a:xfrm>
           <a:prstGeom prst="roundRect">
@@ -18928,7 +18983,7 @@
         </p:nvSpPr>
         <p:spPr>
           <a:xfrm>
-            <a:off x="6035040" y="5394960"/>
+            <a:off x="6035040" y="5468112"/>
             <a:ext cx="1700784" cy="237744"/>
           </a:xfrm>
           <a:prstGeom prst="rect">
@@ -18967,7 +19022,7 @@
         </p:nvSpPr>
         <p:spPr>
           <a:xfrm>
-            <a:off x="7754112" y="5513832"/>
+            <a:off x="7754112" y="5586984"/>
             <a:ext cx="128016" cy="0"/>
           </a:xfrm>
           <a:prstGeom prst="line">
@@ -18992,7 +19047,7 @@
         </p:nvSpPr>
         <p:spPr>
           <a:xfrm>
-            <a:off x="7900416" y="5394960"/>
+            <a:off x="7900416" y="5468112"/>
             <a:ext cx="1188720" cy="237744"/>
           </a:xfrm>
           <a:prstGeom prst="roundRect">
@@ -19019,7 +19074,7 @@
         </p:nvSpPr>
         <p:spPr>
           <a:xfrm>
-            <a:off x="7900416" y="5394960"/>
+            <a:off x="7900416" y="5468112"/>
             <a:ext cx="1188720" cy="237744"/>
           </a:xfrm>
           <a:prstGeom prst="rect">
@@ -19058,7 +19113,7 @@
         </p:nvSpPr>
         <p:spPr>
           <a:xfrm>
-            <a:off x="9107424" y="5513832"/>
+            <a:off x="9107424" y="5586984"/>
             <a:ext cx="128016" cy="0"/>
           </a:xfrm>
           <a:prstGeom prst="line">
@@ -19083,7 +19138,7 @@
         </p:nvSpPr>
         <p:spPr>
           <a:xfrm>
-            <a:off x="9253728" y="5394960"/>
+            <a:off x="9253728" y="5468112"/>
             <a:ext cx="1005840" cy="237744"/>
           </a:xfrm>
           <a:prstGeom prst="roundRect">
@@ -19110,7 +19165,7 @@
         </p:nvSpPr>
         <p:spPr>
           <a:xfrm>
-            <a:off x="9253728" y="5394960"/>
+            <a:off x="9253728" y="5468112"/>
             <a:ext cx="1005840" cy="237744"/>
           </a:xfrm>
           <a:prstGeom prst="rect">
@@ -19149,8 +19204,8 @@
         </p:nvSpPr>
         <p:spPr>
           <a:xfrm>
-            <a:off x="10296144" y="5614416"/>
-            <a:ext cx="969264" cy="201168"/>
+            <a:off x="9253728" y="5742432"/>
+            <a:ext cx="2011680" cy="201168"/>
           </a:xfrm>
           <a:prstGeom prst="rect">
             <a:avLst/>
@@ -19166,7 +19221,7 @@
               <a:buNone/>
             </a:pPr>
             <a:r>
-              <a:rPr lang="en-US" sz="600" dirty="0">
+              <a:rPr lang="en-US" sz="650" dirty="0">
                 <a:solidFill>
                   <a:srgbClr val="555555"/>
                 </a:solidFill>
@@ -19174,7 +19229,7 @@
                 <a:ea typeface="맑은 고딕" pitchFamily="34" charset="-122"/>
                 <a:cs typeface="맑은 고딕" pitchFamily="34" charset="-120"/>
               </a:rPr>
-              <a:t>λ = arctan(Y / X)  바로 나온다</a:t>
+              <a:t>λ = atan2(Y, X) — 바로 나온다</a:t>
             </a:r>
             <a:endParaRPr lang="en-US" sz="600" dirty="0"/>
           </a:p>
@@ -19188,7 +19243,7 @@
         </p:nvSpPr>
         <p:spPr>
           <a:xfrm>
-            <a:off x="5760720" y="5669280"/>
+            <a:off x="5760720" y="5742432"/>
             <a:ext cx="2194560" cy="201168"/>
           </a:xfrm>
           <a:prstGeom prst="rect">
@@ -19446,7 +19501,7 @@
                 <a:ea typeface="맑은 고딕" pitchFamily="34" charset="-122"/>
                 <a:cs typeface="맑은 고딕" pitchFamily="34" charset="-120"/>
               </a:rPr>
-              <a:t>회전은 설치 방위와 INS(자세, 위경도)가, 이동은 레버암과 INS(배 위치)가 공급한다. 이 구분이 그대로 오차의 출처 목록이 된다.</a:t>
+              <a:t>회전은 설치 방위와 INS 자세가, 이동은 레버암과 INS 위치가 공급한다 — 그대로 오차의 출처 목록이 된다.</a:t>
             </a:r>
             <a:endParaRPr lang="en-US" sz="1450" dirty="0"/>
           </a:p>
@@ -20178,7 +20233,7 @@
                 <a:ea typeface="맑은 고딕" pitchFamily="34" charset="-122"/>
                 <a:cs typeface="맑은 고딕" pitchFamily="34" charset="-120"/>
               </a:rPr>
-              <a:t>C_body ← ant = Rz(설치방위)  ·  Ry(백틸트)  +  레버암</a:t>
+              <a:t>p동체 = Rz(설치방위) · Ry(백틸트) · A · p안테나  +  레버암</a:t>
             </a:r>
             <a:endParaRPr lang="en-US" sz="1250" dirty="0"/>
           </a:p>
@@ -20198,7 +20253,7 @@
                 <a:ea typeface="맑은 고딕" pitchFamily="34" charset="-122"/>
                 <a:cs typeface="맑은 고딕" pitchFamily="34" charset="-120"/>
               </a:rPr>
-              <a:t>회전+이동   설치 도면이 공급 · 고정형이라 상수</a:t>
+              <a:t>회전+이동   설치 도면이 공급 · 고정형이라 상수 · A 는 축 맞춤 상수 행렬</a:t>
             </a:r>
             <a:endParaRPr lang="en-US" sz="1250" dirty="0"/>
           </a:p>
@@ -20263,7 +20318,7 @@
                 <a:ea typeface="맑은 고딕" pitchFamily="34" charset="-122"/>
                 <a:cs typeface="맑은 고딕" pitchFamily="34" charset="-120"/>
               </a:rPr>
-              <a:t>회전   INS 자세가 공급 · 매 순간 변함 · 곱하는 순서는 yaw → pitch → roll</a:t>
+              <a:t>회전   INS 자세가 공급 · 매 순간 변함 · 벡터에 가까운 Rx(roll) 부터 적용된다</a:t>
             </a:r>
             <a:endParaRPr lang="en-US" sz="1250" dirty="0"/>
           </a:p>
@@ -20308,7 +20363,7 @@
                 <a:ea typeface="맑은 고딕" pitchFamily="34" charset="-122"/>
                 <a:cs typeface="맑은 고딕" pitchFamily="34" charset="-120"/>
               </a:rPr>
-              <a:t>C_ecef ← ned(위도, 경도)  +  배의 ECEF 위치</a:t>
+              <a:t>p_ECEF = C_ecef←ned(위도, 경도) · p_NED  +  배의 ECEF 위치</a:t>
             </a:r>
             <a:endParaRPr lang="en-US" sz="1250" dirty="0"/>
           </a:p>
@@ -21835,7 +21890,7 @@
                           <a:ea typeface="맑은 고딕" pitchFamily="34" charset="-122"/>
                           <a:cs typeface="맑은 고딕" pitchFamily="34" charset="-120"/>
                         </a:rPr>
-                        <a:t>설치 방위 90°, 백틸트 0°, 레버암 (-30, 0, -10) m</a:t>
+                        <a:t>설치 방위 90°, 백틸트 0°, 레버암 (−30, 0, −10) m</a:t>
                       </a:r>
                       <a:endParaRPr lang="en-US" sz="1100" dirty="0">
                         <a:latin typeface="맑은 고딕" charset="0"/>
@@ -22942,7 +22997,7 @@
                 <a:ea typeface="맑은 고딕" pitchFamily="34" charset="-122"/>
                 <a:cs typeface="맑은 고딕" pitchFamily="34" charset="-120"/>
               </a:rPr>
-              <a:t>주어진 조건 여섯 가지와, 그것이 설계를 어떻게 묶는가</a:t>
+              <a:t>여섯 단계, 각 단계에서 왜 그 좌표계를 쓰는가</a:t>
             </a:r>
             <a:endParaRPr lang="en-US" sz="1450" dirty="0"/>
           </a:p>
@@ -26060,15 +26115,15 @@
               <a:buNone/>
             </a:pPr>
             <a:r>
-              <a:rPr lang="en-US" sz="1100" dirty="0">
-                <a:solidFill>
-                  <a:srgbClr val="1A1A1A"/>
-                </a:solidFill>
-                <a:latin typeface="맑은 고딕" pitchFamily="34" charset="0"/>
-                <a:ea typeface="맑은 고딕" pitchFamily="34" charset="-122"/>
-                <a:cs typeface="맑은 고딕" pitchFamily="34" charset="-120"/>
-              </a:rPr>
-              <a:t>p 동체 = Rz(90°)·Ry(0°)·A·p 안테나 + 레버암    A = Rz(−90°)·Rx(−90°) ( 축 맞춤 )</a:t>
+              <a:rPr lang="en-US" sz="1000" dirty="0">
+                <a:solidFill>
+                  <a:srgbClr val="1A1A1A"/>
+                </a:solidFill>
+                <a:latin typeface="맑은 고딕" pitchFamily="34" charset="0"/>
+                <a:ea typeface="맑은 고딕" pitchFamily="34" charset="-122"/>
+                <a:cs typeface="맑은 고딕" pitchFamily="34" charset="-120"/>
+              </a:rPr>
+              <a:t>p 동체 = Rz(90°)·Ry(0°)·A·p 안테나 + 레버암     ( A = Rz(−90°)·Rx(−90°) 축 맞춤,   아래 3×3 = Rz(90°)·Ry(0°)·A )</a:t>
             </a:r>
             <a:endParaRPr lang="en-US" sz="1100" dirty="0"/>
           </a:p>
@@ -27534,7 +27589,7 @@
                 <a:ea typeface="맑은 고딕" pitchFamily="34" charset="-122"/>
                 <a:cs typeface="맑은 고딕" pitchFamily="34" charset="-120"/>
               </a:rPr>
-              <a:t>방위 = 180° − arctan(E/N) = 105.074°</a:t>
+              <a:t>방위 = atan2(E, N) = 105.074°</a:t>
             </a:r>
             <a:endParaRPr lang="en-US" sz="850" dirty="0"/>
           </a:p>
@@ -27899,7 +27954,7 @@
                 <a:ea typeface="맑은 고딕" pitchFamily="34" charset="-122"/>
                 <a:cs typeface="맑은 고딕" pitchFamily="34" charset="-120"/>
               </a:rPr>
-              <a:t>① RN = a / √(1 − e² sin²φ) = 6,378,137 / √(1 − 0.00669438 × 0.5935²) = 6,385,671.08 m</a:t>
+              <a:t>① RN = a / √(1 − e² sin²φ) = 6,378,137 / √(1 − 0.00669438 × 0.5935313²) = 6,385,671.08 m</a:t>
             </a:r>
             <a:endParaRPr lang="en-US" sz="1000" dirty="0"/>
           </a:p>
@@ -28589,7 +28644,7 @@
                 <a:ea typeface="맑은 고딕" pitchFamily="34" charset="-122"/>
                 <a:cs typeface="맑은 고딕" pitchFamily="34" charset="-120"/>
               </a:rPr>
-              <a:t>③ P 표적 = P 배 + C · pNED = (  −3,125,892.50,   +4,093,774.96,   +3,749,164.21 ) m</a:t>
+              <a:t>③ P 표적 = P 배 + C · pNED = (  −3,132,053.79,   +4,078,527.19,   +3,760,545.95 ) m</a:t>
             </a:r>
             <a:endParaRPr lang="en-US" sz="1000" dirty="0"/>
           </a:p>
@@ -28741,7 +28796,7 @@
                 <a:ea typeface="맑은 고딕" pitchFamily="34" charset="-122"/>
                 <a:cs typeface="맑은 고딕" pitchFamily="34" charset="-120"/>
               </a:rPr>
-              <a:t>경도 λ = arctan(Y / X) = arctan( 4,078,527.19 / −3,132,053.79 ) = 127.522008°      ( X &lt; 0, Y &gt; 0 → 2 사분면 )</a:t>
+              <a:t>경도 λ = atan2(Y, X) = atan2( +4,078,527.19,  −3,132,053.79 ) = 127.522008°      ( X &lt; 0, Y &gt; 0 → 2 사분면 )</a:t>
             </a:r>
             <a:endParaRPr lang="en-US" sz="1000" dirty="0"/>
           </a:p>
@@ -29264,7 +29319,7 @@
                 <a:ea typeface="맑은 고딕" pitchFamily="34" charset="-122"/>
                 <a:cs typeface="맑은 고딕" pitchFamily="34" charset="-120"/>
               </a:rPr>
-              <a:t>표적 LLA ( 36.360967°N,     127.522008°E,     41.2824 m )</a:t>
+              <a:t>표적 LLA ( 36.360967176°N,   127.522008441°E,   41.2824 m )</a:t>
             </a:r>
             <a:endParaRPr lang="en-US" sz="1150" dirty="0"/>
           </a:p>
@@ -29279,7 +29334,7 @@
         <p:spPr>
           <a:xfrm>
             <a:off x="1298448" y="3136392"/>
-            <a:ext cx="5669280" cy="201168"/>
+            <a:ext cx="1737360" cy="201168"/>
           </a:xfrm>
           <a:prstGeom prst="rect">
             <a:avLst/>
@@ -29317,8 +29372,8 @@
         </p:nvSpPr>
         <p:spPr>
           <a:xfrm>
-            <a:off x="8321040" y="3136392"/>
-            <a:ext cx="2743200" cy="201168"/>
+            <a:off x="9015984" y="3136392"/>
+            <a:ext cx="2194560" cy="201168"/>
           </a:xfrm>
           <a:prstGeom prst="rect">
             <a:avLst/>
@@ -29334,7 +29389,7 @@
               <a:buNone/>
             </a:pPr>
             <a:r>
-              <a:rPr lang="en-US" sz="1100" dirty="0">
+              <a:rPr lang="en-US" sz="1000" dirty="0">
                 <a:solidFill>
                   <a:srgbClr val="555555"/>
                 </a:solidFill>
@@ -29357,7 +29412,7 @@
         <p:spPr>
           <a:xfrm>
             <a:off x="1298448" y="3438144"/>
-            <a:ext cx="5669280" cy="201168"/>
+            <a:ext cx="1737360" cy="201168"/>
           </a:xfrm>
           <a:prstGeom prst="rect">
             <a:avLst/>
@@ -29395,8 +29450,8 @@
         </p:nvSpPr>
         <p:spPr>
           <a:xfrm>
-            <a:off x="3127248" y="3438144"/>
-            <a:ext cx="5029200" cy="201168"/>
+            <a:off x="3035808" y="3438144"/>
+            <a:ext cx="5852160" cy="201168"/>
           </a:xfrm>
           <a:prstGeom prst="rect">
             <a:avLst/>
@@ -29412,6 +29467,84 @@
               <a:buNone/>
             </a:pPr>
             <a:r>
+              <a:rPr lang="en-US" sz="1050" dirty="0">
+                <a:solidFill>
+                  <a:srgbClr val="1A1A1A"/>
+                </a:solidFill>
+                <a:latin typeface="맑은 고딕" pitchFamily="34" charset="0"/>
+                <a:ea typeface="맑은 고딕" pitchFamily="34" charset="-122"/>
+                <a:cs typeface="맑은 고딕" pitchFamily="34" charset="-120"/>
+              </a:rPr>
+              <a:t>C_ecef←ned^T × ( 표적 − 배 )  =  ( −5,197.59,  +19,297.30,  −10.00 ) m</a:t>
+            </a:r>
+            <a:endParaRPr lang="en-US" sz="1150" dirty="0"/>
+          </a:p>
+        </p:txBody>
+      </p:sp>
+      <p:sp>
+        <p:nvSpPr>
+          <p:cNvPr id="16" name="Text 14"/>
+          <p:cNvSpPr txBox="1"/>
+          <p:nvPr/>
+        </p:nvSpPr>
+        <p:spPr>
+          <a:xfrm>
+            <a:off x="9015984" y="3438144"/>
+            <a:ext cx="2194560" cy="201168"/>
+          </a:xfrm>
+          <a:prstGeom prst="rect">
+            <a:avLst/>
+          </a:prstGeom>
+          <a:noFill/>
+          <a:ln/>
+        </p:spPr>
+        <p:txBody>
+          <a:bodyPr wrap="square" lIns="0" tIns="0" rIns="0" bIns="0" rtlCol="0" anchor="ctr"/>
+          <a:lstStyle/>
+          <a:p>
+            <a:pPr marL="0" indent="0" algn="l">
+              <a:buNone/>
+            </a:pPr>
+            <a:r>
+              <a:rPr lang="en-US" sz="1000" dirty="0">
+                <a:solidFill>
+                  <a:srgbClr val="555555"/>
+                </a:solidFill>
+                <a:latin typeface="맑은 고딕" pitchFamily="34" charset="0"/>
+                <a:ea typeface="맑은 고딕" pitchFamily="34" charset="-122"/>
+                <a:cs typeface="맑은 고딕" pitchFamily="34" charset="-120"/>
+              </a:rPr>
+              <a:t>// 전치 + 빼기</a:t>
+            </a:r>
+            <a:endParaRPr lang="en-US" sz="1100" dirty="0"/>
+          </a:p>
+        </p:txBody>
+      </p:sp>
+      <p:sp>
+        <p:nvSpPr>
+          <p:cNvPr id="17" name="Text 15"/>
+          <p:cNvSpPr txBox="1"/>
+          <p:nvPr/>
+        </p:nvSpPr>
+        <p:spPr>
+          <a:xfrm>
+            <a:off x="1298448" y="3739896"/>
+            <a:ext cx="1737360" cy="201168"/>
+          </a:xfrm>
+          <a:prstGeom prst="rect">
+            <a:avLst/>
+          </a:prstGeom>
+          <a:noFill/>
+          <a:ln/>
+        </p:spPr>
+        <p:txBody>
+          <a:bodyPr wrap="square" lIns="0" tIns="0" rIns="0" bIns="0" rtlCol="0" anchor="ctr"/>
+          <a:lstStyle/>
+          <a:p>
+            <a:pPr marL="0" indent="0" algn="l">
+              <a:buNone/>
+            </a:pPr>
+            <a:r>
               <a:rPr lang="en-US" sz="1150" dirty="0">
                 <a:solidFill>
                   <a:srgbClr val="1A1A1A"/>
@@ -29420,7 +29553,7 @@
                 <a:ea typeface="맑은 고딕" pitchFamily="34" charset="-122"/>
                 <a:cs typeface="맑은 고딕" pitchFamily="34" charset="-120"/>
               </a:rPr>
-              <a:t>C_ecef←ned^T × ( 표적 − 배 )</a:t>
+              <a:t>   → 동체</a:t>
             </a:r>
             <a:endParaRPr lang="en-US" sz="1150" dirty="0"/>
           </a:p>
@@ -29428,14 +29561,14 @@
       </p:sp>
       <p:sp>
         <p:nvSpPr>
-          <p:cNvPr id="16" name="Text 14"/>
-          <p:cNvSpPr txBox="1"/>
-          <p:nvPr/>
-        </p:nvSpPr>
-        <p:spPr>
-          <a:xfrm>
-            <a:off x="8321040" y="3438144"/>
-            <a:ext cx="2743200" cy="201168"/>
+          <p:cNvPr id="18" name="Text 16"/>
+          <p:cNvSpPr txBox="1"/>
+          <p:nvPr/>
+        </p:nvSpPr>
+        <p:spPr>
+          <a:xfrm>
+            <a:off x="3035808" y="3739896"/>
+            <a:ext cx="5852160" cy="201168"/>
           </a:xfrm>
           <a:prstGeom prst="rect">
             <a:avLst/>
@@ -29451,7 +29584,46 @@
               <a:buNone/>
             </a:pPr>
             <a:r>
-              <a:rPr lang="en-US" sz="1100" dirty="0">
+              <a:rPr lang="en-US" sz="1050" dirty="0">
+                <a:solidFill>
+                  <a:srgbClr val="1A1A1A"/>
+                </a:solidFill>
+                <a:latin typeface="맑은 고딕" pitchFamily="34" charset="0"/>
+                <a:ea typeface="맑은 고딕" pitchFamily="34" charset="-122"/>
+                <a:cs typeface="맑은 고딕" pitchFamily="34" charset="-120"/>
+              </a:rPr>
+              <a:t>C_ned←body^T × p_NED  =  ( +9,970.00,  +17,320.51,  −10.00 ) m</a:t>
+            </a:r>
+            <a:endParaRPr lang="en-US" sz="1150" dirty="0"/>
+          </a:p>
+        </p:txBody>
+      </p:sp>
+      <p:sp>
+        <p:nvSpPr>
+          <p:cNvPr id="19" name="Text 17"/>
+          <p:cNvSpPr txBox="1"/>
+          <p:nvPr/>
+        </p:nvSpPr>
+        <p:spPr>
+          <a:xfrm>
+            <a:off x="9015984" y="3739896"/>
+            <a:ext cx="2194560" cy="201168"/>
+          </a:xfrm>
+          <a:prstGeom prst="rect">
+            <a:avLst/>
+          </a:prstGeom>
+          <a:noFill/>
+          <a:ln/>
+        </p:spPr>
+        <p:txBody>
+          <a:bodyPr wrap="square" lIns="0" tIns="0" rIns="0" bIns="0" rtlCol="0" anchor="ctr"/>
+          <a:lstStyle/>
+          <a:p>
+            <a:pPr marL="0" indent="0" algn="l">
+              <a:buNone/>
+            </a:pPr>
+            <a:r>
+              <a:rPr lang="en-US" sz="1000" dirty="0">
                 <a:solidFill>
                   <a:srgbClr val="555555"/>
                 </a:solidFill>
@@ -29459,6 +29631,123 @@
                 <a:ea typeface="맑은 고딕" pitchFamily="34" charset="-122"/>
                 <a:cs typeface="맑은 고딕" pitchFamily="34" charset="-120"/>
               </a:rPr>
+              <a:t>// 전치</a:t>
+            </a:r>
+            <a:endParaRPr lang="en-US" sz="1100" dirty="0"/>
+          </a:p>
+        </p:txBody>
+      </p:sp>
+      <p:sp>
+        <p:nvSpPr>
+          <p:cNvPr id="20" name="Text 18"/>
+          <p:cNvSpPr txBox="1"/>
+          <p:nvPr/>
+        </p:nvSpPr>
+        <p:spPr>
+          <a:xfrm>
+            <a:off x="1298448" y="4041648"/>
+            <a:ext cx="1737360" cy="201168"/>
+          </a:xfrm>
+          <a:prstGeom prst="rect">
+            <a:avLst/>
+          </a:prstGeom>
+          <a:noFill/>
+          <a:ln/>
+        </p:spPr>
+        <p:txBody>
+          <a:bodyPr wrap="square" lIns="0" tIns="0" rIns="0" bIns="0" rtlCol="0" anchor="ctr"/>
+          <a:lstStyle/>
+          <a:p>
+            <a:pPr marL="0" indent="0" algn="l">
+              <a:buNone/>
+            </a:pPr>
+            <a:r>
+              <a:rPr lang="en-US" sz="1150" dirty="0">
+                <a:solidFill>
+                  <a:srgbClr val="1A1A1A"/>
+                </a:solidFill>
+                <a:latin typeface="맑은 고딕" pitchFamily="34" charset="0"/>
+                <a:ea typeface="맑은 고딕" pitchFamily="34" charset="-122"/>
+                <a:cs typeface="맑은 고딕" pitchFamily="34" charset="-120"/>
+              </a:rPr>
+              <a:t>   → 안테나</a:t>
+            </a:r>
+            <a:endParaRPr lang="en-US" sz="1150" dirty="0"/>
+          </a:p>
+        </p:txBody>
+      </p:sp>
+      <p:sp>
+        <p:nvSpPr>
+          <p:cNvPr id="21" name="Text 19"/>
+          <p:cNvSpPr txBox="1"/>
+          <p:nvPr/>
+        </p:nvSpPr>
+        <p:spPr>
+          <a:xfrm>
+            <a:off x="3035808" y="4041648"/>
+            <a:ext cx="5852160" cy="201168"/>
+          </a:xfrm>
+          <a:prstGeom prst="rect">
+            <a:avLst/>
+          </a:prstGeom>
+          <a:noFill/>
+          <a:ln/>
+        </p:spPr>
+        <p:txBody>
+          <a:bodyPr wrap="square" lIns="0" tIns="0" rIns="0" bIns="0" rtlCol="0" anchor="ctr"/>
+          <a:lstStyle/>
+          <a:p>
+            <a:pPr marL="0" indent="0" algn="l">
+              <a:buNone/>
+            </a:pPr>
+            <a:r>
+              <a:rPr lang="en-US" sz="1050" dirty="0">
+                <a:solidFill>
+                  <a:srgbClr val="1A1A1A"/>
+                </a:solidFill>
+                <a:latin typeface="맑은 고딕" pitchFamily="34" charset="0"/>
+                <a:ea typeface="맑은 고딕" pitchFamily="34" charset="-122"/>
+                <a:cs typeface="맑은 고딕" pitchFamily="34" charset="-120"/>
+              </a:rPr>
+              <a:t>C_body←ant^T × ( p동체 − 레버암 )  =  ( +10,000.00,  0.00,  +17,320.51 ) m</a:t>
+            </a:r>
+            <a:endParaRPr lang="en-US" sz="1150" dirty="0"/>
+          </a:p>
+        </p:txBody>
+      </p:sp>
+      <p:sp>
+        <p:nvSpPr>
+          <p:cNvPr id="22" name="Text 20"/>
+          <p:cNvSpPr txBox="1"/>
+          <p:nvPr/>
+        </p:nvSpPr>
+        <p:spPr>
+          <a:xfrm>
+            <a:off x="9015984" y="4041648"/>
+            <a:ext cx="2194560" cy="201168"/>
+          </a:xfrm>
+          <a:prstGeom prst="rect">
+            <a:avLst/>
+          </a:prstGeom>
+          <a:noFill/>
+          <a:ln/>
+        </p:spPr>
+        <p:txBody>
+          <a:bodyPr wrap="square" lIns="0" tIns="0" rIns="0" bIns="0" rtlCol="0" anchor="ctr"/>
+          <a:lstStyle/>
+          <a:p>
+            <a:pPr marL="0" indent="0" algn="l">
+              <a:buNone/>
+            </a:pPr>
+            <a:r>
+              <a:rPr lang="en-US" sz="1000" dirty="0">
+                <a:solidFill>
+                  <a:srgbClr val="555555"/>
+                </a:solidFill>
+                <a:latin typeface="맑은 고딕" pitchFamily="34" charset="0"/>
+                <a:ea typeface="맑은 고딕" pitchFamily="34" charset="-122"/>
+                <a:cs typeface="맑은 고딕" pitchFamily="34" charset="-120"/>
+              </a:rPr>
               <a:t>// 전치 + 빼기</a:t>
             </a:r>
             <a:endParaRPr lang="en-US" sz="1100" dirty="0"/>
@@ -29467,14 +29756,14 @@
       </p:sp>
       <p:sp>
         <p:nvSpPr>
-          <p:cNvPr id="17" name="Text 15"/>
-          <p:cNvSpPr txBox="1"/>
-          <p:nvPr/>
-        </p:nvSpPr>
-        <p:spPr>
-          <a:xfrm>
-            <a:off x="1298448" y="3739896"/>
-            <a:ext cx="5669280" cy="201168"/>
+          <p:cNvPr id="23" name="Text 21"/>
+          <p:cNvSpPr txBox="1"/>
+          <p:nvPr/>
+        </p:nvSpPr>
+        <p:spPr>
+          <a:xfrm>
+            <a:off x="1298448" y="4343400"/>
+            <a:ext cx="1737360" cy="201168"/>
           </a:xfrm>
           <a:prstGeom prst="rect">
             <a:avLst/>
@@ -29498,7 +29787,7 @@
                 <a:ea typeface="맑은 고딕" pitchFamily="34" charset="-122"/>
                 <a:cs typeface="맑은 고딕" pitchFamily="34" charset="-120"/>
               </a:rPr>
-              <a:t>   → 동체</a:t>
+              <a:t>   → 극좌표</a:t>
             </a:r>
             <a:endParaRPr lang="en-US" sz="1150" dirty="0"/>
           </a:p>
@@ -29506,14 +29795,14 @@
       </p:sp>
       <p:sp>
         <p:nvSpPr>
-          <p:cNvPr id="18" name="Text 16"/>
-          <p:cNvSpPr txBox="1"/>
-          <p:nvPr/>
-        </p:nvSpPr>
-        <p:spPr>
-          <a:xfrm>
-            <a:off x="3127248" y="3739896"/>
-            <a:ext cx="5029200" cy="201168"/>
+          <p:cNvPr id="24" name="Text 22"/>
+          <p:cNvSpPr txBox="1"/>
+          <p:nvPr/>
+        </p:nvSpPr>
+        <p:spPr>
+          <a:xfrm>
+            <a:off x="3035808" y="4343400"/>
+            <a:ext cx="5852160" cy="201168"/>
           </a:xfrm>
           <a:prstGeom prst="rect">
             <a:avLst/>
@@ -29529,249 +29818,15 @@
               <a:buNone/>
             </a:pPr>
             <a:r>
-              <a:rPr lang="en-US" sz="1150" dirty="0">
-                <a:solidFill>
-                  <a:srgbClr val="1A1A1A"/>
-                </a:solidFill>
-                <a:latin typeface="맑은 고딕" pitchFamily="34" charset="0"/>
-                <a:ea typeface="맑은 고딕" pitchFamily="34" charset="-122"/>
-                <a:cs typeface="맑은 고딕" pitchFamily="34" charset="-120"/>
-              </a:rPr>
-              <a:t>C_ned←body^T × p_ned</a:t>
-            </a:r>
-            <a:endParaRPr lang="en-US" sz="1150" dirty="0"/>
-          </a:p>
-        </p:txBody>
-      </p:sp>
-      <p:sp>
-        <p:nvSpPr>
-          <p:cNvPr id="19" name="Text 17"/>
-          <p:cNvSpPr txBox="1"/>
-          <p:nvPr/>
-        </p:nvSpPr>
-        <p:spPr>
-          <a:xfrm>
-            <a:off x="8321040" y="3739896"/>
-            <a:ext cx="2743200" cy="201168"/>
-          </a:xfrm>
-          <a:prstGeom prst="rect">
-            <a:avLst/>
-          </a:prstGeom>
-          <a:noFill/>
-          <a:ln/>
-        </p:spPr>
-        <p:txBody>
-          <a:bodyPr wrap="square" lIns="0" tIns="0" rIns="0" bIns="0" rtlCol="0" anchor="ctr"/>
-          <a:lstStyle/>
-          <a:p>
-            <a:pPr marL="0" indent="0" algn="l">
-              <a:buNone/>
-            </a:pPr>
-            <a:r>
-              <a:rPr lang="en-US" sz="1100" dirty="0">
-                <a:solidFill>
-                  <a:srgbClr val="555555"/>
-                </a:solidFill>
-                <a:latin typeface="맑은 고딕" pitchFamily="34" charset="0"/>
-                <a:ea typeface="맑은 고딕" pitchFamily="34" charset="-122"/>
-                <a:cs typeface="맑은 고딕" pitchFamily="34" charset="-120"/>
-              </a:rPr>
-              <a:t>// 전치</a:t>
-            </a:r>
-            <a:endParaRPr lang="en-US" sz="1100" dirty="0"/>
-          </a:p>
-        </p:txBody>
-      </p:sp>
-      <p:sp>
-        <p:nvSpPr>
-          <p:cNvPr id="20" name="Text 18"/>
-          <p:cNvSpPr txBox="1"/>
-          <p:nvPr/>
-        </p:nvSpPr>
-        <p:spPr>
-          <a:xfrm>
-            <a:off x="1298448" y="4041648"/>
-            <a:ext cx="5669280" cy="201168"/>
-          </a:xfrm>
-          <a:prstGeom prst="rect">
-            <a:avLst/>
-          </a:prstGeom>
-          <a:noFill/>
-          <a:ln/>
-        </p:spPr>
-        <p:txBody>
-          <a:bodyPr wrap="square" lIns="0" tIns="0" rIns="0" bIns="0" rtlCol="0" anchor="ctr"/>
-          <a:lstStyle/>
-          <a:p>
-            <a:pPr marL="0" indent="0" algn="l">
-              <a:buNone/>
-            </a:pPr>
-            <a:r>
-              <a:rPr lang="en-US" sz="1150" dirty="0">
-                <a:solidFill>
-                  <a:srgbClr val="1A1A1A"/>
-                </a:solidFill>
-                <a:latin typeface="맑은 고딕" pitchFamily="34" charset="0"/>
-                <a:ea typeface="맑은 고딕" pitchFamily="34" charset="-122"/>
-                <a:cs typeface="맑은 고딕" pitchFamily="34" charset="-120"/>
-              </a:rPr>
-              <a:t>   → 안테나</a:t>
-            </a:r>
-            <a:endParaRPr lang="en-US" sz="1150" dirty="0"/>
-          </a:p>
-        </p:txBody>
-      </p:sp>
-      <p:sp>
-        <p:nvSpPr>
-          <p:cNvPr id="21" name="Text 19"/>
-          <p:cNvSpPr txBox="1"/>
-          <p:nvPr/>
-        </p:nvSpPr>
-        <p:spPr>
-          <a:xfrm>
-            <a:off x="3127248" y="4041648"/>
-            <a:ext cx="5029200" cy="201168"/>
-          </a:xfrm>
-          <a:prstGeom prst="rect">
-            <a:avLst/>
-          </a:prstGeom>
-          <a:noFill/>
-          <a:ln/>
-        </p:spPr>
-        <p:txBody>
-          <a:bodyPr wrap="square" lIns="0" tIns="0" rIns="0" bIns="0" rtlCol="0" anchor="ctr"/>
-          <a:lstStyle/>
-          <a:p>
-            <a:pPr marL="0" indent="0" algn="l">
-              <a:buNone/>
-            </a:pPr>
-            <a:r>
-              <a:rPr lang="en-US" sz="1150" dirty="0">
-                <a:solidFill>
-                  <a:srgbClr val="1A1A1A"/>
-                </a:solidFill>
-                <a:latin typeface="맑은 고딕" pitchFamily="34" charset="0"/>
-                <a:ea typeface="맑은 고딕" pitchFamily="34" charset="-122"/>
-                <a:cs typeface="맑은 고딕" pitchFamily="34" charset="-120"/>
-              </a:rPr>
-              <a:t>C_body←ant^T × (p_body − 레버암 )</a:t>
-            </a:r>
-            <a:endParaRPr lang="en-US" sz="1150" dirty="0"/>
-          </a:p>
-        </p:txBody>
-      </p:sp>
-      <p:sp>
-        <p:nvSpPr>
-          <p:cNvPr id="22" name="Text 20"/>
-          <p:cNvSpPr txBox="1"/>
-          <p:nvPr/>
-        </p:nvSpPr>
-        <p:spPr>
-          <a:xfrm>
-            <a:off x="8321040" y="4041648"/>
-            <a:ext cx="2743200" cy="201168"/>
-          </a:xfrm>
-          <a:prstGeom prst="rect">
-            <a:avLst/>
-          </a:prstGeom>
-          <a:noFill/>
-          <a:ln/>
-        </p:spPr>
-        <p:txBody>
-          <a:bodyPr wrap="square" lIns="0" tIns="0" rIns="0" bIns="0" rtlCol="0" anchor="ctr"/>
-          <a:lstStyle/>
-          <a:p>
-            <a:pPr marL="0" indent="0" algn="l">
-              <a:buNone/>
-            </a:pPr>
-            <a:r>
-              <a:rPr lang="en-US" sz="1100" dirty="0">
-                <a:solidFill>
-                  <a:srgbClr val="555555"/>
-                </a:solidFill>
-                <a:latin typeface="맑은 고딕" pitchFamily="34" charset="0"/>
-                <a:ea typeface="맑은 고딕" pitchFamily="34" charset="-122"/>
-                <a:cs typeface="맑은 고딕" pitchFamily="34" charset="-120"/>
-              </a:rPr>
-              <a:t>// 전치 + 빼기</a:t>
-            </a:r>
-            <a:endParaRPr lang="en-US" sz="1100" dirty="0"/>
-          </a:p>
-        </p:txBody>
-      </p:sp>
-      <p:sp>
-        <p:nvSpPr>
-          <p:cNvPr id="23" name="Text 21"/>
-          <p:cNvSpPr txBox="1"/>
-          <p:nvPr/>
-        </p:nvSpPr>
-        <p:spPr>
-          <a:xfrm>
-            <a:off x="1298448" y="4343400"/>
-            <a:ext cx="5669280" cy="201168"/>
-          </a:xfrm>
-          <a:prstGeom prst="rect">
-            <a:avLst/>
-          </a:prstGeom>
-          <a:noFill/>
-          <a:ln/>
-        </p:spPr>
-        <p:txBody>
-          <a:bodyPr wrap="square" lIns="0" tIns="0" rIns="0" bIns="0" rtlCol="0" anchor="ctr"/>
-          <a:lstStyle/>
-          <a:p>
-            <a:pPr marL="0" indent="0" algn="l">
-              <a:buNone/>
-            </a:pPr>
-            <a:r>
-              <a:rPr lang="en-US" sz="1150" dirty="0">
-                <a:solidFill>
-                  <a:srgbClr val="1A1A1A"/>
-                </a:solidFill>
-                <a:latin typeface="맑은 고딕" pitchFamily="34" charset="0"/>
-                <a:ea typeface="맑은 고딕" pitchFamily="34" charset="-122"/>
-                <a:cs typeface="맑은 고딕" pitchFamily="34" charset="-120"/>
-              </a:rPr>
-              <a:t>   → 극좌표</a:t>
-            </a:r>
-            <a:endParaRPr lang="en-US" sz="1150" dirty="0"/>
-          </a:p>
-        </p:txBody>
-      </p:sp>
-      <p:sp>
-        <p:nvSpPr>
-          <p:cNvPr id="24" name="Text 22"/>
-          <p:cNvSpPr txBox="1"/>
-          <p:nvPr/>
-        </p:nvSpPr>
-        <p:spPr>
-          <a:xfrm>
-            <a:off x="3127248" y="4343400"/>
-            <a:ext cx="5029200" cy="201168"/>
-          </a:xfrm>
-          <a:prstGeom prst="rect">
-            <a:avLst/>
-          </a:prstGeom>
-          <a:noFill/>
-          <a:ln/>
-        </p:spPr>
-        <p:txBody>
-          <a:bodyPr wrap="square" lIns="0" tIns="0" rIns="0" bIns="0" rtlCol="0" anchor="ctr"/>
-          <a:lstStyle/>
-          <a:p>
-            <a:pPr marL="0" indent="0" algn="l">
-              <a:buNone/>
-            </a:pPr>
-            <a:r>
-              <a:rPr lang="en-US" sz="1150" dirty="0">
-                <a:solidFill>
-                  <a:srgbClr val="1A1A1A"/>
-                </a:solidFill>
-                <a:latin typeface="맑은 고딕" pitchFamily="34" charset="0"/>
-                <a:ea typeface="맑은 고딕" pitchFamily="34" charset="-122"/>
-                <a:cs typeface="맑은 고딕" pitchFamily="34" charset="-120"/>
-              </a:rPr>
-              <a:t>R = √(x²+y²+z²),      Az = atan2(y, x),      El = atan2(−z, √(x²+y²))</a:t>
+              <a:rPr lang="en-US" sz="1050" dirty="0">
+                <a:solidFill>
+                  <a:srgbClr val="1A1A1A"/>
+                </a:solidFill>
+                <a:latin typeface="맑은 고딕" pitchFamily="34" charset="0"/>
+                <a:ea typeface="맑은 고딕" pitchFamily="34" charset="-122"/>
+                <a:cs typeface="맑은 고딕" pitchFamily="34" charset="-120"/>
+              </a:rPr>
+              <a:t>R = √(x²+y²+z²),     Az = atan2(x, z),     El = atan2(y, √(x²+z²))</a:t>
             </a:r>
             <a:endParaRPr lang="en-US" sz="1150" dirty="0"/>
           </a:p>
@@ -29835,6 +29890,45 @@
               <a:t>결과 :  R = 20,000.000000 m          Az = 30.000000°          El = 0.000000°</a:t>
             </a:r>
             <a:endParaRPr lang="en-US" sz="1700" dirty="0"/>
+          </a:p>
+        </p:txBody>
+      </p:sp>
+      <p:sp>
+        <p:nvSpPr>
+          <p:cNvPr id="9001" name="Text 9001"/>
+          <p:cNvSpPr txBox="1"/>
+          <p:nvPr/>
+        </p:nvSpPr>
+        <p:spPr>
+          <a:xfrm>
+            <a:off x="3035808" y="3136392"/>
+            <a:ext cx="5852160" cy="201168"/>
+          </a:xfrm>
+          <a:prstGeom prst="rect">
+            <a:avLst/>
+          </a:prstGeom>
+          <a:noFill/>
+          <a:ln/>
+        </p:spPr>
+        <p:txBody>
+          <a:bodyPr wrap="square" lIns="0" tIns="0" rIns="0" bIns="0" rtlCol="0" anchor="ctr"/>
+          <a:lstStyle/>
+          <a:p>
+            <a:pPr marL="0" indent="0" algn="l">
+              <a:buNone/>
+            </a:pPr>
+            <a:r>
+              <a:rPr lang="en-US" sz="1050" dirty="0">
+                <a:solidFill>
+                  <a:srgbClr val="1A1A1A"/>
+                </a:solidFill>
+                <a:latin typeface="맑은 고딕" pitchFamily="34" charset="0"/>
+                <a:ea typeface="맑은 고딕" pitchFamily="34" charset="-122"/>
+                <a:cs typeface="맑은 고딕" pitchFamily="34" charset="-120"/>
+              </a:rPr>
+              <a:t>( −3,132,053.79,  +4,078,527.19,  +3,760,545.95 ) m</a:t>
+            </a:r>
+            <a:endParaRPr lang="en-US" sz="1150" dirty="0"/>
           </a:p>
         </p:txBody>
       </p:sp>
@@ -31608,7 +31702,7 @@
                 <a:ea typeface="맑은 고딕" pitchFamily="34" charset="-122"/>
                 <a:cs typeface="맑은 고딕" pitchFamily="34" charset="-120"/>
               </a:rPr>
-              <a:t>내 오른쪽에 있는데."</a:t>
+              <a:t>"내 오른쪽에 있는데."</a:t>
             </a:r>
             <a:endParaRPr lang="en-US" sz="1500" dirty="0"/>
           </a:p>
@@ -31718,7 +31812,7 @@
                 <a:ea typeface="맑은 고딕" pitchFamily="34" charset="-122"/>
                 <a:cs typeface="맑은 고딕" pitchFamily="34" charset="-120"/>
               </a:rPr>
-              <a:t>"내 왼쪽에 있는데 ?"</a:t>
+              <a:t>"내 왼쪽에 있는데?"</a:t>
             </a:r>
             <a:endParaRPr lang="en-US" sz="1500" dirty="0"/>
           </a:p>
@@ -33266,6 +33360,10 @@
           </a:solidFill>
           <a:ln/>
         </p:spPr>
+        <p:txBody>
+          <a:bodyPr/>
+          <a:p/>
+        </p:txBody>
       </p:sp>
       <p:sp>
         <p:nvSpPr>
@@ -33325,6 +33423,10 @@
           </a:solidFill>
           <a:ln/>
         </p:spPr>
+        <p:txBody>
+          <a:bodyPr/>
+          <a:p/>
+        </p:txBody>
       </p:sp>
       <p:sp>
         <p:nvSpPr>
@@ -33348,6 +33450,10 @@
             <a:prstDash val="solid"/>
           </a:ln>
         </p:spPr>
+        <p:txBody>
+          <a:bodyPr/>
+          <a:p/>
+        </p:txBody>
       </p:sp>
       <p:sp>
         <p:nvSpPr>
@@ -33407,6 +33513,10 @@
           </a:solidFill>
           <a:ln/>
         </p:spPr>
+        <p:txBody>
+          <a:bodyPr/>
+          <a:p/>
+        </p:txBody>
       </p:sp>
       <p:sp>
         <p:nvSpPr>
@@ -33471,6 +33581,10 @@
             <a:tailEnd type="triangle"/>
           </a:ln>
         </p:spPr>
+        <p:txBody>
+          <a:bodyPr/>
+          <a:p/>
+        </p:txBody>
       </p:sp>
       <p:sp>
         <p:nvSpPr>
@@ -33496,6 +33610,10 @@
             <a:tailEnd type="triangle"/>
           </a:ln>
         </p:spPr>
+        <p:txBody>
+          <a:bodyPr/>
+          <a:p/>
+        </p:txBody>
       </p:sp>
       <p:sp>
         <p:nvSpPr>
@@ -33599,6 +33717,10 @@
             <a:tailEnd type="triangle"/>
           </a:ln>
         </p:spPr>
+        <p:txBody>
+          <a:bodyPr/>
+          <a:p/>
+        </p:txBody>
       </p:sp>
       <p:sp>
         <p:nvSpPr>
@@ -33624,6 +33746,10 @@
             <a:tailEnd type="triangle"/>
           </a:ln>
         </p:spPr>
+        <p:txBody>
+          <a:bodyPr/>
+          <a:p/>
+        </p:txBody>
       </p:sp>
       <p:sp>
         <p:nvSpPr>
@@ -33644,6 +33770,10 @@
           </a:solidFill>
           <a:ln/>
         </p:spPr>
+        <p:txBody>
+          <a:bodyPr/>
+          <a:p/>
+        </p:txBody>
       </p:sp>
       <p:sp>
         <p:nvSpPr>
@@ -33664,6 +33794,10 @@
           </a:solidFill>
           <a:ln/>
         </p:spPr>
+        <p:txBody>
+          <a:bodyPr/>
+          <a:p/>
+        </p:txBody>
       </p:sp>
       <p:sp>
         <p:nvSpPr>
@@ -33767,6 +33901,10 @@
             <a:tailEnd type="none"/>
           </a:ln>
         </p:spPr>
+        <p:txBody>
+          <a:bodyPr/>
+          <a:p/>
+        </p:txBody>
       </p:sp>
       <p:sp>
         <p:nvSpPr>
@@ -33792,6 +33930,10 @@
             <a:tailEnd type="none"/>
           </a:ln>
         </p:spPr>
+        <p:txBody>
+          <a:bodyPr/>
+          <a:p/>
+        </p:txBody>
       </p:sp>
       <p:sp>
         <p:nvSpPr>
@@ -33817,6 +33959,10 @@
             <a:tailEnd type="none"/>
           </a:ln>
         </p:spPr>
+        <p:txBody>
+          <a:bodyPr/>
+          <a:p/>
+        </p:txBody>
       </p:sp>
       <p:sp>
         <p:nvSpPr>
@@ -33842,6 +33988,10 @@
             <a:tailEnd type="none"/>
           </a:ln>
         </p:spPr>
+        <p:txBody>
+          <a:bodyPr/>
+          <a:p/>
+        </p:txBody>
       </p:sp>
       <p:sp>
         <p:nvSpPr>
@@ -33867,6 +34017,10 @@
             <a:tailEnd type="none"/>
           </a:ln>
         </p:spPr>
+        <p:txBody>
+          <a:bodyPr/>
+          <a:p/>
+        </p:txBody>
       </p:sp>
       <p:sp>
         <p:nvSpPr>
@@ -33892,6 +34046,10 @@
             <a:tailEnd type="none"/>
           </a:ln>
         </p:spPr>
+        <p:txBody>
+          <a:bodyPr/>
+          <a:p/>
+        </p:txBody>
       </p:sp>
       <p:sp>
         <p:nvSpPr>
@@ -33917,6 +34075,10 @@
             <a:tailEnd type="none"/>
           </a:ln>
         </p:spPr>
+        <p:txBody>
+          <a:bodyPr/>
+          <a:p/>
+        </p:txBody>
       </p:sp>
       <p:sp>
         <p:nvSpPr>
@@ -33942,6 +34104,10 @@
             <a:tailEnd type="none"/>
           </a:ln>
         </p:spPr>
+        <p:txBody>
+          <a:bodyPr/>
+          <a:p/>
+        </p:txBody>
       </p:sp>
       <p:sp>
         <p:nvSpPr>
@@ -34045,6 +34211,10 @@
             <a:tailEnd type="none"/>
           </a:ln>
         </p:spPr>
+        <p:txBody>
+          <a:bodyPr/>
+          <a:p/>
+        </p:txBody>
       </p:sp>
       <p:sp>
         <p:nvSpPr>
@@ -34070,6 +34240,10 @@
             <a:tailEnd type="none"/>
           </a:ln>
         </p:spPr>
+        <p:txBody>
+          <a:bodyPr/>
+          <a:p/>
+        </p:txBody>
       </p:sp>
       <p:sp>
         <p:nvSpPr>
@@ -34095,6 +34269,10 @@
             <a:tailEnd type="none"/>
           </a:ln>
         </p:spPr>
+        <p:txBody>
+          <a:bodyPr/>
+          <a:p/>
+        </p:txBody>
       </p:sp>
       <p:sp>
         <p:nvSpPr>
@@ -34120,6 +34298,10 @@
             <a:tailEnd type="none"/>
           </a:ln>
         </p:spPr>
+        <p:txBody>
+          <a:bodyPr/>
+          <a:p/>
+        </p:txBody>
       </p:sp>
       <p:sp>
         <p:nvSpPr>
@@ -34130,7 +34312,7 @@
         <p:spPr>
           <a:xfrm>
             <a:off x="3035808" y="1883664"/>
-            <a:ext cx="4114800" cy="3749040"/>
+            <a:ext cx="4114800" cy="2743200"/>
           </a:xfrm>
           <a:prstGeom prst="rect">
             <a:avLst/>
@@ -34368,6 +34550,10 @@
           </a:solidFill>
           <a:ln/>
         </p:spPr>
+        <p:txBody>
+          <a:bodyPr/>
+          <a:p/>
+        </p:txBody>
       </p:sp>
       <p:sp>
         <p:nvSpPr>
@@ -34795,6 +34981,141 @@
               <a:t>[   0     sin θ    cos θ ]</a:t>
             </a:r>
             <a:endParaRPr lang="en-US" sz="1100" dirty="0"/>
+          </a:p>
+        </p:txBody>
+      </p:sp>
+      <p:sp>
+        <p:nvSpPr>
+          <p:cNvPr id="43" name="Rounded Rectangle 42"/>
+          <p:cNvSpPr/>
+          <p:nvPr/>
+        </p:nvSpPr>
+        <p:spPr>
+          <a:xfrm>
+            <a:off x="786384" y="4700016"/>
+            <a:ext cx="6437376" cy="1188720"/>
+          </a:xfrm>
+          <a:prstGeom prst="roundRect">
+            <a:avLst>
+              <a:gd name="adj" fmla="val 4000"/>
+            </a:avLst>
+          </a:prstGeom>
+          <a:solidFill>
+            <a:srgbClr val="DCDCDC"/>
+          </a:solidFill>
+          <a:ln>
+            <a:noFill/>
+          </a:ln>
+          <a:effectLst/>
+        </p:spPr>
+        <p:txBody>
+          <a:bodyPr rtlCol="0" anchor="ctr"/>
+          <a:lstStyle/>
+          <a:p>
+            <a:pPr algn="ctr"/>
+          </a:p>
+        </p:txBody>
+      </p:sp>
+      <p:sp>
+        <p:nvSpPr>
+          <p:cNvPr id="44" name="TextBox 43"/>
+          <p:cNvSpPr txBox="1"/>
+          <p:nvPr/>
+        </p:nvSpPr>
+        <p:spPr>
+          <a:xfrm>
+            <a:off x="987552" y="4773168"/>
+            <a:ext cx="6035040" cy="1060704"/>
+          </a:xfrm>
+          <a:prstGeom prst="rect">
+            <a:avLst/>
+          </a:prstGeom>
+          <a:noFill/>
+        </p:spPr>
+        <p:txBody>
+          <a:bodyPr wrap="square">
+            <a:spAutoFit/>
+          </a:bodyPr>
+          <a:lstStyle/>
+          <a:p>
+            <a:pPr>
+              <a:spcBef>
+                <a:spcPts val="0"/>
+              </a:spcBef>
+            </a:pPr>
+            <a:r>
+              <a:rPr sz="1200" b="1">
+                <a:solidFill>
+                  <a:srgbClr val="1A1A1A"/>
+                </a:solidFill>
+                <a:latin typeface="맑은 고딕"/>
+              </a:rPr>
+              <a:t>성질 — 역변환에서 전치를 쓰는 근거</a:t>
+            </a:r>
+          </a:p>
+          <a:p>
+            <a:pPr>
+              <a:spcBef>
+                <a:spcPts val="500"/>
+              </a:spcBef>
+            </a:pPr>
+            <a:r>
+              <a:rPr sz="900" b="0">
+                <a:solidFill>
+                  <a:srgbClr val="1A1A1A"/>
+                </a:solidFill>
+                <a:latin typeface="맑은 고딕"/>
+              </a:rPr>
+              <a:t>R^T · R = I ,   즉   R⁻¹ = R^T   —   역행렬을 따로 구할 필요가 없다 (p.22 역변환)</a:t>
+            </a:r>
+          </a:p>
+          <a:p>
+            <a:pPr>
+              <a:spcBef>
+                <a:spcPts val="250"/>
+              </a:spcBef>
+            </a:pPr>
+            <a:r>
+              <a:rPr sz="900" b="0">
+                <a:solidFill>
+                  <a:srgbClr val="1A1A1A"/>
+                </a:solidFill>
+                <a:latin typeface="맑은 고딕"/>
+              </a:rPr>
+              <a:t>det R = 1   —   오른손 좌표계는 오른손 좌표계로 남는다</a:t>
+            </a:r>
+          </a:p>
+          <a:p>
+            <a:pPr>
+              <a:spcBef>
+                <a:spcPts val="250"/>
+              </a:spcBef>
+            </a:pPr>
+            <a:r>
+              <a:rPr sz="900" b="0">
+                <a:solidFill>
+                  <a:srgbClr val="1A1A1A"/>
+                </a:solidFill>
+                <a:latin typeface="맑은 고딕"/>
+              </a:rPr>
+              <a:t>|Rp| = |p|   —   길이도, 두 벡터가 이루는 각도도 그대로다</a:t>
+            </a:r>
+          </a:p>
+          <a:p>
+            <a:pPr>
+              <a:spcBef>
+                <a:spcPts val="250"/>
+              </a:spcBef>
+            </a:pPr>
+            <a:r>
+              <a:rPr sz="900" b="0">
+                <a:solidFill>
+                  <a:srgbClr val="555555"/>
+                </a:solidFill>
+                <a:latin typeface="맑은 고딕"/>
+              </a:rPr>
+              <a:t>위 유도는 점을 θ 돌린 것. 축을 θ 돌려 같은 점을 다시 읽으면 R^T 가 된다.</a:t>
+            </a:r>
           </a:p>
         </p:txBody>
       </p:sp>
@@ -38762,7 +39083,7 @@
                 <a:ea typeface="맑은 고딕" pitchFamily="34" charset="-122"/>
                 <a:cs typeface="맑은 고딕" pitchFamily="34" charset="-120"/>
               </a:rPr>
-              <a:t>예제값   R = 20,000 m · Az = 30° · El = 0°   →   x = +10,000.0000 m,    y = 0.0000 m,    z = +17,320.5081 m ( = 10,000√3 ),</a:t>
+              <a:t>예제값   R = 20,000 m · Az = 30° · El = 0°   →   x = +10,000.0000 m,    y = 0.0000 m,    z = +17,320.5081 m ( = 10,000√3 )</a:t>
             </a:r>
             <a:endParaRPr lang="en-US" sz="1050" dirty="0"/>
           </a:p>

--- a/Part2_CoordFrames/ref/산출물/좌표계와_좌표변환.pptx
+++ b/Part2_CoordFrames/ref/산출물/좌표계와_좌표변환.pptx
@@ -30,6 +30,15 @@
     <p:sldId id="275" r:id="rId21"/>
     <p:sldId id="276" r:id="rId22"/>
     <p:sldId id="277" r:id="rId23"/>
+    <p:sldId id="278" r:id="rId29"/>
+    <p:sldId id="279" r:id="rId30"/>
+    <p:sldId id="280" r:id="rId31"/>
+    <p:sldId id="281" r:id="rId32"/>
+    <p:sldId id="282" r:id="rId33"/>
+    <p:sldId id="283" r:id="rId34"/>
+    <p:sldId id="284" r:id="rId35"/>
+    <p:sldId id="285" r:id="rId36"/>
+    <p:sldId id="286" r:id="rId37"/>
   </p:sldIdLst>
   <p:sldSz cx="12192000" cy="6858000"/>
   <p:notesSz cx="6858000" cy="12192000"/>
@@ -24996,7 +25005,7 @@
         </p:nvSpPr>
         <p:spPr>
           <a:xfrm>
-            <a:off x="603504" y="2084832"/>
+            <a:off x="603504" y="1938528"/>
             <a:ext cx="1097280" cy="566928"/>
           </a:xfrm>
           <a:prstGeom prst="rect">
@@ -25035,7 +25044,7 @@
         </p:nvSpPr>
         <p:spPr>
           <a:xfrm>
-            <a:off x="1883664" y="2103120"/>
+            <a:off x="1883664" y="1956816"/>
             <a:ext cx="6766560" cy="365760"/>
           </a:xfrm>
           <a:prstGeom prst="rect">
@@ -25074,7 +25083,7 @@
         </p:nvSpPr>
         <p:spPr>
           <a:xfrm>
-            <a:off x="1883664" y="2505456"/>
+            <a:off x="1883664" y="2359152"/>
             <a:ext cx="8778240" cy="292608"/>
           </a:xfrm>
           <a:prstGeom prst="rect">
@@ -25113,7 +25122,7 @@
         </p:nvSpPr>
         <p:spPr>
           <a:xfrm>
-            <a:off x="10545775" y="2103120"/>
+            <a:off x="10545775" y="1956816"/>
             <a:ext cx="1097280" cy="365760"/>
           </a:xfrm>
           <a:prstGeom prst="rect">
@@ -25152,7 +25161,7 @@
         </p:nvSpPr>
         <p:spPr>
           <a:xfrm>
-            <a:off x="548640" y="3054096"/>
+            <a:off x="548640" y="2743200"/>
             <a:ext cx="11094415" cy="0"/>
           </a:xfrm>
           <a:prstGeom prst="line">
@@ -25177,7 +25186,7 @@
         </p:nvSpPr>
         <p:spPr>
           <a:xfrm>
-            <a:off x="603504" y="3383280"/>
+            <a:off x="603504" y="3090672"/>
             <a:ext cx="1097280" cy="566928"/>
           </a:xfrm>
           <a:prstGeom prst="rect">
@@ -25216,7 +25225,7 @@
         </p:nvSpPr>
         <p:spPr>
           <a:xfrm>
-            <a:off x="1883664" y="3401568"/>
+            <a:off x="1883664" y="3108960"/>
             <a:ext cx="6766560" cy="365760"/>
           </a:xfrm>
           <a:prstGeom prst="rect">
@@ -25255,7 +25264,7 @@
         </p:nvSpPr>
         <p:spPr>
           <a:xfrm>
-            <a:off x="1883664" y="3803904"/>
+            <a:off x="1883664" y="3511296"/>
             <a:ext cx="8778240" cy="292608"/>
           </a:xfrm>
           <a:prstGeom prst="rect">
@@ -25294,7 +25303,7 @@
         </p:nvSpPr>
         <p:spPr>
           <a:xfrm>
-            <a:off x="10545775" y="3401568"/>
+            <a:off x="10545775" y="3108960"/>
             <a:ext cx="1097280" cy="365760"/>
           </a:xfrm>
           <a:prstGeom prst="rect">
@@ -25333,7 +25342,7 @@
         </p:nvSpPr>
         <p:spPr>
           <a:xfrm>
-            <a:off x="548640" y="4352544"/>
+            <a:off x="548640" y="3895344"/>
             <a:ext cx="11094415" cy="0"/>
           </a:xfrm>
           <a:prstGeom prst="line">
@@ -25358,7 +25367,7 @@
         </p:nvSpPr>
         <p:spPr>
           <a:xfrm>
-            <a:off x="603504" y="4681728"/>
+            <a:off x="603504" y="4242816"/>
             <a:ext cx="1097280" cy="566928"/>
           </a:xfrm>
           <a:prstGeom prst="rect">
@@ -25397,7 +25406,7 @@
         </p:nvSpPr>
         <p:spPr>
           <a:xfrm>
-            <a:off x="1883664" y="4700016"/>
+            <a:off x="1883664" y="4261104"/>
             <a:ext cx="6766560" cy="365760"/>
           </a:xfrm>
           <a:prstGeom prst="rect">
@@ -25436,7 +25445,7 @@
         </p:nvSpPr>
         <p:spPr>
           <a:xfrm>
-            <a:off x="1883664" y="5102352"/>
+            <a:off x="1883664" y="4663440"/>
             <a:ext cx="8778240" cy="292608"/>
           </a:xfrm>
           <a:prstGeom prst="rect">
@@ -25475,7 +25484,7 @@
         </p:nvSpPr>
         <p:spPr>
           <a:xfrm>
-            <a:off x="10545775" y="4700016"/>
+            <a:off x="10545775" y="4261104"/>
             <a:ext cx="1097280" cy="365760"/>
           </a:xfrm>
           <a:prstGeom prst="rect">
@@ -25565,6 +25574,187 @@
               <a:t>2</a:t>
             </a:r>
             <a:endParaRPr lang="en-US" sz="900" dirty="0"/>
+          </a:p>
+        </p:txBody>
+      </p:sp>
+      <p:sp>
+        <p:nvSpPr>
+          <p:cNvPr id="21" name="Copy 21"/>
+          <p:cNvSpPr/>
+          <p:nvPr/>
+        </p:nvSpPr>
+        <p:spPr>
+          <a:xfrm>
+            <a:off x="548640" y="5047488"/>
+            <a:ext cx="11094415" cy="0"/>
+          </a:xfrm>
+          <a:prstGeom prst="line">
+            <a:avLst/>
+          </a:prstGeom>
+          <a:noFill/>
+          <a:ln w="10160">
+            <a:solidFill>
+              <a:srgbClr val="D8D8D8"/>
+            </a:solidFill>
+            <a:prstDash val="solid"/>
+            <a:headEnd type="none"/>
+            <a:tailEnd type="none"/>
+          </a:ln>
+        </p:spPr>
+      </p:sp>
+      <p:sp>
+        <p:nvSpPr>
+          <p:cNvPr id="22" name="Copy 22"/>
+          <p:cNvSpPr txBox="1"/>
+          <p:nvPr/>
+        </p:nvSpPr>
+        <p:spPr>
+          <a:xfrm>
+            <a:off x="603504" y="5394960"/>
+            <a:ext cx="1097280" cy="566928"/>
+          </a:xfrm>
+          <a:prstGeom prst="rect">
+            <a:avLst/>
+          </a:prstGeom>
+          <a:noFill/>
+          <a:ln/>
+        </p:spPr>
+        <p:txBody>
+          <a:bodyPr wrap="square" lIns="0" tIns="0" rIns="0" bIns="0" rtlCol="0" anchor="ctr"/>
+          <a:lstStyle/>
+          <a:p>
+            <a:pPr marL="0" indent="0">
+              <a:buNone/>
+            </a:pPr>
+            <a:r>
+              <a:rPr lang="en-US" sz="3000" b="1" dirty="0">
+                <a:solidFill>
+                  <a:srgbClr val="9AA0A6"/>
+                </a:solidFill>
+                <a:latin typeface="Arial" pitchFamily="34" charset="0"/>
+                <a:ea typeface="Arial" pitchFamily="34" charset="-122"/>
+                <a:cs typeface="Arial" pitchFamily="34" charset="-120"/>
+              </a:rPr>
+              <a:t>03</a:t>
+            </a:r>
+            <a:endParaRPr lang="en-US" sz="3000" dirty="0"/>
+          </a:p>
+        </p:txBody>
+      </p:sp>
+      <p:sp>
+        <p:nvSpPr>
+          <p:cNvPr id="23" name="Copy 23"/>
+          <p:cNvSpPr txBox="1"/>
+          <p:nvPr/>
+        </p:nvSpPr>
+        <p:spPr>
+          <a:xfrm>
+            <a:off x="1883664" y="5413248"/>
+            <a:ext cx="6766560" cy="365760"/>
+          </a:xfrm>
+          <a:prstGeom prst="rect">
+            <a:avLst/>
+          </a:prstGeom>
+          <a:noFill/>
+          <a:ln/>
+        </p:spPr>
+        <p:txBody>
+          <a:bodyPr wrap="square" lIns="0" tIns="0" rIns="0" bIns="0" rtlCol="0" anchor="ctr"/>
+          <a:lstStyle/>
+          <a:p>
+            <a:pPr marL="0" indent="0">
+              <a:buNone/>
+            </a:pPr>
+            <a:r>
+              <a:rPr lang="en-US" sz="1900" b="1" dirty="0">
+                <a:solidFill>
+                  <a:srgbClr val="1A1A1A"/>
+                </a:solidFill>
+                <a:latin typeface="맑은 고딕" pitchFamily="34" charset="0"/>
+                <a:ea typeface="맑은 고딕" pitchFamily="34" charset="-122"/>
+                <a:cs typeface="맑은 고딕" pitchFamily="34" charset="-120"/>
+              </a:rPr>
+              <a:t>C언어로 구현</a:t>
+            </a:r>
+            <a:endParaRPr lang="en-US" sz="1900" dirty="0"/>
+          </a:p>
+        </p:txBody>
+      </p:sp>
+      <p:sp>
+        <p:nvSpPr>
+          <p:cNvPr id="24" name="Copy 24"/>
+          <p:cNvSpPr txBox="1"/>
+          <p:nvPr/>
+        </p:nvSpPr>
+        <p:spPr>
+          <a:xfrm>
+            <a:off x="1883664" y="5815584"/>
+            <a:ext cx="8778240" cy="292608"/>
+          </a:xfrm>
+          <a:prstGeom prst="rect">
+            <a:avLst/>
+          </a:prstGeom>
+          <a:noFill/>
+          <a:ln/>
+        </p:spPr>
+        <p:txBody>
+          <a:bodyPr wrap="square" lIns="0" tIns="0" rIns="0" bIns="0" rtlCol="0" anchor="ctr"/>
+          <a:lstStyle/>
+          <a:p>
+            <a:pPr marL="0" indent="0">
+              <a:buNone/>
+            </a:pPr>
+            <a:r>
+              <a:rPr lang="en-US" sz="1050" dirty="0">
+                <a:solidFill>
+                  <a:srgbClr val="555555"/>
+                </a:solidFill>
+                <a:latin typeface="맑은 고딕" pitchFamily="34" charset="0"/>
+                <a:ea typeface="맑은 고딕" pitchFamily="34" charset="-122"/>
+                <a:cs typeface="맑은 고딕" pitchFamily="34" charset="-120"/>
+              </a:rPr>
+              <a:t>자료구조  ·  회전행렬  ·  공식과 코드 대응  ·  역변환  ·  실행 결과와 UI 확인</a:t>
+            </a:r>
+            <a:endParaRPr lang="en-US" sz="1050" dirty="0"/>
+          </a:p>
+        </p:txBody>
+      </p:sp>
+      <p:sp>
+        <p:nvSpPr>
+          <p:cNvPr id="25" name="Copy 25"/>
+          <p:cNvSpPr txBox="1"/>
+          <p:nvPr/>
+        </p:nvSpPr>
+        <p:spPr>
+          <a:xfrm>
+            <a:off x="10545775" y="5413248"/>
+            <a:ext cx="1097280" cy="365760"/>
+          </a:xfrm>
+          <a:prstGeom prst="rect">
+            <a:avLst/>
+          </a:prstGeom>
+          <a:noFill/>
+          <a:ln/>
+        </p:spPr>
+        <p:txBody>
+          <a:bodyPr wrap="square" lIns="0" tIns="0" rIns="0" bIns="0" rtlCol="0" anchor="ctr"/>
+          <a:lstStyle/>
+          <a:p>
+            <a:pPr marL="0" indent="0" algn="r">
+              <a:buNone/>
+            </a:pPr>
+            <a:r>
+              <a:rPr lang="en-US" sz="1100" dirty="0">
+                <a:solidFill>
+                  <a:srgbClr val="9AA0A6"/>
+                </a:solidFill>
+                <a:latin typeface="Arial" pitchFamily="34" charset="0"/>
+                <a:ea typeface="Arial" pitchFamily="34" charset="-122"/>
+                <a:cs typeface="Arial" pitchFamily="34" charset="-120"/>
+              </a:rPr>
+              <a:t>p. 23</a:t>
+            </a:r>
+            <a:endParaRPr lang="en-US" sz="1100" dirty="0"/>
           </a:p>
         </p:txBody>
       </p:sp>
@@ -29940,6 +30130,6427 @@
 </p:sld>
 </file>
 
+<file path=ppt/slides/slide23.xml><?xml version="1.0" encoding="utf-8"?>
+<p:sld xmlns:a="http://schemas.openxmlformats.org/drawingml/2006/main" xmlns:p="http://schemas.openxmlformats.org/presentationml/2006/main" xmlns:r="http://schemas.openxmlformats.org/officeDocument/2006/relationships">
+  <p:cSld>
+    <p:spTree>
+      <p:nvGrpSpPr>
+        <p:cNvPr id="1" name=""/>
+        <p:cNvGrpSpPr/>
+        <p:nvPr/>
+      </p:nvGrpSpPr>
+      <p:grpSpPr/>
+      <p:sp>
+        <p:nvSpPr>
+          <p:cNvPr id="2" name="Shape 0"/>
+          <p:cNvSpPr/>
+          <p:nvPr/>
+        </p:nvSpPr>
+        <p:spPr>
+          <a:xfrm>
+            <a:off x="0" y="0"/>
+            <a:ext cx="4224528" cy="6858000"/>
+          </a:xfrm>
+          <a:prstGeom prst="rect">
+            <a:avLst/>
+          </a:prstGeom>
+          <a:solidFill>
+            <a:srgbClr val="3E4650"/>
+          </a:solidFill>
+          <a:ln/>
+        </p:spPr>
+      </p:sp>
+      <p:sp>
+        <p:nvSpPr>
+          <p:cNvPr id="3" name="Text 1"/>
+          <p:cNvSpPr txBox="1"/>
+          <p:nvPr/>
+        </p:nvSpPr>
+        <p:spPr>
+          <a:xfrm>
+            <a:off x="2532888" y="566928"/>
+            <a:ext cx="640080" cy="365760"/>
+          </a:xfrm>
+          <a:prstGeom prst="rect">
+            <a:avLst/>
+          </a:prstGeom>
+          <a:noFill/>
+          <a:ln/>
+        </p:spPr>
+        <p:txBody>
+          <a:bodyPr wrap="square" lIns="0" tIns="0" rIns="0" bIns="0" rtlCol="0" anchor="ctr"/>
+          <a:lstStyle/>
+          <a:p>
+            <a:pPr marL="0" indent="0" algn="r">
+              <a:buNone/>
+            </a:pPr>
+            <a:r>
+              <a:rPr lang="en-US" sz="1900" b="1" dirty="0">
+                <a:solidFill>
+                  <a:srgbClr val="FFFFFF"/>
+                </a:solidFill>
+                <a:latin typeface="Arial" pitchFamily="34" charset="0"/>
+                <a:ea typeface="Arial" pitchFamily="34" charset="-122"/>
+                <a:cs typeface="Arial" pitchFamily="34" charset="-120"/>
+              </a:rPr>
+              <a:t>03</a:t>
+            </a:r>
+            <a:endParaRPr lang="en-US" sz="1900" dirty="0"/>
+          </a:p>
+        </p:txBody>
+      </p:sp>
+      <p:sp>
+        <p:nvSpPr>
+          <p:cNvPr id="4" name="Shape 2"/>
+          <p:cNvSpPr/>
+          <p:nvPr/>
+        </p:nvSpPr>
+        <p:spPr>
+          <a:xfrm>
+            <a:off x="3264408" y="749808"/>
+            <a:ext cx="960120" cy="0"/>
+          </a:xfrm>
+          <a:prstGeom prst="line">
+            <a:avLst/>
+          </a:prstGeom>
+          <a:noFill/>
+          <a:ln w="12700">
+            <a:solidFill>
+              <a:srgbClr val="FFFFFF"/>
+            </a:solidFill>
+            <a:prstDash val="solid"/>
+            <a:headEnd type="none"/>
+            <a:tailEnd type="none"/>
+          </a:ln>
+        </p:spPr>
+      </p:sp>
+      <p:sp>
+        <p:nvSpPr>
+          <p:cNvPr id="5" name="Shape 3"/>
+          <p:cNvSpPr/>
+          <p:nvPr/>
+        </p:nvSpPr>
+        <p:spPr>
+          <a:xfrm>
+            <a:off x="4224528" y="749808"/>
+            <a:ext cx="7400239" cy="0"/>
+          </a:xfrm>
+          <a:prstGeom prst="line">
+            <a:avLst/>
+          </a:prstGeom>
+          <a:noFill/>
+          <a:ln w="11430">
+            <a:solidFill>
+              <a:srgbClr val="3A3A3A"/>
+            </a:solidFill>
+            <a:prstDash val="solid"/>
+            <a:headEnd type="none"/>
+            <a:tailEnd type="none"/>
+          </a:ln>
+        </p:spPr>
+      </p:sp>
+      <p:sp>
+        <p:nvSpPr>
+          <p:cNvPr id="6" name="Text 4"/>
+          <p:cNvSpPr txBox="1"/>
+          <p:nvPr/>
+        </p:nvSpPr>
+        <p:spPr>
+          <a:xfrm>
+            <a:off x="274320" y="3017520"/>
+            <a:ext cx="3675888" cy="822960"/>
+          </a:xfrm>
+          <a:prstGeom prst="rect">
+            <a:avLst/>
+          </a:prstGeom>
+          <a:noFill/>
+          <a:ln/>
+        </p:spPr>
+        <p:txBody>
+          <a:bodyPr wrap="square" lIns="0" tIns="0" rIns="0" bIns="0" rtlCol="0" anchor="ctr"/>
+          <a:lstStyle/>
+          <a:p>
+            <a:pPr marL="0" indent="0" algn="ctr">
+              <a:buNone/>
+            </a:pPr>
+            <a:r>
+              <a:rPr lang="en-US" sz="2900" b="1" dirty="0">
+                <a:solidFill>
+                  <a:srgbClr val="FFFFFF"/>
+                </a:solidFill>
+                <a:latin typeface="맑은 고딕" pitchFamily="34" charset="0"/>
+                <a:ea typeface="맑은 고딕" pitchFamily="34" charset="-122"/>
+                <a:cs typeface="맑은 고딕" pitchFamily="34" charset="-120"/>
+              </a:rPr>
+              <a:t>C언어로 구현</a:t>
+            </a:r>
+            <a:endParaRPr lang="en-US" sz="2900" dirty="0"/>
+          </a:p>
+        </p:txBody>
+      </p:sp>
+      <p:sp>
+        <p:nvSpPr>
+          <p:cNvPr id="8" name="Text 6"/>
+          <p:cNvSpPr txBox="1"/>
+          <p:nvPr/>
+        </p:nvSpPr>
+        <p:spPr>
+          <a:xfrm>
+            <a:off x="4224528" y="6419088"/>
+            <a:ext cx="7967167" cy="219456"/>
+          </a:xfrm>
+          <a:prstGeom prst="rect">
+            <a:avLst/>
+          </a:prstGeom>
+          <a:noFill/>
+          <a:ln/>
+        </p:spPr>
+        <p:txBody>
+          <a:bodyPr wrap="square" lIns="0" tIns="0" rIns="0" bIns="0" rtlCol="0" anchor="ctr"/>
+          <a:lstStyle/>
+          <a:p>
+            <a:pPr marL="0" indent="0" algn="ctr">
+              <a:buNone/>
+            </a:pPr>
+            <a:r>
+              <a:rPr lang="en-US" sz="900" dirty="0">
+                <a:solidFill>
+                  <a:srgbClr val="A0A0A0"/>
+                </a:solidFill>
+                <a:latin typeface="Arial" pitchFamily="34" charset="0"/>
+                <a:ea typeface="Arial" pitchFamily="34" charset="-122"/>
+                <a:cs typeface="Arial" pitchFamily="34" charset="-120"/>
+              </a:rPr>
+              <a:t>23</a:t>
+            </a:r>
+            <a:endParaRPr lang="en-US" sz="900" dirty="0"/>
+          </a:p>
+        </p:txBody>
+      </p:sp>
+      <p:sp>
+        <p:nvSpPr>
+          <p:cNvPr id="9" name="Text 7"/>
+          <p:cNvSpPr txBox="1"/>
+          <p:nvPr/>
+        </p:nvSpPr>
+        <p:spPr>
+          <a:xfrm>
+            <a:off x="5001768" y="1481328"/>
+            <a:ext cx="457200" cy="384048"/>
+          </a:xfrm>
+          <a:prstGeom prst="rect">
+            <a:avLst/>
+          </a:prstGeom>
+          <a:noFill/>
+          <a:ln/>
+        </p:spPr>
+        <p:txBody>
+          <a:bodyPr wrap="square" lIns="0" tIns="0" rIns="0" bIns="0" rtlCol="0" anchor="ctr"/>
+          <a:lstStyle/>
+          <a:p>
+            <a:pPr marL="0" indent="0">
+              <a:buNone/>
+            </a:pPr>
+            <a:r>
+              <a:rPr lang="en-US" sz="2100" b="1" dirty="0">
+                <a:solidFill>
+                  <a:srgbClr val="1A1A1A"/>
+                </a:solidFill>
+                <a:latin typeface="Arial" pitchFamily="34" charset="0"/>
+                <a:ea typeface="Arial" pitchFamily="34" charset="-122"/>
+                <a:cs typeface="Arial" pitchFamily="34" charset="-120"/>
+              </a:rPr>
+              <a:t>1</a:t>
+            </a:r>
+            <a:endParaRPr lang="en-US" sz="2100" dirty="0"/>
+          </a:p>
+        </p:txBody>
+      </p:sp>
+      <p:sp>
+        <p:nvSpPr>
+          <p:cNvPr id="10" name="Text 8"/>
+          <p:cNvSpPr txBox="1"/>
+          <p:nvPr/>
+        </p:nvSpPr>
+        <p:spPr>
+          <a:xfrm>
+            <a:off x="5797296" y="1481328"/>
+            <a:ext cx="6035040" cy="384048"/>
+          </a:xfrm>
+          <a:prstGeom prst="rect">
+            <a:avLst/>
+          </a:prstGeom>
+          <a:noFill/>
+          <a:ln/>
+        </p:spPr>
+        <p:txBody>
+          <a:bodyPr wrap="square" lIns="0" tIns="0" rIns="0" bIns="0" rtlCol="0" anchor="ctr"/>
+          <a:lstStyle/>
+          <a:p>
+            <a:pPr marL="0" indent="0">
+              <a:buNone/>
+            </a:pPr>
+            <a:r>
+              <a:rPr lang="en-US" sz="1350" dirty="0">
+                <a:solidFill>
+                  <a:srgbClr val="1A1A1A"/>
+                </a:solidFill>
+                <a:latin typeface="맑은 고딕" pitchFamily="34" charset="0"/>
+                <a:ea typeface="맑은 고딕" pitchFamily="34" charset="-122"/>
+                <a:cs typeface="맑은 고딕" pitchFamily="34" charset="-120"/>
+              </a:rPr>
+              <a:t>자료구조와 코딩 규약</a:t>
+            </a:r>
+            <a:endParaRPr lang="en-US" sz="1350" dirty="0"/>
+          </a:p>
+        </p:txBody>
+      </p:sp>
+      <p:sp>
+        <p:nvSpPr>
+          <p:cNvPr id="11" name="Text 9"/>
+          <p:cNvSpPr txBox="1"/>
+          <p:nvPr/>
+        </p:nvSpPr>
+        <p:spPr>
+          <a:xfrm>
+            <a:off x="5001768" y="2176272"/>
+            <a:ext cx="457200" cy="384048"/>
+          </a:xfrm>
+          <a:prstGeom prst="rect">
+            <a:avLst/>
+          </a:prstGeom>
+          <a:noFill/>
+          <a:ln/>
+        </p:spPr>
+        <p:txBody>
+          <a:bodyPr wrap="square" lIns="0" tIns="0" rIns="0" bIns="0" rtlCol="0" anchor="ctr"/>
+          <a:lstStyle/>
+          <a:p>
+            <a:pPr marL="0" indent="0">
+              <a:buNone/>
+            </a:pPr>
+            <a:r>
+              <a:rPr lang="en-US" sz="2100" b="1" dirty="0">
+                <a:solidFill>
+                  <a:srgbClr val="1A1A1A"/>
+                </a:solidFill>
+                <a:latin typeface="Arial" pitchFamily="34" charset="0"/>
+                <a:ea typeface="Arial" pitchFamily="34" charset="-122"/>
+                <a:cs typeface="Arial" pitchFamily="34" charset="-120"/>
+              </a:rPr>
+              <a:t>2</a:t>
+            </a:r>
+            <a:endParaRPr lang="en-US" sz="2100" dirty="0"/>
+          </a:p>
+        </p:txBody>
+      </p:sp>
+      <p:sp>
+        <p:nvSpPr>
+          <p:cNvPr id="12" name="Text 10"/>
+          <p:cNvSpPr txBox="1"/>
+          <p:nvPr/>
+        </p:nvSpPr>
+        <p:spPr>
+          <a:xfrm>
+            <a:off x="5797296" y="2176272"/>
+            <a:ext cx="6035040" cy="384048"/>
+          </a:xfrm>
+          <a:prstGeom prst="rect">
+            <a:avLst/>
+          </a:prstGeom>
+          <a:noFill/>
+          <a:ln/>
+        </p:spPr>
+        <p:txBody>
+          <a:bodyPr wrap="square" lIns="0" tIns="0" rIns="0" bIns="0" rtlCol="0" anchor="ctr"/>
+          <a:lstStyle/>
+          <a:p>
+            <a:pPr marL="0" indent="0">
+              <a:buNone/>
+            </a:pPr>
+            <a:r>
+              <a:rPr lang="en-US" sz="1350" dirty="0">
+                <a:solidFill>
+                  <a:srgbClr val="1A1A1A"/>
+                </a:solidFill>
+                <a:latin typeface="맑은 고딕" pitchFamily="34" charset="0"/>
+                <a:ea typeface="맑은 고딕" pitchFamily="34" charset="-122"/>
+                <a:cs typeface="맑은 고딕" pitchFamily="34" charset="-120"/>
+              </a:rPr>
+              <a:t>회전행렬 – 공식과 코드</a:t>
+            </a:r>
+            <a:endParaRPr lang="en-US" sz="1350" dirty="0"/>
+          </a:p>
+        </p:txBody>
+      </p:sp>
+      <p:sp>
+        <p:nvSpPr>
+          <p:cNvPr id="13" name="Text 11"/>
+          <p:cNvSpPr txBox="1"/>
+          <p:nvPr/>
+        </p:nvSpPr>
+        <p:spPr>
+          <a:xfrm>
+            <a:off x="5001768" y="2871216"/>
+            <a:ext cx="457200" cy="384048"/>
+          </a:xfrm>
+          <a:prstGeom prst="rect">
+            <a:avLst/>
+          </a:prstGeom>
+          <a:noFill/>
+          <a:ln/>
+        </p:spPr>
+        <p:txBody>
+          <a:bodyPr wrap="square" lIns="0" tIns="0" rIns="0" bIns="0" rtlCol="0" anchor="ctr"/>
+          <a:lstStyle/>
+          <a:p>
+            <a:pPr marL="0" indent="0">
+              <a:buNone/>
+            </a:pPr>
+            <a:r>
+              <a:rPr lang="en-US" sz="2100" b="1" dirty="0">
+                <a:solidFill>
+                  <a:srgbClr val="1A1A1A"/>
+                </a:solidFill>
+                <a:latin typeface="Arial" pitchFamily="34" charset="0"/>
+                <a:ea typeface="Arial" pitchFamily="34" charset="-122"/>
+                <a:cs typeface="Arial" pitchFamily="34" charset="-120"/>
+              </a:rPr>
+              <a:t>3</a:t>
+            </a:r>
+            <a:endParaRPr lang="en-US" sz="2100" dirty="0"/>
+          </a:p>
+        </p:txBody>
+      </p:sp>
+      <p:sp>
+        <p:nvSpPr>
+          <p:cNvPr id="14" name="Text 12"/>
+          <p:cNvSpPr txBox="1"/>
+          <p:nvPr/>
+        </p:nvSpPr>
+        <p:spPr>
+          <a:xfrm>
+            <a:off x="5797296" y="2871216"/>
+            <a:ext cx="6035040" cy="384048"/>
+          </a:xfrm>
+          <a:prstGeom prst="rect">
+            <a:avLst/>
+          </a:prstGeom>
+          <a:noFill/>
+          <a:ln/>
+        </p:spPr>
+        <p:txBody>
+          <a:bodyPr wrap="square" lIns="0" tIns="0" rIns="0" bIns="0" rtlCol="0" anchor="ctr"/>
+          <a:lstStyle/>
+          <a:p>
+            <a:pPr marL="0" indent="0">
+              <a:buNone/>
+            </a:pPr>
+            <a:r>
+              <a:rPr lang="en-US" sz="1350" dirty="0">
+                <a:solidFill>
+                  <a:srgbClr val="1A1A1A"/>
+                </a:solidFill>
+                <a:latin typeface="맑은 고딕" pitchFamily="34" charset="0"/>
+                <a:ea typeface="맑은 고딕" pitchFamily="34" charset="-122"/>
+                <a:cs typeface="맑은 고딕" pitchFamily="34" charset="-120"/>
+              </a:rPr>
+              <a:t>안테나 극좌표 → 직교 → 동체</a:t>
+            </a:r>
+            <a:endParaRPr lang="en-US" sz="1350" dirty="0"/>
+          </a:p>
+        </p:txBody>
+      </p:sp>
+      <p:sp>
+        <p:nvSpPr>
+          <p:cNvPr id="15" name="Text 13"/>
+          <p:cNvSpPr txBox="1"/>
+          <p:nvPr/>
+        </p:nvSpPr>
+        <p:spPr>
+          <a:xfrm>
+            <a:off x="5001768" y="3566160"/>
+            <a:ext cx="457200" cy="384048"/>
+          </a:xfrm>
+          <a:prstGeom prst="rect">
+            <a:avLst/>
+          </a:prstGeom>
+          <a:noFill/>
+          <a:ln/>
+        </p:spPr>
+        <p:txBody>
+          <a:bodyPr wrap="square" lIns="0" tIns="0" rIns="0" bIns="0" rtlCol="0" anchor="ctr"/>
+          <a:lstStyle/>
+          <a:p>
+            <a:pPr marL="0" indent="0">
+              <a:buNone/>
+            </a:pPr>
+            <a:r>
+              <a:rPr lang="en-US" sz="2100" b="1" dirty="0">
+                <a:solidFill>
+                  <a:srgbClr val="1A1A1A"/>
+                </a:solidFill>
+                <a:latin typeface="Arial" pitchFamily="34" charset="0"/>
+                <a:ea typeface="Arial" pitchFamily="34" charset="-122"/>
+                <a:cs typeface="Arial" pitchFamily="34" charset="-120"/>
+              </a:rPr>
+              <a:t>4</a:t>
+            </a:r>
+            <a:endParaRPr lang="en-US" sz="2100" dirty="0"/>
+          </a:p>
+        </p:txBody>
+      </p:sp>
+      <p:sp>
+        <p:nvSpPr>
+          <p:cNvPr id="16" name="Text 14"/>
+          <p:cNvSpPr txBox="1"/>
+          <p:nvPr/>
+        </p:nvSpPr>
+        <p:spPr>
+          <a:xfrm>
+            <a:off x="5797296" y="3566160"/>
+            <a:ext cx="6035040" cy="384048"/>
+          </a:xfrm>
+          <a:prstGeom prst="rect">
+            <a:avLst/>
+          </a:prstGeom>
+          <a:noFill/>
+          <a:ln/>
+        </p:spPr>
+        <p:txBody>
+          <a:bodyPr wrap="square" lIns="0" tIns="0" rIns="0" bIns="0" rtlCol="0" anchor="ctr"/>
+          <a:lstStyle/>
+          <a:p>
+            <a:pPr marL="0" indent="0">
+              <a:buNone/>
+            </a:pPr>
+            <a:r>
+              <a:rPr lang="en-US" sz="1350" dirty="0">
+                <a:solidFill>
+                  <a:srgbClr val="1A1A1A"/>
+                </a:solidFill>
+                <a:latin typeface="맑은 고딕" pitchFamily="34" charset="0"/>
+                <a:ea typeface="맑은 고딕" pitchFamily="34" charset="-122"/>
+                <a:cs typeface="맑은 고딕" pitchFamily="34" charset="-120"/>
+              </a:rPr>
+              <a:t>동체 → NED → ECEF</a:t>
+            </a:r>
+            <a:endParaRPr lang="en-US" sz="1350" dirty="0"/>
+          </a:p>
+        </p:txBody>
+      </p:sp>
+      <p:sp>
+        <p:nvSpPr>
+          <p:cNvPr id="17" name="Text 15"/>
+          <p:cNvSpPr txBox="1"/>
+          <p:nvPr/>
+        </p:nvSpPr>
+        <p:spPr>
+          <a:xfrm>
+            <a:off x="5001768" y="4261104"/>
+            <a:ext cx="457200" cy="384048"/>
+          </a:xfrm>
+          <a:prstGeom prst="rect">
+            <a:avLst/>
+          </a:prstGeom>
+          <a:noFill/>
+          <a:ln/>
+        </p:spPr>
+        <p:txBody>
+          <a:bodyPr wrap="square" lIns="0" tIns="0" rIns="0" bIns="0" rtlCol="0" anchor="ctr"/>
+          <a:lstStyle/>
+          <a:p>
+            <a:pPr marL="0" indent="0">
+              <a:buNone/>
+            </a:pPr>
+            <a:r>
+              <a:rPr lang="en-US" sz="2100" b="1" dirty="0">
+                <a:solidFill>
+                  <a:srgbClr val="1A1A1A"/>
+                </a:solidFill>
+                <a:latin typeface="Arial" pitchFamily="34" charset="0"/>
+                <a:ea typeface="Arial" pitchFamily="34" charset="-122"/>
+                <a:cs typeface="Arial" pitchFamily="34" charset="-120"/>
+              </a:rPr>
+              <a:t>5</a:t>
+            </a:r>
+            <a:endParaRPr lang="en-US" sz="2100" dirty="0"/>
+          </a:p>
+        </p:txBody>
+      </p:sp>
+      <p:sp>
+        <p:nvSpPr>
+          <p:cNvPr id="18" name="Text 16"/>
+          <p:cNvSpPr txBox="1"/>
+          <p:nvPr/>
+        </p:nvSpPr>
+        <p:spPr>
+          <a:xfrm>
+            <a:off x="5797296" y="4261104"/>
+            <a:ext cx="6035040" cy="384048"/>
+          </a:xfrm>
+          <a:prstGeom prst="rect">
+            <a:avLst/>
+          </a:prstGeom>
+          <a:noFill/>
+          <a:ln/>
+        </p:spPr>
+        <p:txBody>
+          <a:bodyPr wrap="square" lIns="0" tIns="0" rIns="0" bIns="0" rtlCol="0" anchor="ctr"/>
+          <a:lstStyle/>
+          <a:p>
+            <a:pPr marL="0" indent="0">
+              <a:buNone/>
+            </a:pPr>
+            <a:r>
+              <a:rPr lang="en-US" sz="1350" dirty="0">
+                <a:solidFill>
+                  <a:srgbClr val="1A1A1A"/>
+                </a:solidFill>
+                <a:latin typeface="맑은 고딕" pitchFamily="34" charset="0"/>
+                <a:ea typeface="맑은 고딕" pitchFamily="34" charset="-122"/>
+                <a:cs typeface="맑은 고딕" pitchFamily="34" charset="-120"/>
+              </a:rPr>
+              <a:t>ECEF ↔ LLA</a:t>
+            </a:r>
+            <a:endParaRPr lang="en-US" sz="1350" dirty="0"/>
+          </a:p>
+        </p:txBody>
+      </p:sp>
+      <p:sp>
+        <p:nvSpPr>
+          <p:cNvPr id="19" name="Copy 19"/>
+          <p:cNvSpPr txBox="1"/>
+          <p:nvPr/>
+        </p:nvSpPr>
+        <p:spPr>
+          <a:xfrm>
+            <a:off x="5001768" y="4956048"/>
+            <a:ext cx="457200" cy="384048"/>
+          </a:xfrm>
+          <a:prstGeom prst="rect">
+            <a:avLst/>
+          </a:prstGeom>
+          <a:noFill/>
+          <a:ln/>
+        </p:spPr>
+        <p:txBody>
+          <a:bodyPr wrap="square" lIns="0" tIns="0" rIns="0" bIns="0" rtlCol="0" anchor="ctr"/>
+          <a:lstStyle/>
+          <a:p>
+            <a:pPr marL="0" indent="0">
+              <a:buNone/>
+            </a:pPr>
+            <a:r>
+              <a:rPr lang="en-US" sz="2100" b="1" dirty="0">
+                <a:solidFill>
+                  <a:srgbClr val="1A1A1A"/>
+                </a:solidFill>
+                <a:latin typeface="Arial" pitchFamily="34" charset="0"/>
+                <a:ea typeface="Arial" pitchFamily="34" charset="-122"/>
+                <a:cs typeface="Arial" pitchFamily="34" charset="-120"/>
+              </a:rPr>
+              <a:t>6</a:t>
+            </a:r>
+            <a:endParaRPr lang="en-US" sz="2100" dirty="0"/>
+          </a:p>
+        </p:txBody>
+      </p:sp>
+      <p:sp>
+        <p:nvSpPr>
+          <p:cNvPr id="20" name="Copy 20"/>
+          <p:cNvSpPr txBox="1"/>
+          <p:nvPr/>
+        </p:nvSpPr>
+        <p:spPr>
+          <a:xfrm>
+            <a:off x="5797296" y="4956048"/>
+            <a:ext cx="6035040" cy="384048"/>
+          </a:xfrm>
+          <a:prstGeom prst="rect">
+            <a:avLst/>
+          </a:prstGeom>
+          <a:noFill/>
+          <a:ln/>
+        </p:spPr>
+        <p:txBody>
+          <a:bodyPr wrap="square" lIns="0" tIns="0" rIns="0" bIns="0" rtlCol="0" anchor="ctr"/>
+          <a:lstStyle/>
+          <a:p>
+            <a:pPr marL="0" indent="0">
+              <a:buNone/>
+            </a:pPr>
+            <a:r>
+              <a:rPr lang="en-US" sz="1350" dirty="0">
+                <a:solidFill>
+                  <a:srgbClr val="1A1A1A"/>
+                </a:solidFill>
+                <a:latin typeface="맑은 고딕" pitchFamily="34" charset="0"/>
+                <a:ea typeface="맑은 고딕" pitchFamily="34" charset="-122"/>
+                <a:cs typeface="맑은 고딕" pitchFamily="34" charset="-120"/>
+              </a:rPr>
+              <a:t>역변환</a:t>
+            </a:r>
+            <a:endParaRPr lang="en-US" sz="1350" dirty="0"/>
+          </a:p>
+        </p:txBody>
+      </p:sp>
+      <p:sp>
+        <p:nvSpPr>
+          <p:cNvPr id="21" name="Copy 21"/>
+          <p:cNvSpPr txBox="1"/>
+          <p:nvPr/>
+        </p:nvSpPr>
+        <p:spPr>
+          <a:xfrm>
+            <a:off x="5001768" y="5650992"/>
+            <a:ext cx="457200" cy="384048"/>
+          </a:xfrm>
+          <a:prstGeom prst="rect">
+            <a:avLst/>
+          </a:prstGeom>
+          <a:noFill/>
+          <a:ln/>
+        </p:spPr>
+        <p:txBody>
+          <a:bodyPr wrap="square" lIns="0" tIns="0" rIns="0" bIns="0" rtlCol="0" anchor="ctr"/>
+          <a:lstStyle/>
+          <a:p>
+            <a:pPr marL="0" indent="0">
+              <a:buNone/>
+            </a:pPr>
+            <a:r>
+              <a:rPr lang="en-US" sz="2100" b="1" dirty="0">
+                <a:solidFill>
+                  <a:srgbClr val="1A1A1A"/>
+                </a:solidFill>
+                <a:latin typeface="Arial" pitchFamily="34" charset="0"/>
+                <a:ea typeface="Arial" pitchFamily="34" charset="-122"/>
+                <a:cs typeface="Arial" pitchFamily="34" charset="-120"/>
+              </a:rPr>
+              <a:t>7</a:t>
+            </a:r>
+            <a:endParaRPr lang="en-US" sz="2100" dirty="0"/>
+          </a:p>
+        </p:txBody>
+      </p:sp>
+      <p:sp>
+        <p:nvSpPr>
+          <p:cNvPr id="22" name="Copy 22"/>
+          <p:cNvSpPr txBox="1"/>
+          <p:nvPr/>
+        </p:nvSpPr>
+        <p:spPr>
+          <a:xfrm>
+            <a:off x="5797296" y="5650992"/>
+            <a:ext cx="6035040" cy="384048"/>
+          </a:xfrm>
+          <a:prstGeom prst="rect">
+            <a:avLst/>
+          </a:prstGeom>
+          <a:noFill/>
+          <a:ln/>
+        </p:spPr>
+        <p:txBody>
+          <a:bodyPr wrap="square" lIns="0" tIns="0" rIns="0" bIns="0" rtlCol="0" anchor="ctr"/>
+          <a:lstStyle/>
+          <a:p>
+            <a:pPr marL="0" indent="0">
+              <a:buNone/>
+            </a:pPr>
+            <a:r>
+              <a:rPr lang="en-US" sz="1350" dirty="0">
+                <a:solidFill>
+                  <a:srgbClr val="1A1A1A"/>
+                </a:solidFill>
+                <a:latin typeface="맑은 고딕" pitchFamily="34" charset="0"/>
+                <a:ea typeface="맑은 고딕" pitchFamily="34" charset="-122"/>
+                <a:cs typeface="맑은 고딕" pitchFamily="34" charset="-120"/>
+              </a:rPr>
+              <a:t>실행 결과와 UI 확인</a:t>
+            </a:r>
+            <a:endParaRPr lang="en-US" sz="1350" dirty="0"/>
+          </a:p>
+        </p:txBody>
+      </p:sp>
+    </p:spTree>
+  </p:cSld>
+  <p:clrMapOvr>
+    <a:masterClrMapping/>
+  </p:clrMapOvr>
+</p:sld>
+</file>
+
+<file path=ppt/slides/slide24.xml><?xml version="1.0" encoding="utf-8"?>
+<p:sld xmlns:a="http://schemas.openxmlformats.org/drawingml/2006/main" xmlns:p="http://schemas.openxmlformats.org/presentationml/2006/main" xmlns:r="http://schemas.openxmlformats.org/officeDocument/2006/relationships">
+  <p:cSld>
+    <p:spTree>
+      <p:nvGrpSpPr>
+        <p:cNvPr id="1" name=""/>
+        <p:cNvGrpSpPr/>
+        <p:nvPr/>
+      </p:nvGrpSpPr>
+      <p:grpSpPr/>
+      <p:sp>
+        <p:nvSpPr>
+          <p:cNvPr id="2" name="Shape 0"/>
+          <p:cNvSpPr/>
+          <p:nvPr/>
+        </p:nvSpPr>
+        <p:spPr>
+          <a:xfrm>
+            <a:off x="548640" y="384048"/>
+            <a:ext cx="11094415" cy="566928"/>
+          </a:xfrm>
+          <a:prstGeom prst="rect">
+            <a:avLst/>
+          </a:prstGeom>
+          <a:solidFill>
+            <a:srgbClr val="3E4650"/>
+          </a:solidFill>
+          <a:ln/>
+        </p:spPr>
+      </p:sp>
+      <p:sp>
+        <p:nvSpPr>
+          <p:cNvPr id="3" name="Text 1"/>
+          <p:cNvSpPr txBox="1"/>
+          <p:nvPr/>
+        </p:nvSpPr>
+        <p:spPr>
+          <a:xfrm>
+            <a:off x="749808" y="384048"/>
+            <a:ext cx="10692079" cy="566928"/>
+          </a:xfrm>
+          <a:prstGeom prst="rect">
+            <a:avLst/>
+          </a:prstGeom>
+          <a:noFill/>
+          <a:ln/>
+        </p:spPr>
+        <p:txBody>
+          <a:bodyPr wrap="square" lIns="0" tIns="0" rIns="0" bIns="0" rtlCol="0" anchor="ctr"/>
+          <a:lstStyle/>
+          <a:p>
+            <a:pPr marL="0" indent="0">
+              <a:buNone/>
+            </a:pPr>
+            <a:r>
+              <a:rPr lang="en-US" sz="2000" b="1" dirty="0">
+                <a:solidFill>
+                  <a:srgbClr val="FFFFFF"/>
+                </a:solidFill>
+                <a:latin typeface="맑은 고딕" pitchFamily="34" charset="0"/>
+                <a:ea typeface="맑은 고딕" pitchFamily="34" charset="-122"/>
+                <a:cs typeface="맑은 고딕" pitchFamily="34" charset="-120"/>
+              </a:rPr>
+              <a:t>03. 자료구조와 코딩 규약</a:t>
+            </a:r>
+            <a:endParaRPr lang="en-US" sz="2000" dirty="0"/>
+          </a:p>
+        </p:txBody>
+      </p:sp>
+      <p:sp>
+        <p:nvSpPr>
+          <p:cNvPr id="4" name="Shape 2"/>
+          <p:cNvSpPr/>
+          <p:nvPr/>
+        </p:nvSpPr>
+        <p:spPr>
+          <a:xfrm>
+            <a:off x="548640" y="1097280"/>
+            <a:ext cx="11094415" cy="4864608"/>
+          </a:xfrm>
+          <a:prstGeom prst="rect">
+            <a:avLst/>
+          </a:prstGeom>
+          <a:solidFill>
+            <a:srgbClr val="F4F4F4"/>
+          </a:solidFill>
+          <a:ln/>
+        </p:spPr>
+      </p:sp>
+      <p:sp>
+        <p:nvSpPr>
+          <p:cNvPr id="5" name="Shape 3"/>
+          <p:cNvSpPr/>
+          <p:nvPr/>
+        </p:nvSpPr>
+        <p:spPr>
+          <a:xfrm>
+            <a:off x="548640" y="6199632"/>
+            <a:ext cx="11094415" cy="0"/>
+          </a:xfrm>
+          <a:prstGeom prst="line">
+            <a:avLst/>
+          </a:prstGeom>
+          <a:noFill/>
+          <a:ln w="9525">
+            <a:solidFill>
+              <a:srgbClr val="BFBFBF"/>
+            </a:solidFill>
+            <a:prstDash val="solid"/>
+          </a:ln>
+        </p:spPr>
+      </p:sp>
+      <p:sp>
+        <p:nvSpPr>
+          <p:cNvPr id="7" name="Text 5"/>
+          <p:cNvSpPr txBox="1"/>
+          <p:nvPr/>
+        </p:nvSpPr>
+        <p:spPr>
+          <a:xfrm>
+            <a:off x="0" y="6419088"/>
+            <a:ext cx="12191695" cy="219456"/>
+          </a:xfrm>
+          <a:prstGeom prst="rect">
+            <a:avLst/>
+          </a:prstGeom>
+          <a:noFill/>
+          <a:ln/>
+        </p:spPr>
+        <p:txBody>
+          <a:bodyPr wrap="square" lIns="0" tIns="0" rIns="0" bIns="0" rtlCol="0" anchor="ctr"/>
+          <a:lstStyle/>
+          <a:p>
+            <a:pPr marL="0" indent="0" algn="ctr">
+              <a:buNone/>
+            </a:pPr>
+            <a:r>
+              <a:rPr lang="en-US" sz="900" dirty="0">
+                <a:solidFill>
+                  <a:srgbClr val="A0A0A0"/>
+                </a:solidFill>
+                <a:latin typeface="Arial" pitchFamily="34" charset="0"/>
+                <a:ea typeface="Arial" pitchFamily="34" charset="-122"/>
+                <a:cs typeface="Arial" pitchFamily="34" charset="-120"/>
+              </a:rPr>
+              <a:t>24</a:t>
+            </a:r>
+            <a:endParaRPr lang="en-US" sz="900" dirty="0"/>
+          </a:p>
+        </p:txBody>
+      </p:sp>
+      <p:sp>
+        <p:nvSpPr>
+          <p:cNvPr id="8" name="Shape 6"/>
+          <p:cNvSpPr/>
+          <p:nvPr/>
+        </p:nvSpPr>
+        <p:spPr>
+          <a:xfrm>
+            <a:off x="786384" y="1335024"/>
+            <a:ext cx="50292" cy="274320"/>
+          </a:xfrm>
+          <a:prstGeom prst="rect">
+            <a:avLst/>
+          </a:prstGeom>
+          <a:solidFill>
+            <a:srgbClr val="3E4650"/>
+          </a:solidFill>
+          <a:ln/>
+        </p:spPr>
+      </p:sp>
+      <p:sp>
+        <p:nvSpPr>
+          <p:cNvPr id="9" name="Text 7"/>
+          <p:cNvSpPr txBox="1"/>
+          <p:nvPr/>
+        </p:nvSpPr>
+        <p:spPr>
+          <a:xfrm>
+            <a:off x="932688" y="1298448"/>
+            <a:ext cx="10271455" cy="347472"/>
+          </a:xfrm>
+          <a:prstGeom prst="rect">
+            <a:avLst/>
+          </a:prstGeom>
+          <a:noFill/>
+          <a:ln/>
+        </p:spPr>
+        <p:txBody>
+          <a:bodyPr wrap="square" lIns="0" tIns="0" rIns="0" bIns="0" rtlCol="0" anchor="ctr"/>
+          <a:lstStyle/>
+          <a:p>
+            <a:pPr marL="0" indent="0">
+              <a:buNone/>
+            </a:pPr>
+            <a:r>
+              <a:rPr lang="en-US" sz="1450" b="1" dirty="0">
+                <a:solidFill>
+                  <a:srgbClr val="1A1A1A"/>
+                </a:solidFill>
+                <a:latin typeface="맑은 고딕" pitchFamily="34" charset="0"/>
+                <a:ea typeface="맑은 고딕" pitchFamily="34" charset="-122"/>
+                <a:cs typeface="맑은 고딕" pitchFamily="34" charset="-120"/>
+              </a:rPr>
+              <a:t>측정값 · 자세 · 설치처럼 뜻이 다른 값은 타입을 따로 뒀다. 다만 위치는 네 좌표계가 ST_Vec3 하나를 같이 쓴다.</a:t>
+            </a:r>
+            <a:endParaRPr lang="en-US" sz="1450" dirty="0"/>
+          </a:p>
+        </p:txBody>
+      </p:sp>
+      <p:sp>
+        <p:nvSpPr>
+          <p:cNvPr id="10" name="Rounded Rectangle 9"/>
+          <p:cNvSpPr/>
+          <p:nvPr/>
+        </p:nvSpPr>
+        <p:spPr>
+          <a:xfrm>
+            <a:off x="914400" y="1773936"/>
+            <a:ext cx="6309360" cy="2395728"/>
+          </a:xfrm>
+          <a:prstGeom prst="roundRect">
+            <a:avLst>
+              <a:gd name="adj" fmla="val 2000"/>
+            </a:avLst>
+          </a:prstGeom>
+          <a:solidFill>
+            <a:srgbClr val="FFFFFF"/>
+          </a:solidFill>
+          <a:ln>
+            <a:noFill/>
+          </a:ln>
+          <a:effectLst/>
+        </p:spPr>
+        <p:txBody>
+          <a:bodyPr rtlCol="0" anchor="ctr"/>
+          <a:lstStyle/>
+          <a:p>
+            <a:pPr algn="ctr"/>
+          </a:p>
+        </p:txBody>
+      </p:sp>
+      <p:sp>
+        <p:nvSpPr>
+          <p:cNvPr id="11" name="TextBox 10"/>
+          <p:cNvSpPr txBox="1"/>
+          <p:nvPr/>
+        </p:nvSpPr>
+        <p:spPr>
+          <a:xfrm>
+            <a:off x="1060704" y="1856231"/>
+            <a:ext cx="6016752" cy="2249424"/>
+          </a:xfrm>
+          <a:prstGeom prst="rect">
+            <a:avLst/>
+          </a:prstGeom>
+          <a:noFill/>
+        </p:spPr>
+        <p:txBody>
+          <a:bodyPr wrap="square" lIns="0" rIns="0" tIns="0" bIns="0">
+            <a:spAutoFit/>
+          </a:bodyPr>
+          <a:lstStyle/>
+          <a:p>
+            <a:pPr>
+              <a:spcBef>
+                <a:spcPts val="0"/>
+              </a:spcBef>
+            </a:pPr>
+            <a:r>
+              <a:rPr sz="950" b="0">
+                <a:solidFill>
+                  <a:srgbClr val="1A1A1A"/>
+                </a:solidFill>
+                <a:latin typeface="Consolas"/>
+              </a:rPr>
+              <a:t>typedef struct { FLOAT64 dX, dY, dZ; }              ST_Vec3;</a:t>
+            </a:r>
+          </a:p>
+          <a:p>
+            <a:pPr>
+              <a:spcBef>
+                <a:spcPts val="220"/>
+              </a:spcBef>
+            </a:pPr>
+            <a:r>
+              <a:rPr sz="950" b="0">
+                <a:solidFill>
+                  <a:srgbClr val="777777"/>
+                </a:solidFill>
+                <a:latin typeface="Consolas"/>
+              </a:rPr>
+              <a:t>        // 어느 좌표계든 3차원 위치 [m]</a:t>
+            </a:r>
+          </a:p>
+          <a:p>
+            <a:pPr>
+              <a:spcBef>
+                <a:spcPts val="220"/>
+              </a:spcBef>
+            </a:pPr>
+            <a:r>
+              <a:rPr sz="950" b="0">
+                <a:solidFill>
+                  <a:srgbClr val="1A1A1A"/>
+                </a:solidFill>
+                <a:latin typeface="Consolas"/>
+              </a:rPr>
+              <a:t>typedef struct { FLOAT64 dRange, dAz, dEl; }        ST_Polar;</a:t>
+            </a:r>
+          </a:p>
+          <a:p>
+            <a:pPr>
+              <a:spcBef>
+                <a:spcPts val="220"/>
+              </a:spcBef>
+            </a:pPr>
+            <a:r>
+              <a:rPr sz="950" b="0">
+                <a:solidFill>
+                  <a:srgbClr val="777777"/>
+                </a:solidFill>
+                <a:latin typeface="Consolas"/>
+              </a:rPr>
+              <a:t>        // 신호처리 측정값.  Az/El 은 [rad]</a:t>
+            </a:r>
+          </a:p>
+          <a:p>
+            <a:pPr>
+              <a:spcBef>
+                <a:spcPts val="220"/>
+              </a:spcBef>
+            </a:pPr>
+            <a:r>
+              <a:rPr sz="950" b="0">
+                <a:solidFill>
+                  <a:srgbClr val="1A1A1A"/>
+                </a:solidFill>
+                <a:latin typeface="Consolas"/>
+              </a:rPr>
+              <a:t>typedef struct { FLOAT64 dLat, dLon, dAlt; }        ST_Lla;</a:t>
+            </a:r>
+          </a:p>
+          <a:p>
+            <a:pPr>
+              <a:spcBef>
+                <a:spcPts val="220"/>
+              </a:spcBef>
+            </a:pPr>
+            <a:r>
+              <a:rPr sz="950" b="0">
+                <a:solidFill>
+                  <a:srgbClr val="777777"/>
+                </a:solidFill>
+                <a:latin typeface="Consolas"/>
+              </a:rPr>
+              <a:t>        // 위도·경도 [rad], 타원체고 [m]</a:t>
+            </a:r>
+          </a:p>
+          <a:p>
+            <a:pPr>
+              <a:spcBef>
+                <a:spcPts val="220"/>
+              </a:spcBef>
+            </a:pPr>
+            <a:r>
+              <a:rPr sz="950" b="0">
+                <a:solidFill>
+                  <a:srgbClr val="1A1A1A"/>
+                </a:solidFill>
+                <a:latin typeface="Consolas"/>
+              </a:rPr>
+              <a:t>typedef struct { FLOAT64 dRoll, dPitch, dYaw; }     ST_Attitude;</a:t>
+            </a:r>
+          </a:p>
+          <a:p>
+            <a:pPr>
+              <a:spcBef>
+                <a:spcPts val="220"/>
+              </a:spcBef>
+            </a:pPr>
+            <a:r>
+              <a:rPr sz="950" b="0">
+                <a:solidFill>
+                  <a:srgbClr val="777777"/>
+                </a:solidFill>
+                <a:latin typeface="Consolas"/>
+              </a:rPr>
+              <a:t>        // INS 자세 [rad]</a:t>
+            </a:r>
+          </a:p>
+          <a:p>
+            <a:pPr>
+              <a:spcBef>
+                <a:spcPts val="220"/>
+              </a:spcBef>
+            </a:pPr>
+            <a:r>
+              <a:rPr sz="950" b="0">
+                <a:solidFill>
+                  <a:srgbClr val="1A1A1A"/>
+                </a:solidFill>
+                <a:latin typeface="Consolas"/>
+              </a:rPr>
+              <a:t>typedef struct { FLOAT64 dAz, dTilt;</a:t>
+            </a:r>
+          </a:p>
+          <a:p>
+            <a:pPr>
+              <a:spcBef>
+                <a:spcPts val="220"/>
+              </a:spcBef>
+            </a:pPr>
+            <a:r>
+              <a:rPr sz="950" b="0">
+                <a:solidFill>
+                  <a:srgbClr val="1A1A1A"/>
+                </a:solidFill>
+                <a:latin typeface="Consolas"/>
+              </a:rPr>
+              <a:t>                 ST_Vec3 stOffset;   }              ST_Mount;</a:t>
+            </a:r>
+          </a:p>
+          <a:p>
+            <a:pPr>
+              <a:spcBef>
+                <a:spcPts val="220"/>
+              </a:spcBef>
+            </a:pPr>
+            <a:r>
+              <a:rPr sz="950" b="0">
+                <a:solidFill>
+                  <a:srgbClr val="777777"/>
+                </a:solidFill>
+                <a:latin typeface="Consolas"/>
+              </a:rPr>
+              <a:t>        // 설치 방위·백틸트 [rad] + 레버암 [m].  고정형이라 상수</a:t>
+            </a:r>
+          </a:p>
+        </p:txBody>
+      </p:sp>
+      <p:sp>
+        <p:nvSpPr>
+          <p:cNvPr id="12" name="Rounded Rectangle 11"/>
+          <p:cNvSpPr/>
+          <p:nvPr/>
+        </p:nvSpPr>
+        <p:spPr>
+          <a:xfrm>
+            <a:off x="7479792" y="1773936"/>
+            <a:ext cx="3794760" cy="1133856"/>
+          </a:xfrm>
+          <a:prstGeom prst="roundRect">
+            <a:avLst>
+              <a:gd name="adj" fmla="val 4000"/>
+            </a:avLst>
+          </a:prstGeom>
+          <a:solidFill>
+            <a:srgbClr val="DCDCDC"/>
+          </a:solidFill>
+          <a:ln>
+            <a:noFill/>
+          </a:ln>
+          <a:effectLst/>
+        </p:spPr>
+        <p:txBody>
+          <a:bodyPr rtlCol="0" anchor="ctr"/>
+          <a:lstStyle/>
+          <a:p>
+            <a:pPr algn="ctr"/>
+          </a:p>
+        </p:txBody>
+      </p:sp>
+      <p:sp>
+        <p:nvSpPr>
+          <p:cNvPr id="13" name="TextBox 12"/>
+          <p:cNvSpPr txBox="1"/>
+          <p:nvPr/>
+        </p:nvSpPr>
+        <p:spPr>
+          <a:xfrm>
+            <a:off x="7662671" y="1874519"/>
+            <a:ext cx="3429000" cy="969264"/>
+          </a:xfrm>
+          <a:prstGeom prst="rect">
+            <a:avLst/>
+          </a:prstGeom>
+          <a:noFill/>
+        </p:spPr>
+        <p:txBody>
+          <a:bodyPr wrap="square" lIns="0" rIns="0" tIns="0" bIns="0">
+            <a:spAutoFit/>
+          </a:bodyPr>
+          <a:lstStyle/>
+          <a:p>
+            <a:r>
+              <a:rPr sz="1200" b="1">
+                <a:solidFill>
+                  <a:srgbClr val="1A1A1A"/>
+                </a:solidFill>
+                <a:latin typeface="맑은 고딕"/>
+              </a:rPr>
+              <a:t>단위는 경계에서만 바꾼다</a:t>
+            </a:r>
+          </a:p>
+          <a:p>
+            <a:pPr>
+              <a:spcBef>
+                <a:spcPts val="400"/>
+              </a:spcBef>
+            </a:pPr>
+            <a:r>
+              <a:rPr sz="900" b="0">
+                <a:solidFill>
+                  <a:srgbClr val="555555"/>
+                </a:solidFill>
+                <a:latin typeface="맑은 고딕"/>
+              </a:rPr>
+              <a:t>라이브러리 안은 전부 라디안 · m</a:t>
+            </a:r>
+          </a:p>
+          <a:p>
+            <a:pPr>
+              <a:spcBef>
+                <a:spcPts val="200"/>
+              </a:spcBef>
+            </a:pPr>
+            <a:r>
+              <a:rPr sz="900" b="0">
+                <a:solidFill>
+                  <a:srgbClr val="555555"/>
+                </a:solidFill>
+                <a:latin typeface="맑은 고딕"/>
+              </a:rPr>
+              <a:t>DEG2RAD / RAD2DEG 는 main.c 와 UI 에서만</a:t>
+            </a:r>
+          </a:p>
+          <a:p>
+            <a:pPr>
+              <a:spcBef>
+                <a:spcPts val="200"/>
+              </a:spcBef>
+            </a:pPr>
+            <a:r>
+              <a:rPr sz="900" b="0">
+                <a:solidFill>
+                  <a:srgbClr val="555555"/>
+                </a:solidFill>
+                <a:latin typeface="맑은 고딕"/>
+              </a:rPr>
+              <a:t>WGS84_A · WGS84_F · WGS84_E2 는 헤더 한 곳</a:t>
+            </a:r>
+          </a:p>
+        </p:txBody>
+      </p:sp>
+      <p:sp>
+        <p:nvSpPr>
+          <p:cNvPr id="14" name="Rounded Rectangle 13"/>
+          <p:cNvSpPr/>
+          <p:nvPr/>
+        </p:nvSpPr>
+        <p:spPr>
+          <a:xfrm>
+            <a:off x="7479792" y="3017520"/>
+            <a:ext cx="3794760" cy="1133856"/>
+          </a:xfrm>
+          <a:prstGeom prst="roundRect">
+            <a:avLst>
+              <a:gd name="adj" fmla="val 4000"/>
+            </a:avLst>
+          </a:prstGeom>
+          <a:solidFill>
+            <a:srgbClr val="DCDCDC"/>
+          </a:solidFill>
+          <a:ln>
+            <a:noFill/>
+          </a:ln>
+          <a:effectLst/>
+        </p:spPr>
+        <p:txBody>
+          <a:bodyPr rtlCol="0" anchor="ctr"/>
+          <a:lstStyle/>
+          <a:p>
+            <a:pPr algn="ctr"/>
+          </a:p>
+        </p:txBody>
+      </p:sp>
+      <p:sp>
+        <p:nvSpPr>
+          <p:cNvPr id="15" name="TextBox 14"/>
+          <p:cNvSpPr txBox="1"/>
+          <p:nvPr/>
+        </p:nvSpPr>
+        <p:spPr>
+          <a:xfrm>
+            <a:off x="7662671" y="3118103"/>
+            <a:ext cx="3429000" cy="969264"/>
+          </a:xfrm>
+          <a:prstGeom prst="rect">
+            <a:avLst/>
+          </a:prstGeom>
+          <a:noFill/>
+        </p:spPr>
+        <p:txBody>
+          <a:bodyPr wrap="square" lIns="0" rIns="0" tIns="0" bIns="0">
+            <a:spAutoFit/>
+          </a:bodyPr>
+          <a:lstStyle/>
+          <a:p>
+            <a:r>
+              <a:rPr sz="1200" b="1">
+                <a:solidFill>
+                  <a:srgbClr val="1A1A1A"/>
+                </a:solidFill>
+                <a:latin typeface="맑은 고딕"/>
+              </a:rPr>
+              <a:t>전부 값 전달 · 값 반환</a:t>
+            </a:r>
+          </a:p>
+          <a:p>
+            <a:pPr>
+              <a:spcBef>
+                <a:spcPts val="400"/>
+              </a:spcBef>
+            </a:pPr>
+            <a:r>
+              <a:rPr sz="900" b="0">
+                <a:solidFill>
+                  <a:srgbClr val="555555"/>
+                </a:solidFill>
+                <a:latin typeface="맑은 고딕"/>
+              </a:rPr>
+              <a:t>const ST_Mount stMount 처럼 값으로 받고</a:t>
+            </a:r>
+          </a:p>
+          <a:p>
+            <a:pPr>
+              <a:spcBef>
+                <a:spcPts val="200"/>
+              </a:spcBef>
+            </a:pPr>
+            <a:r>
+              <a:rPr sz="900" b="0">
+                <a:solidFill>
+                  <a:srgbClr val="555555"/>
+                </a:solidFill>
+                <a:latin typeface="맑은 고딕"/>
+              </a:rPr>
+              <a:t>구조체를 그대로 return — 포인터 · malloc ·</a:t>
+            </a:r>
+          </a:p>
+          <a:p>
+            <a:pPr>
+              <a:spcBef>
+                <a:spcPts val="200"/>
+              </a:spcBef>
+            </a:pPr>
+            <a:r>
+              <a:rPr sz="900" b="0">
+                <a:solidFill>
+                  <a:srgbClr val="555555"/>
+                </a:solidFill>
+                <a:latin typeface="맑은 고딕"/>
+              </a:rPr>
+              <a:t>전역 상태가 없다 → 재진입 · 스레드 안전</a:t>
+            </a:r>
+          </a:p>
+        </p:txBody>
+      </p:sp>
+      <p:sp>
+        <p:nvSpPr>
+          <p:cNvPr id="16" name="Rounded Rectangle 15"/>
+          <p:cNvSpPr/>
+          <p:nvPr/>
+        </p:nvSpPr>
+        <p:spPr>
+          <a:xfrm>
+            <a:off x="914400" y="4297680"/>
+            <a:ext cx="10360152" cy="1444752"/>
+          </a:xfrm>
+          <a:prstGeom prst="roundRect">
+            <a:avLst>
+              <a:gd name="adj" fmla="val 4000"/>
+            </a:avLst>
+          </a:prstGeom>
+          <a:solidFill>
+            <a:srgbClr val="DCDCDC"/>
+          </a:solidFill>
+          <a:ln>
+            <a:noFill/>
+          </a:ln>
+          <a:effectLst/>
+        </p:spPr>
+        <p:txBody>
+          <a:bodyPr rtlCol="0" anchor="ctr"/>
+          <a:lstStyle/>
+          <a:p>
+            <a:pPr algn="ctr"/>
+          </a:p>
+        </p:txBody>
+      </p:sp>
+      <p:sp>
+        <p:nvSpPr>
+          <p:cNvPr id="17" name="TextBox 16"/>
+          <p:cNvSpPr txBox="1"/>
+          <p:nvPr/>
+        </p:nvSpPr>
+        <p:spPr>
+          <a:xfrm>
+            <a:off x="1133856" y="4389120"/>
+            <a:ext cx="9921240" cy="1261872"/>
+          </a:xfrm>
+          <a:prstGeom prst="rect">
+            <a:avLst/>
+          </a:prstGeom>
+          <a:noFill/>
+        </p:spPr>
+        <p:txBody>
+          <a:bodyPr wrap="square" lIns="0" rIns="0" tIns="0" bIns="0">
+            <a:spAutoFit/>
+          </a:bodyPr>
+          <a:lstStyle/>
+          <a:p>
+            <a:r>
+              <a:rPr sz="1200" b="1">
+                <a:solidFill>
+                  <a:srgbClr val="1A1A1A"/>
+                </a:solidFill>
+                <a:latin typeface="맑은 고딕"/>
+              </a:rPr>
+              <a:t>이름 규칙 — 읽는 사람이 타입과 단위를 이름만 보고 안다</a:t>
+            </a:r>
+          </a:p>
+          <a:p>
+            <a:pPr>
+              <a:spcBef>
+                <a:spcPts val="400"/>
+              </a:spcBef>
+            </a:pPr>
+            <a:r>
+              <a:rPr sz="900" b="0">
+                <a:solidFill>
+                  <a:srgbClr val="555555"/>
+                </a:solidFill>
+                <a:latin typeface="맑은 고딕"/>
+              </a:rPr>
+              <a:t>ST_  구조체 타입     ·     f_  함수     ·     st  구조체 변수     ·     d  double 변수     ·     n / i  정수</a:t>
+            </a:r>
+          </a:p>
+          <a:p>
+            <a:pPr>
+              <a:spcBef>
+                <a:spcPts val="400"/>
+              </a:spcBef>
+            </a:pPr>
+            <a:r>
+              <a:rPr sz="900" b="0">
+                <a:solidFill>
+                  <a:srgbClr val="555555"/>
+                </a:solidFill>
+                <a:latin typeface="맑은 고딕"/>
+              </a:rPr>
+              <a:t>FLOAT64 · INT32 · CHAR · VOID 는 헤더에서 typedef. windows.h 를 먼저 include 하면 그쪽 정의를 그대로 쓰도록 #ifndef _WINDOWS_ 로 감쌌다.</a:t>
+            </a:r>
+          </a:p>
+          <a:p>
+            <a:pPr>
+              <a:spcBef>
+                <a:spcPts val="400"/>
+              </a:spcBef>
+            </a:pPr>
+            <a:r>
+              <a:rPr sz="900" b="0">
+                <a:solidFill>
+                  <a:srgbClr val="555555"/>
+                </a:solidFill>
+                <a:latin typeface="맑은 고딕"/>
+              </a:rPr>
+              <a:t>extern "C" 로 감싸 두어 C++ 인 MFC 쪽(CoordUIDlg.cpp)에서 헤더 하나만 include 하면 바로 호출된다.</a:t>
+            </a:r>
+          </a:p>
+          <a:p>
+            <a:pPr>
+              <a:spcBef>
+                <a:spcPts val="500"/>
+              </a:spcBef>
+            </a:pPr>
+            <a:r>
+              <a:rPr sz="900" b="0">
+                <a:solidFill>
+                  <a:srgbClr val="1A1A1A"/>
+                </a:solidFill>
+                <a:latin typeface="맑은 고딕"/>
+              </a:rPr>
+              <a:t>다만 좌표계는 타입이 아니라 함수 이름이 지킨다 — ST_Vec3 를 안테나 · 동체 · NED · ECEF 가 같이 쓰므로, 엉뚱한 좌표계를 넘겨도 컴파일러는 잡아 주지 않는다.</a:t>
+            </a:r>
+          </a:p>
+        </p:txBody>
+      </p:sp>
+    </p:spTree>
+  </p:cSld>
+  <p:clrMapOvr>
+    <a:masterClrMapping/>
+  </p:clrMapOvr>
+</p:sld>
+</file>
+
+<file path=ppt/slides/slide25.xml><?xml version="1.0" encoding="utf-8"?>
+<p:sld xmlns:a="http://schemas.openxmlformats.org/drawingml/2006/main" xmlns:p="http://schemas.openxmlformats.org/presentationml/2006/main" xmlns:r="http://schemas.openxmlformats.org/officeDocument/2006/relationships">
+  <p:cSld>
+    <p:spTree>
+      <p:nvGrpSpPr>
+        <p:cNvPr id="1" name=""/>
+        <p:cNvGrpSpPr/>
+        <p:nvPr/>
+      </p:nvGrpSpPr>
+      <p:grpSpPr/>
+      <p:sp>
+        <p:nvSpPr>
+          <p:cNvPr id="2" name="Shape 0"/>
+          <p:cNvSpPr/>
+          <p:nvPr/>
+        </p:nvSpPr>
+        <p:spPr>
+          <a:xfrm>
+            <a:off x="548640" y="384048"/>
+            <a:ext cx="11094415" cy="566928"/>
+          </a:xfrm>
+          <a:prstGeom prst="rect">
+            <a:avLst/>
+          </a:prstGeom>
+          <a:solidFill>
+            <a:srgbClr val="3E4650"/>
+          </a:solidFill>
+          <a:ln/>
+        </p:spPr>
+      </p:sp>
+      <p:sp>
+        <p:nvSpPr>
+          <p:cNvPr id="3" name="Text 1"/>
+          <p:cNvSpPr txBox="1"/>
+          <p:nvPr/>
+        </p:nvSpPr>
+        <p:spPr>
+          <a:xfrm>
+            <a:off x="749808" y="384048"/>
+            <a:ext cx="10692079" cy="566928"/>
+          </a:xfrm>
+          <a:prstGeom prst="rect">
+            <a:avLst/>
+          </a:prstGeom>
+          <a:noFill/>
+          <a:ln/>
+        </p:spPr>
+        <p:txBody>
+          <a:bodyPr wrap="square" lIns="0" tIns="0" rIns="0" bIns="0" rtlCol="0" anchor="ctr"/>
+          <a:lstStyle/>
+          <a:p>
+            <a:pPr marL="0" indent="0">
+              <a:buNone/>
+            </a:pPr>
+            <a:r>
+              <a:rPr lang="en-US" sz="2000" b="1" dirty="0">
+                <a:solidFill>
+                  <a:srgbClr val="FFFFFF"/>
+                </a:solidFill>
+                <a:latin typeface="맑은 고딕" pitchFamily="34" charset="0"/>
+                <a:ea typeface="맑은 고딕" pitchFamily="34" charset="-122"/>
+                <a:cs typeface="맑은 고딕" pitchFamily="34" charset="-120"/>
+              </a:rPr>
+              <a:t>03. 회전행렬 – 공식과 코드</a:t>
+            </a:r>
+            <a:endParaRPr lang="en-US" sz="2000" dirty="0"/>
+          </a:p>
+        </p:txBody>
+      </p:sp>
+      <p:sp>
+        <p:nvSpPr>
+          <p:cNvPr id="4" name="Shape 2"/>
+          <p:cNvSpPr/>
+          <p:nvPr/>
+        </p:nvSpPr>
+        <p:spPr>
+          <a:xfrm>
+            <a:off x="548640" y="1097280"/>
+            <a:ext cx="11094415" cy="4864608"/>
+          </a:xfrm>
+          <a:prstGeom prst="rect">
+            <a:avLst/>
+          </a:prstGeom>
+          <a:solidFill>
+            <a:srgbClr val="F4F4F4"/>
+          </a:solidFill>
+          <a:ln/>
+        </p:spPr>
+      </p:sp>
+      <p:sp>
+        <p:nvSpPr>
+          <p:cNvPr id="5" name="Shape 3"/>
+          <p:cNvSpPr/>
+          <p:nvPr/>
+        </p:nvSpPr>
+        <p:spPr>
+          <a:xfrm>
+            <a:off x="548640" y="6199632"/>
+            <a:ext cx="11094415" cy="0"/>
+          </a:xfrm>
+          <a:prstGeom prst="line">
+            <a:avLst/>
+          </a:prstGeom>
+          <a:noFill/>
+          <a:ln w="9525">
+            <a:solidFill>
+              <a:srgbClr val="BFBFBF"/>
+            </a:solidFill>
+            <a:prstDash val="solid"/>
+          </a:ln>
+        </p:spPr>
+      </p:sp>
+      <p:sp>
+        <p:nvSpPr>
+          <p:cNvPr id="7" name="Text 5"/>
+          <p:cNvSpPr txBox="1"/>
+          <p:nvPr/>
+        </p:nvSpPr>
+        <p:spPr>
+          <a:xfrm>
+            <a:off x="0" y="6419088"/>
+            <a:ext cx="12191695" cy="219456"/>
+          </a:xfrm>
+          <a:prstGeom prst="rect">
+            <a:avLst/>
+          </a:prstGeom>
+          <a:noFill/>
+          <a:ln/>
+        </p:spPr>
+        <p:txBody>
+          <a:bodyPr wrap="square" lIns="0" tIns="0" rIns="0" bIns="0" rtlCol="0" anchor="ctr"/>
+          <a:lstStyle/>
+          <a:p>
+            <a:pPr marL="0" indent="0" algn="ctr">
+              <a:buNone/>
+            </a:pPr>
+            <a:r>
+              <a:rPr lang="en-US" sz="900" dirty="0">
+                <a:solidFill>
+                  <a:srgbClr val="A0A0A0"/>
+                </a:solidFill>
+                <a:latin typeface="Arial" pitchFamily="34" charset="0"/>
+                <a:ea typeface="Arial" pitchFamily="34" charset="-122"/>
+                <a:cs typeface="Arial" pitchFamily="34" charset="-120"/>
+              </a:rPr>
+              <a:t>25</a:t>
+            </a:r>
+            <a:endParaRPr lang="en-US" sz="900" dirty="0"/>
+          </a:p>
+        </p:txBody>
+      </p:sp>
+      <p:sp>
+        <p:nvSpPr>
+          <p:cNvPr id="8" name="Shape 6"/>
+          <p:cNvSpPr/>
+          <p:nvPr/>
+        </p:nvSpPr>
+        <p:spPr>
+          <a:xfrm>
+            <a:off x="786384" y="1335024"/>
+            <a:ext cx="50292" cy="274320"/>
+          </a:xfrm>
+          <a:prstGeom prst="rect">
+            <a:avLst/>
+          </a:prstGeom>
+          <a:solidFill>
+            <a:srgbClr val="3E4650"/>
+          </a:solidFill>
+          <a:ln/>
+        </p:spPr>
+      </p:sp>
+      <p:sp>
+        <p:nvSpPr>
+          <p:cNvPr id="9" name="Text 7"/>
+          <p:cNvSpPr txBox="1"/>
+          <p:nvPr/>
+        </p:nvSpPr>
+        <p:spPr>
+          <a:xfrm>
+            <a:off x="932688" y="1298448"/>
+            <a:ext cx="10271455" cy="347472"/>
+          </a:xfrm>
+          <a:prstGeom prst="rect">
+            <a:avLst/>
+          </a:prstGeom>
+          <a:noFill/>
+          <a:ln/>
+        </p:spPr>
+        <p:txBody>
+          <a:bodyPr wrap="square" lIns="0" tIns="0" rIns="0" bIns="0" rtlCol="0" anchor="ctr"/>
+          <a:lstStyle/>
+          <a:p>
+            <a:pPr marL="0" indent="0">
+              <a:buNone/>
+            </a:pPr>
+            <a:r>
+              <a:rPr lang="en-US" sz="1450" b="1" dirty="0">
+                <a:solidFill>
+                  <a:srgbClr val="1A1A1A"/>
+                </a:solidFill>
+                <a:latin typeface="맑은 고딕" pitchFamily="34" charset="0"/>
+                <a:ea typeface="맑은 고딕" pitchFamily="34" charset="-122"/>
+                <a:cs typeface="맑은 고딕" pitchFamily="34" charset="-120"/>
+              </a:rPr>
+              <a:t>공식의 3×3 을 그대로 배열 칸에 옮겨 담는다. 0 인 칸은 아예 건드리지 않는다.</a:t>
+            </a:r>
+            <a:endParaRPr lang="en-US" sz="1450" dirty="0"/>
+          </a:p>
+        </p:txBody>
+      </p:sp>
+      <p:sp>
+        <p:nvSpPr>
+          <p:cNvPr id="10" name="TextBox 9"/>
+          <p:cNvSpPr txBox="1"/>
+          <p:nvPr/>
+        </p:nvSpPr>
+        <p:spPr>
+          <a:xfrm>
+            <a:off x="914400" y="1773936"/>
+            <a:ext cx="4663440" cy="219456"/>
+          </a:xfrm>
+          <a:prstGeom prst="rect">
+            <a:avLst/>
+          </a:prstGeom>
+          <a:noFill/>
+        </p:spPr>
+        <p:txBody>
+          <a:bodyPr wrap="square" lIns="0" rIns="0" tIns="0" bIns="0">
+            <a:spAutoFit/>
+          </a:bodyPr>
+          <a:lstStyle/>
+          <a:p>
+            <a:r>
+              <a:rPr sz="1050" b="1">
+                <a:solidFill>
+                  <a:srgbClr val="1A1A1A"/>
+                </a:solidFill>
+                <a:latin typeface="맑은 고딕"/>
+              </a:rPr>
+              <a:t>공식</a:t>
+            </a:r>
+          </a:p>
+        </p:txBody>
+      </p:sp>
+      <p:sp>
+        <p:nvSpPr>
+          <p:cNvPr id="11" name="Rounded Rectangle 10"/>
+          <p:cNvSpPr/>
+          <p:nvPr/>
+        </p:nvSpPr>
+        <p:spPr>
+          <a:xfrm>
+            <a:off x="914400" y="2029968"/>
+            <a:ext cx="4663440" cy="1536192"/>
+          </a:xfrm>
+          <a:prstGeom prst="roundRect">
+            <a:avLst>
+              <a:gd name="adj" fmla="val 4000"/>
+            </a:avLst>
+          </a:prstGeom>
+          <a:solidFill>
+            <a:srgbClr val="DCDCDC"/>
+          </a:solidFill>
+          <a:ln>
+            <a:noFill/>
+          </a:ln>
+          <a:effectLst/>
+        </p:spPr>
+        <p:txBody>
+          <a:bodyPr rtlCol="0" anchor="ctr"/>
+          <a:lstStyle/>
+          <a:p>
+            <a:pPr algn="ctr"/>
+          </a:p>
+        </p:txBody>
+      </p:sp>
+      <p:pic>
+        <p:nvPicPr>
+          <p:cNvPr id="12" name="Picture 11" descr="rotz.png"/>
+          <p:cNvPicPr>
+            <a:picLocks noChangeAspect="1"/>
+          </p:cNvPicPr>
+          <p:nvPr/>
+        </p:nvPicPr>
+        <p:blipFill>
+          <a:blip r:embed="rId2"/>
+          <a:stretch>
+            <a:fillRect/>
+          </a:stretch>
+        </p:blipFill>
+        <p:spPr>
+          <a:xfrm>
+            <a:off x="1351929" y="2157984"/>
+            <a:ext cx="3788380" cy="1280160"/>
+          </a:xfrm>
+          <a:prstGeom prst="rect">
+            <a:avLst/>
+          </a:prstGeom>
+        </p:spPr>
+      </p:pic>
+      <p:sp>
+        <p:nvSpPr>
+          <p:cNvPr id="13" name="TextBox 12"/>
+          <p:cNvSpPr txBox="1"/>
+          <p:nvPr/>
+        </p:nvSpPr>
+        <p:spPr>
+          <a:xfrm>
+            <a:off x="5760720" y="1773936"/>
+            <a:ext cx="5513832" cy="219456"/>
+          </a:xfrm>
+          <a:prstGeom prst="rect">
+            <a:avLst/>
+          </a:prstGeom>
+          <a:noFill/>
+        </p:spPr>
+        <p:txBody>
+          <a:bodyPr wrap="square" lIns="0" rIns="0" tIns="0" bIns="0">
+            <a:spAutoFit/>
+          </a:bodyPr>
+          <a:lstStyle/>
+          <a:p>
+            <a:r>
+              <a:rPr sz="1050" b="1">
+                <a:solidFill>
+                  <a:srgbClr val="1A1A1A"/>
+                </a:solidFill>
+                <a:latin typeface="맑은 고딕"/>
+              </a:rPr>
+              <a:t>C 구현    f_RotZ()</a:t>
+            </a:r>
+          </a:p>
+        </p:txBody>
+      </p:sp>
+      <p:sp>
+        <p:nvSpPr>
+          <p:cNvPr id="14" name="Rounded Rectangle 13"/>
+          <p:cNvSpPr/>
+          <p:nvPr/>
+        </p:nvSpPr>
+        <p:spPr>
+          <a:xfrm>
+            <a:off x="5760720" y="2029968"/>
+            <a:ext cx="5513832" cy="1536192"/>
+          </a:xfrm>
+          <a:prstGeom prst="roundRect">
+            <a:avLst>
+              <a:gd name="adj" fmla="val 2000"/>
+            </a:avLst>
+          </a:prstGeom>
+          <a:solidFill>
+            <a:srgbClr val="FFFFFF"/>
+          </a:solidFill>
+          <a:ln>
+            <a:noFill/>
+          </a:ln>
+          <a:effectLst/>
+        </p:spPr>
+        <p:txBody>
+          <a:bodyPr rtlCol="0" anchor="ctr"/>
+          <a:lstStyle/>
+          <a:p>
+            <a:pPr algn="ctr"/>
+          </a:p>
+        </p:txBody>
+      </p:sp>
+      <p:sp>
+        <p:nvSpPr>
+          <p:cNvPr id="15" name="TextBox 14"/>
+          <p:cNvSpPr txBox="1"/>
+          <p:nvPr/>
+        </p:nvSpPr>
+        <p:spPr>
+          <a:xfrm>
+            <a:off x="5907024" y="2112264"/>
+            <a:ext cx="5221224" cy="1389888"/>
+          </a:xfrm>
+          <a:prstGeom prst="rect">
+            <a:avLst/>
+          </a:prstGeom>
+          <a:noFill/>
+        </p:spPr>
+        <p:txBody>
+          <a:bodyPr wrap="square" lIns="0" rIns="0" tIns="0" bIns="0">
+            <a:spAutoFit/>
+          </a:bodyPr>
+          <a:lstStyle/>
+          <a:p>
+            <a:pPr>
+              <a:spcBef>
+                <a:spcPts val="0"/>
+              </a:spcBef>
+            </a:pPr>
+            <a:r>
+              <a:rPr sz="900" b="0">
+                <a:solidFill>
+                  <a:srgbClr val="1A1A1A"/>
+                </a:solidFill>
+                <a:latin typeface="Consolas"/>
+              </a:rPr>
+              <a:t>static matrix f_RotZ(const FLOAT64 dAng)</a:t>
+            </a:r>
+          </a:p>
+          <a:p>
+            <a:pPr>
+              <a:spcBef>
+                <a:spcPts val="160"/>
+              </a:spcBef>
+            </a:pPr>
+            <a:r>
+              <a:rPr sz="900" b="0">
+                <a:solidFill>
+                  <a:srgbClr val="1A1A1A"/>
+                </a:solidFill>
+                <a:latin typeface="Consolas"/>
+              </a:rPr>
+              <a:t>{</a:t>
+            </a:r>
+          </a:p>
+          <a:p>
+            <a:pPr>
+              <a:spcBef>
+                <a:spcPts val="160"/>
+              </a:spcBef>
+            </a:pPr>
+            <a:r>
+              <a:rPr sz="900" b="0">
+                <a:solidFill>
+                  <a:srgbClr val="1A1A1A"/>
+                </a:solidFill>
+                <a:latin typeface="Consolas"/>
+              </a:rPr>
+              <a:t>    matrix stR;</a:t>
+            </a:r>
+          </a:p>
+          <a:p>
+            <a:pPr>
+              <a:spcBef>
+                <a:spcPts val="160"/>
+              </a:spcBef>
+            </a:pPr>
+            <a:r>
+              <a:rPr sz="900" b="0">
+                <a:solidFill>
+                  <a:srgbClr val="1A1A1A"/>
+                </a:solidFill>
+                <a:latin typeface="Consolas"/>
+              </a:rPr>
+              <a:t>    Matrix_initialize(&amp;stR, 3, 3);   // 3x3 으로 잡고 전부 0</a:t>
+            </a:r>
+          </a:p>
+          <a:p>
+            <a:pPr>
+              <a:spcBef>
+                <a:spcPts val="160"/>
+              </a:spcBef>
+            </a:pPr>
+            <a:r>
+              <a:rPr sz="900" b="0">
+                <a:solidFill>
+                  <a:srgbClr val="1A1A1A"/>
+                </a:solidFill>
+                <a:latin typeface="Consolas"/>
+              </a:rPr>
+              <a:t>    stR.e[0][0] =  cos(dAng);   stR.e[0][1] = -sin(dAng);</a:t>
+            </a:r>
+          </a:p>
+          <a:p>
+            <a:pPr>
+              <a:spcBef>
+                <a:spcPts val="160"/>
+              </a:spcBef>
+            </a:pPr>
+            <a:r>
+              <a:rPr sz="900" b="0">
+                <a:solidFill>
+                  <a:srgbClr val="1A1A1A"/>
+                </a:solidFill>
+                <a:latin typeface="Consolas"/>
+              </a:rPr>
+              <a:t>    stR.e[1][0] =  sin(dAng);   stR.e[1][1] =  cos(dAng);</a:t>
+            </a:r>
+          </a:p>
+          <a:p>
+            <a:pPr>
+              <a:spcBef>
+                <a:spcPts val="160"/>
+              </a:spcBef>
+            </a:pPr>
+            <a:r>
+              <a:rPr sz="900" b="0">
+                <a:solidFill>
+                  <a:srgbClr val="1A1A1A"/>
+                </a:solidFill>
+                <a:latin typeface="Consolas"/>
+              </a:rPr>
+              <a:t>    stR.e[2][2] = 1.0;</a:t>
+            </a:r>
+          </a:p>
+          <a:p>
+            <a:pPr>
+              <a:spcBef>
+                <a:spcPts val="160"/>
+              </a:spcBef>
+            </a:pPr>
+            <a:r>
+              <a:rPr sz="900" b="0">
+                <a:solidFill>
+                  <a:srgbClr val="1A1A1A"/>
+                </a:solidFill>
+                <a:latin typeface="Consolas"/>
+              </a:rPr>
+              <a:t>    return stR;</a:t>
+            </a:r>
+          </a:p>
+          <a:p>
+            <a:pPr>
+              <a:spcBef>
+                <a:spcPts val="160"/>
+              </a:spcBef>
+            </a:pPr>
+            <a:r>
+              <a:rPr sz="900" b="0">
+                <a:solidFill>
+                  <a:srgbClr val="1A1A1A"/>
+                </a:solidFill>
+                <a:latin typeface="Consolas"/>
+              </a:rPr>
+              <a:t>}</a:t>
+            </a:r>
+          </a:p>
+        </p:txBody>
+      </p:sp>
+      <p:sp>
+        <p:nvSpPr>
+          <p:cNvPr id="16" name="Rounded Rectangle 15"/>
+          <p:cNvSpPr/>
+          <p:nvPr/>
+        </p:nvSpPr>
+        <p:spPr>
+          <a:xfrm>
+            <a:off x="914400" y="3712463"/>
+            <a:ext cx="10360152" cy="914400"/>
+          </a:xfrm>
+          <a:prstGeom prst="roundRect">
+            <a:avLst>
+              <a:gd name="adj" fmla="val 4000"/>
+            </a:avLst>
+          </a:prstGeom>
+          <a:solidFill>
+            <a:srgbClr val="E7E7E7"/>
+          </a:solidFill>
+          <a:ln>
+            <a:noFill/>
+          </a:ln>
+          <a:effectLst/>
+        </p:spPr>
+        <p:txBody>
+          <a:bodyPr rtlCol="0" anchor="ctr"/>
+          <a:lstStyle/>
+          <a:p>
+            <a:pPr algn="ctr"/>
+          </a:p>
+        </p:txBody>
+      </p:sp>
+      <p:sp>
+        <p:nvSpPr>
+          <p:cNvPr id="17" name="TextBox 16"/>
+          <p:cNvSpPr txBox="1"/>
+          <p:nvPr/>
+        </p:nvSpPr>
+        <p:spPr>
+          <a:xfrm>
+            <a:off x="1133856" y="3803904"/>
+            <a:ext cx="9921240" cy="749808"/>
+          </a:xfrm>
+          <a:prstGeom prst="rect">
+            <a:avLst/>
+          </a:prstGeom>
+          <a:noFill/>
+        </p:spPr>
+        <p:txBody>
+          <a:bodyPr wrap="square" lIns="0" rIns="0" tIns="0" bIns="0">
+            <a:spAutoFit/>
+          </a:bodyPr>
+          <a:lstStyle/>
+          <a:p>
+            <a:r>
+              <a:rPr sz="1150" b="1">
+                <a:solidFill>
+                  <a:srgbClr val="1A1A1A"/>
+                </a:solidFill>
+                <a:latin typeface="맑은 고딕"/>
+              </a:rPr>
+              <a:t>행렬 칸 ↔ 배열 첨자는 1 : 1</a:t>
+            </a:r>
+          </a:p>
+          <a:p>
+            <a:pPr>
+              <a:spcBef>
+                <a:spcPts val="500"/>
+              </a:spcBef>
+            </a:pPr>
+            <a:r>
+              <a:rPr sz="900" b="0">
+                <a:solidFill>
+                  <a:srgbClr val="1A1A1A"/>
+                </a:solidFill>
+                <a:latin typeface="Consolas"/>
+              </a:rPr>
+              <a:t>e[0][0] = cos θ    e[0][1] = −sin θ        e[1][0] = sin θ    e[1][1] = cos θ        e[2][2] = 1        나머지 다섯 칸은 0 그대로</a:t>
+            </a:r>
+          </a:p>
+          <a:p>
+            <a:pPr>
+              <a:spcBef>
+                <a:spcPts val="400"/>
+              </a:spcBef>
+            </a:pPr>
+            <a:r>
+              <a:rPr sz="900" b="0">
+                <a:solidFill>
+                  <a:srgbClr val="555555"/>
+                </a:solidFill>
+                <a:latin typeface="맑은 고딕"/>
+              </a:rPr>
+              <a:t>f_RotX · f_RotY 도 똑같은 방식이다 — 공식에서 0 이 아닌 칸만 그대로 옮겨 적는다.</a:t>
+            </a:r>
+          </a:p>
+        </p:txBody>
+      </p:sp>
+      <p:sp>
+        <p:nvSpPr>
+          <p:cNvPr id="18" name="Rounded Rectangle 17"/>
+          <p:cNvSpPr/>
+          <p:nvPr/>
+        </p:nvSpPr>
+        <p:spPr>
+          <a:xfrm>
+            <a:off x="914400" y="4773168"/>
+            <a:ext cx="5074920" cy="1005840"/>
+          </a:xfrm>
+          <a:prstGeom prst="roundRect">
+            <a:avLst>
+              <a:gd name="adj" fmla="val 4000"/>
+            </a:avLst>
+          </a:prstGeom>
+          <a:solidFill>
+            <a:srgbClr val="DCDCDC"/>
+          </a:solidFill>
+          <a:ln>
+            <a:noFill/>
+          </a:ln>
+          <a:effectLst/>
+        </p:spPr>
+        <p:txBody>
+          <a:bodyPr rtlCol="0" anchor="ctr"/>
+          <a:lstStyle/>
+          <a:p>
+            <a:pPr algn="ctr"/>
+          </a:p>
+        </p:txBody>
+      </p:sp>
+      <p:sp>
+        <p:nvSpPr>
+          <p:cNvPr id="19" name="TextBox 18"/>
+          <p:cNvSpPr txBox="1"/>
+          <p:nvPr/>
+        </p:nvSpPr>
+        <p:spPr>
+          <a:xfrm>
+            <a:off x="1097280" y="4873752"/>
+            <a:ext cx="4709159" cy="841248"/>
+          </a:xfrm>
+          <a:prstGeom prst="rect">
+            <a:avLst/>
+          </a:prstGeom>
+          <a:noFill/>
+        </p:spPr>
+        <p:txBody>
+          <a:bodyPr wrap="square" lIns="0" rIns="0" tIns="0" bIns="0">
+            <a:spAutoFit/>
+          </a:bodyPr>
+          <a:lstStyle/>
+          <a:p>
+            <a:r>
+              <a:rPr sz="1150" b="1">
+                <a:solidFill>
+                  <a:srgbClr val="1A1A1A"/>
+                </a:solidFill>
+                <a:latin typeface="맑은 고딕"/>
+              </a:rPr>
+              <a:t>쓰는 라이브러리 함수는 넷뿐</a:t>
+            </a:r>
+          </a:p>
+          <a:p>
+            <a:pPr>
+              <a:spcBef>
+                <a:spcPts val="400"/>
+              </a:spcBef>
+            </a:pPr>
+            <a:r>
+              <a:rPr sz="880" b="0">
+                <a:solidFill>
+                  <a:srgbClr val="555555"/>
+                </a:solidFill>
+                <a:latin typeface="맑은 고딕"/>
+              </a:rPr>
+              <a:t>Matrix_Product2(A, B) = A · B          Matrix_Transpose(A) = A^T</a:t>
+            </a:r>
+          </a:p>
+          <a:p>
+            <a:pPr>
+              <a:spcBef>
+                <a:spcPts val="200"/>
+              </a:spcBef>
+            </a:pPr>
+            <a:r>
+              <a:rPr sz="880" b="0">
+                <a:solidFill>
+                  <a:srgbClr val="555555"/>
+                </a:solidFill>
+                <a:latin typeface="맑은 고딕"/>
+              </a:rPr>
+              <a:t>Matrix_Product3(A, B, C) = (A · B) · C     Matrix_Add / Subtract</a:t>
+            </a:r>
+          </a:p>
+          <a:p>
+            <a:pPr>
+              <a:spcBef>
+                <a:spcPts val="200"/>
+              </a:spcBef>
+            </a:pPr>
+            <a:r>
+              <a:rPr sz="880" b="0">
+                <a:solidFill>
+                  <a:srgbClr val="555555"/>
+                </a:solidFill>
+                <a:latin typeface="맑은 고딕"/>
+              </a:rPr>
+              <a:t>Matrix_Inverse 는 안 쓴다 — 회전행렬은 전치가 곧 역행렬 (p.6)</a:t>
+            </a:r>
+          </a:p>
+        </p:txBody>
+      </p:sp>
+      <p:sp>
+        <p:nvSpPr>
+          <p:cNvPr id="20" name="Rounded Rectangle 19"/>
+          <p:cNvSpPr/>
+          <p:nvPr/>
+        </p:nvSpPr>
+        <p:spPr>
+          <a:xfrm>
+            <a:off x="6199632" y="4773168"/>
+            <a:ext cx="5074920" cy="1005840"/>
+          </a:xfrm>
+          <a:prstGeom prst="roundRect">
+            <a:avLst>
+              <a:gd name="adj" fmla="val 4000"/>
+            </a:avLst>
+          </a:prstGeom>
+          <a:solidFill>
+            <a:srgbClr val="DCDCDC"/>
+          </a:solidFill>
+          <a:ln>
+            <a:noFill/>
+          </a:ln>
+          <a:effectLst/>
+        </p:spPr>
+        <p:txBody>
+          <a:bodyPr rtlCol="0" anchor="ctr"/>
+          <a:lstStyle/>
+          <a:p>
+            <a:pPr algn="ctr"/>
+          </a:p>
+        </p:txBody>
+      </p:sp>
+      <p:sp>
+        <p:nvSpPr>
+          <p:cNvPr id="21" name="TextBox 20"/>
+          <p:cNvSpPr txBox="1"/>
+          <p:nvPr/>
+        </p:nvSpPr>
+        <p:spPr>
+          <a:xfrm>
+            <a:off x="6382512" y="4873752"/>
+            <a:ext cx="4709159" cy="841248"/>
+          </a:xfrm>
+          <a:prstGeom prst="rect">
+            <a:avLst/>
+          </a:prstGeom>
+          <a:noFill/>
+        </p:spPr>
+        <p:txBody>
+          <a:bodyPr wrap="square" lIns="0" rIns="0" tIns="0" bIns="0">
+            <a:spAutoFit/>
+          </a:bodyPr>
+          <a:lstStyle/>
+          <a:p>
+            <a:r>
+              <a:rPr sz="1150" b="1">
+                <a:solidFill>
+                  <a:srgbClr val="1A1A1A"/>
+                </a:solidFill>
+                <a:latin typeface="맑은 고딕"/>
+              </a:rPr>
+              <a:t>MAXSIZE_MAT = 9 가 만드는 두 가지</a:t>
+            </a:r>
+          </a:p>
+          <a:p>
+            <a:pPr>
+              <a:spcBef>
+                <a:spcPts val="400"/>
+              </a:spcBef>
+            </a:pPr>
+            <a:r>
+              <a:rPr sz="880" b="0">
+                <a:solidFill>
+                  <a:srgbClr val="555555"/>
+                </a:solidFill>
+                <a:latin typeface="맑은 고딕"/>
+              </a:rPr>
+              <a:t>Matrix_Identity 는 크기를 9×9 로 덮어써서 못 쓴다 → initialize(3,3)</a:t>
+            </a:r>
+          </a:p>
+          <a:p>
+            <a:pPr>
+              <a:spcBef>
+                <a:spcPts val="200"/>
+              </a:spcBef>
+            </a:pPr>
+            <a:r>
+              <a:rPr sz="880" b="0">
+                <a:solidFill>
+                  <a:srgbClr val="555555"/>
+                </a:solidFill>
+                <a:latin typeface="맑은 고딕"/>
+              </a:rPr>
+              <a:t>matrix 는 3×3 을 담아도 항상 656 B. 24 B 벡터 하나를 옮기려고</a:t>
+            </a:r>
+          </a:p>
+          <a:p>
+            <a:pPr>
+              <a:spcBef>
+                <a:spcPts val="200"/>
+              </a:spcBef>
+            </a:pPr>
+            <a:r>
+              <a:rPr sz="880" b="0">
+                <a:solidFill>
+                  <a:srgbClr val="555555"/>
+                </a:solidFill>
+                <a:latin typeface="맑은 고딕"/>
+              </a:rPr>
+              <a:t>f_AntToBody 한 번에 이 구조체가 값으로 열 번 넘게 오간다.</a:t>
+            </a:r>
+          </a:p>
+        </p:txBody>
+      </p:sp>
+    </p:spTree>
+  </p:cSld>
+  <p:clrMapOvr>
+    <a:masterClrMapping/>
+  </p:clrMapOvr>
+</p:sld>
+</file>
+
+<file path=ppt/slides/slide26.xml><?xml version="1.0" encoding="utf-8"?>
+<p:sld xmlns:a="http://schemas.openxmlformats.org/drawingml/2006/main" xmlns:p="http://schemas.openxmlformats.org/presentationml/2006/main" xmlns:r="http://schemas.openxmlformats.org/officeDocument/2006/relationships">
+  <p:cSld>
+    <p:spTree>
+      <p:nvGrpSpPr>
+        <p:cNvPr id="1" name=""/>
+        <p:cNvGrpSpPr/>
+        <p:nvPr/>
+      </p:nvGrpSpPr>
+      <p:grpSpPr/>
+      <p:sp>
+        <p:nvSpPr>
+          <p:cNvPr id="2" name="Shape 0"/>
+          <p:cNvSpPr/>
+          <p:nvPr/>
+        </p:nvSpPr>
+        <p:spPr>
+          <a:xfrm>
+            <a:off x="548640" y="384048"/>
+            <a:ext cx="11094415" cy="566928"/>
+          </a:xfrm>
+          <a:prstGeom prst="rect">
+            <a:avLst/>
+          </a:prstGeom>
+          <a:solidFill>
+            <a:srgbClr val="3E4650"/>
+          </a:solidFill>
+          <a:ln/>
+        </p:spPr>
+      </p:sp>
+      <p:sp>
+        <p:nvSpPr>
+          <p:cNvPr id="3" name="Text 1"/>
+          <p:cNvSpPr txBox="1"/>
+          <p:nvPr/>
+        </p:nvSpPr>
+        <p:spPr>
+          <a:xfrm>
+            <a:off x="749808" y="384048"/>
+            <a:ext cx="10692079" cy="566928"/>
+          </a:xfrm>
+          <a:prstGeom prst="rect">
+            <a:avLst/>
+          </a:prstGeom>
+          <a:noFill/>
+          <a:ln/>
+        </p:spPr>
+        <p:txBody>
+          <a:bodyPr wrap="square" lIns="0" tIns="0" rIns="0" bIns="0" rtlCol="0" anchor="ctr"/>
+          <a:lstStyle/>
+          <a:p>
+            <a:pPr marL="0" indent="0">
+              <a:buNone/>
+            </a:pPr>
+            <a:r>
+              <a:rPr lang="en-US" sz="2000" b="1" dirty="0">
+                <a:solidFill>
+                  <a:srgbClr val="FFFFFF"/>
+                </a:solidFill>
+                <a:latin typeface="맑은 고딕" pitchFamily="34" charset="0"/>
+                <a:ea typeface="맑은 고딕" pitchFamily="34" charset="-122"/>
+                <a:cs typeface="맑은 고딕" pitchFamily="34" charset="-120"/>
+              </a:rPr>
+              <a:t>03. 공식과 코드 ①    안테나 극좌표 → 직교 → 동체</a:t>
+            </a:r>
+            <a:endParaRPr lang="en-US" sz="2000" dirty="0"/>
+          </a:p>
+        </p:txBody>
+      </p:sp>
+      <p:sp>
+        <p:nvSpPr>
+          <p:cNvPr id="4" name="Shape 2"/>
+          <p:cNvSpPr/>
+          <p:nvPr/>
+        </p:nvSpPr>
+        <p:spPr>
+          <a:xfrm>
+            <a:off x="548640" y="1097280"/>
+            <a:ext cx="11094415" cy="4864608"/>
+          </a:xfrm>
+          <a:prstGeom prst="rect">
+            <a:avLst/>
+          </a:prstGeom>
+          <a:solidFill>
+            <a:srgbClr val="F4F4F4"/>
+          </a:solidFill>
+          <a:ln/>
+        </p:spPr>
+      </p:sp>
+      <p:sp>
+        <p:nvSpPr>
+          <p:cNvPr id="5" name="Shape 3"/>
+          <p:cNvSpPr/>
+          <p:nvPr/>
+        </p:nvSpPr>
+        <p:spPr>
+          <a:xfrm>
+            <a:off x="548640" y="6199632"/>
+            <a:ext cx="11094415" cy="0"/>
+          </a:xfrm>
+          <a:prstGeom prst="line">
+            <a:avLst/>
+          </a:prstGeom>
+          <a:noFill/>
+          <a:ln w="9525">
+            <a:solidFill>
+              <a:srgbClr val="BFBFBF"/>
+            </a:solidFill>
+            <a:prstDash val="solid"/>
+          </a:ln>
+        </p:spPr>
+      </p:sp>
+      <p:sp>
+        <p:nvSpPr>
+          <p:cNvPr id="7" name="Text 5"/>
+          <p:cNvSpPr txBox="1"/>
+          <p:nvPr/>
+        </p:nvSpPr>
+        <p:spPr>
+          <a:xfrm>
+            <a:off x="0" y="6419088"/>
+            <a:ext cx="12191695" cy="219456"/>
+          </a:xfrm>
+          <a:prstGeom prst="rect">
+            <a:avLst/>
+          </a:prstGeom>
+          <a:noFill/>
+          <a:ln/>
+        </p:spPr>
+        <p:txBody>
+          <a:bodyPr wrap="square" lIns="0" tIns="0" rIns="0" bIns="0" rtlCol="0" anchor="ctr"/>
+          <a:lstStyle/>
+          <a:p>
+            <a:pPr marL="0" indent="0" algn="ctr">
+              <a:buNone/>
+            </a:pPr>
+            <a:r>
+              <a:rPr lang="en-US" sz="900" dirty="0">
+                <a:solidFill>
+                  <a:srgbClr val="A0A0A0"/>
+                </a:solidFill>
+                <a:latin typeface="Arial" pitchFamily="34" charset="0"/>
+                <a:ea typeface="Arial" pitchFamily="34" charset="-122"/>
+                <a:cs typeface="Arial" pitchFamily="34" charset="-120"/>
+              </a:rPr>
+              <a:t>26</a:t>
+            </a:r>
+            <a:endParaRPr lang="en-US" sz="900" dirty="0"/>
+          </a:p>
+        </p:txBody>
+      </p:sp>
+      <p:sp>
+        <p:nvSpPr>
+          <p:cNvPr id="8" name="TextBox 7"/>
+          <p:cNvSpPr txBox="1"/>
+          <p:nvPr/>
+        </p:nvSpPr>
+        <p:spPr>
+          <a:xfrm>
+            <a:off x="2798064" y="1335024"/>
+            <a:ext cx="3749039" cy="219456"/>
+          </a:xfrm>
+          <a:prstGeom prst="rect">
+            <a:avLst/>
+          </a:prstGeom>
+          <a:noFill/>
+        </p:spPr>
+        <p:txBody>
+          <a:bodyPr wrap="square" lIns="0" rIns="0" tIns="0" bIns="0">
+            <a:spAutoFit/>
+          </a:bodyPr>
+          <a:lstStyle/>
+          <a:p>
+            <a:r>
+              <a:rPr sz="1000" b="1">
+                <a:solidFill>
+                  <a:srgbClr val="888888"/>
+                </a:solidFill>
+                <a:latin typeface="맑은 고딕"/>
+              </a:rPr>
+              <a:t>공식</a:t>
+            </a:r>
+          </a:p>
+        </p:txBody>
+      </p:sp>
+      <p:sp>
+        <p:nvSpPr>
+          <p:cNvPr id="9" name="TextBox 8"/>
+          <p:cNvSpPr txBox="1"/>
+          <p:nvPr/>
+        </p:nvSpPr>
+        <p:spPr>
+          <a:xfrm>
+            <a:off x="6693408" y="1335024"/>
+            <a:ext cx="4581144" cy="219456"/>
+          </a:xfrm>
+          <a:prstGeom prst="rect">
+            <a:avLst/>
+          </a:prstGeom>
+          <a:noFill/>
+        </p:spPr>
+        <p:txBody>
+          <a:bodyPr wrap="square" lIns="0" rIns="0" tIns="0" bIns="0">
+            <a:spAutoFit/>
+          </a:bodyPr>
+          <a:lstStyle/>
+          <a:p>
+            <a:r>
+              <a:rPr sz="1000" b="1">
+                <a:solidFill>
+                  <a:srgbClr val="888888"/>
+                </a:solidFill>
+                <a:latin typeface="맑은 고딕"/>
+              </a:rPr>
+              <a:t>C 구현</a:t>
+            </a:r>
+          </a:p>
+        </p:txBody>
+      </p:sp>
+      <p:sp>
+        <p:nvSpPr>
+          <p:cNvPr id="10" name="Rounded Rectangle 9"/>
+          <p:cNvSpPr/>
+          <p:nvPr/>
+        </p:nvSpPr>
+        <p:spPr>
+          <a:xfrm>
+            <a:off x="914400" y="1591056"/>
+            <a:ext cx="1737360" cy="1426464"/>
+          </a:xfrm>
+          <a:prstGeom prst="roundRect">
+            <a:avLst>
+              <a:gd name="adj" fmla="val 4000"/>
+            </a:avLst>
+          </a:prstGeom>
+          <a:solidFill>
+            <a:srgbClr val="3E4650"/>
+          </a:solidFill>
+          <a:ln>
+            <a:noFill/>
+          </a:ln>
+          <a:effectLst/>
+        </p:spPr>
+        <p:txBody>
+          <a:bodyPr rtlCol="0" anchor="ctr"/>
+          <a:lstStyle/>
+          <a:p>
+            <a:pPr algn="ctr"/>
+          </a:p>
+        </p:txBody>
+      </p:sp>
+      <p:sp>
+        <p:nvSpPr>
+          <p:cNvPr id="11" name="TextBox 10"/>
+          <p:cNvSpPr txBox="1"/>
+          <p:nvPr/>
+        </p:nvSpPr>
+        <p:spPr>
+          <a:xfrm>
+            <a:off x="1024128" y="2020824"/>
+            <a:ext cx="1517904" cy="566928"/>
+          </a:xfrm>
+          <a:prstGeom prst="rect">
+            <a:avLst/>
+          </a:prstGeom>
+          <a:noFill/>
+        </p:spPr>
+        <p:txBody>
+          <a:bodyPr wrap="square" lIns="0" rIns="0" tIns="0" bIns="0">
+            <a:spAutoFit/>
+          </a:bodyPr>
+          <a:lstStyle/>
+          <a:p>
+            <a:pPr algn="ctr"/>
+            <a:r>
+              <a:rPr sz="1500" b="1">
+                <a:solidFill>
+                  <a:srgbClr val="FFFFFF"/>
+                </a:solidFill>
+                <a:latin typeface="맑은 고딕"/>
+              </a:rPr>
+              <a:t>①</a:t>
+            </a:r>
+          </a:p>
+          <a:p>
+            <a:pPr algn="ctr">
+              <a:spcBef>
+                <a:spcPts val="300"/>
+              </a:spcBef>
+            </a:pPr>
+            <a:r>
+              <a:rPr sz="1100" b="1">
+                <a:solidFill>
+                  <a:srgbClr val="FFFFFF"/>
+                </a:solidFill>
+                <a:latin typeface="맑은 고딕"/>
+              </a:rPr>
+              <a:t>극좌표 → 직교</a:t>
+            </a:r>
+          </a:p>
+          <a:p>
+            <a:pPr algn="ctr">
+              <a:spcBef>
+                <a:spcPts val="300"/>
+              </a:spcBef>
+            </a:pPr>
+            <a:r>
+              <a:rPr sz="750" b="0">
+                <a:solidFill>
+                  <a:srgbClr val="B4B4B4"/>
+                </a:solidFill>
+                <a:latin typeface="맑은 고딕"/>
+              </a:rPr>
+              <a:t>표현만 바꿈</a:t>
+            </a:r>
+          </a:p>
+        </p:txBody>
+      </p:sp>
+      <p:sp>
+        <p:nvSpPr>
+          <p:cNvPr id="12" name="Rounded Rectangle 11"/>
+          <p:cNvSpPr/>
+          <p:nvPr/>
+        </p:nvSpPr>
+        <p:spPr>
+          <a:xfrm>
+            <a:off x="2798064" y="1591056"/>
+            <a:ext cx="3749039" cy="1426464"/>
+          </a:xfrm>
+          <a:prstGeom prst="roundRect">
+            <a:avLst>
+              <a:gd name="adj" fmla="val 4000"/>
+            </a:avLst>
+          </a:prstGeom>
+          <a:solidFill>
+            <a:srgbClr val="DCDCDC"/>
+          </a:solidFill>
+          <a:ln>
+            <a:noFill/>
+          </a:ln>
+          <a:effectLst/>
+        </p:spPr>
+        <p:txBody>
+          <a:bodyPr rtlCol="0" anchor="ctr"/>
+          <a:lstStyle/>
+          <a:p>
+            <a:pPr algn="ctr"/>
+          </a:p>
+        </p:txBody>
+      </p:sp>
+      <p:pic>
+        <p:nvPicPr>
+          <p:cNvPr id="13" name="Picture 12" descr="polar2xyz.png"/>
+          <p:cNvPicPr>
+            <a:picLocks noChangeAspect="1"/>
+          </p:cNvPicPr>
+          <p:nvPr/>
+        </p:nvPicPr>
+        <p:blipFill>
+          <a:blip r:embed="rId2"/>
+          <a:stretch>
+            <a:fillRect/>
+          </a:stretch>
+        </p:blipFill>
+        <p:spPr>
+          <a:xfrm>
+            <a:off x="3372829" y="1700784"/>
+            <a:ext cx="2599508" cy="1207008"/>
+          </a:xfrm>
+          <a:prstGeom prst="rect">
+            <a:avLst/>
+          </a:prstGeom>
+        </p:spPr>
+      </p:pic>
+      <p:sp>
+        <p:nvSpPr>
+          <p:cNvPr id="14" name="Rounded Rectangle 13"/>
+          <p:cNvSpPr/>
+          <p:nvPr/>
+        </p:nvSpPr>
+        <p:spPr>
+          <a:xfrm>
+            <a:off x="6693408" y="1591056"/>
+            <a:ext cx="4581144" cy="1426464"/>
+          </a:xfrm>
+          <a:prstGeom prst="roundRect">
+            <a:avLst>
+              <a:gd name="adj" fmla="val 2000"/>
+            </a:avLst>
+          </a:prstGeom>
+          <a:solidFill>
+            <a:srgbClr val="FFFFFF"/>
+          </a:solidFill>
+          <a:ln>
+            <a:noFill/>
+          </a:ln>
+          <a:effectLst/>
+        </p:spPr>
+        <p:txBody>
+          <a:bodyPr rtlCol="0" anchor="ctr"/>
+          <a:lstStyle/>
+          <a:p>
+            <a:pPr algn="ctr"/>
+          </a:p>
+        </p:txBody>
+      </p:sp>
+      <p:sp>
+        <p:nvSpPr>
+          <p:cNvPr id="15" name="TextBox 14"/>
+          <p:cNvSpPr txBox="1"/>
+          <p:nvPr/>
+        </p:nvSpPr>
+        <p:spPr>
+          <a:xfrm>
+            <a:off x="6839712" y="1673352"/>
+            <a:ext cx="4288536" cy="1280160"/>
+          </a:xfrm>
+          <a:prstGeom prst="rect">
+            <a:avLst/>
+          </a:prstGeom>
+          <a:noFill/>
+        </p:spPr>
+        <p:txBody>
+          <a:bodyPr wrap="square" lIns="0" rIns="0" tIns="0" bIns="0">
+            <a:spAutoFit/>
+          </a:bodyPr>
+          <a:lstStyle/>
+          <a:p>
+            <a:pPr>
+              <a:spcBef>
+                <a:spcPts val="0"/>
+              </a:spcBef>
+            </a:pPr>
+            <a:r>
+              <a:rPr sz="850" b="0">
+                <a:solidFill>
+                  <a:srgbClr val="777777"/>
+                </a:solidFill>
+                <a:latin typeface="Consolas"/>
+              </a:rPr>
+              <a:t>ST_Vec3 f_PolarToXyz(const ST_Polar stPolar)</a:t>
+            </a:r>
+          </a:p>
+          <a:p>
+            <a:pPr>
+              <a:spcBef>
+                <a:spcPts val="150"/>
+              </a:spcBef>
+            </a:pPr>
+            <a:r>
+              <a:rPr sz="850" b="0">
+                <a:solidFill>
+                  <a:srgbClr val="1A1A1A"/>
+                </a:solidFill>
+                <a:latin typeface="Consolas"/>
+              </a:rPr>
+              <a:t>{</a:t>
+            </a:r>
+          </a:p>
+          <a:p>
+            <a:pPr>
+              <a:spcBef>
+                <a:spcPts val="150"/>
+              </a:spcBef>
+            </a:pPr>
+            <a:r>
+              <a:rPr sz="850" b="0">
+                <a:solidFill>
+                  <a:srgbClr val="1A1A1A"/>
+                </a:solidFill>
+                <a:latin typeface="Consolas"/>
+              </a:rPr>
+              <a:t>  stXyz.dX = stPolar.dRange * cos(stPolar.dEl)</a:t>
+            </a:r>
+          </a:p>
+          <a:p>
+            <a:pPr>
+              <a:spcBef>
+                <a:spcPts val="150"/>
+              </a:spcBef>
+            </a:pPr>
+            <a:r>
+              <a:rPr sz="850" b="0">
+                <a:solidFill>
+                  <a:srgbClr val="1A1A1A"/>
+                </a:solidFill>
+                <a:latin typeface="Consolas"/>
+              </a:rPr>
+              <a:t>                            * sin(stPolar.dAz);</a:t>
+            </a:r>
+          </a:p>
+          <a:p>
+            <a:pPr>
+              <a:spcBef>
+                <a:spcPts val="150"/>
+              </a:spcBef>
+            </a:pPr>
+            <a:r>
+              <a:rPr sz="850" b="0">
+                <a:solidFill>
+                  <a:srgbClr val="1A1A1A"/>
+                </a:solidFill>
+                <a:latin typeface="Consolas"/>
+              </a:rPr>
+              <a:t>  stXyz.dY = stPolar.dRange * sin(stPolar.dEl);</a:t>
+            </a:r>
+          </a:p>
+          <a:p>
+            <a:pPr>
+              <a:spcBef>
+                <a:spcPts val="150"/>
+              </a:spcBef>
+            </a:pPr>
+            <a:r>
+              <a:rPr sz="850" b="0">
+                <a:solidFill>
+                  <a:srgbClr val="1A1A1A"/>
+                </a:solidFill>
+                <a:latin typeface="Consolas"/>
+              </a:rPr>
+              <a:t>  stXyz.dZ = stPolar.dRange * cos(stPolar.dEl)</a:t>
+            </a:r>
+          </a:p>
+          <a:p>
+            <a:pPr>
+              <a:spcBef>
+                <a:spcPts val="150"/>
+              </a:spcBef>
+            </a:pPr>
+            <a:r>
+              <a:rPr sz="850" b="0">
+                <a:solidFill>
+                  <a:srgbClr val="1A1A1A"/>
+                </a:solidFill>
+                <a:latin typeface="Consolas"/>
+              </a:rPr>
+              <a:t>                            * cos(stPolar.dAz);</a:t>
+            </a:r>
+          </a:p>
+          <a:p>
+            <a:pPr>
+              <a:spcBef>
+                <a:spcPts val="150"/>
+              </a:spcBef>
+            </a:pPr>
+            <a:r>
+              <a:rPr sz="850" b="0">
+                <a:solidFill>
+                  <a:srgbClr val="1A1A1A"/>
+                </a:solidFill>
+                <a:latin typeface="Consolas"/>
+              </a:rPr>
+              <a:t>}</a:t>
+            </a:r>
+          </a:p>
+        </p:txBody>
+      </p:sp>
+      <p:sp>
+        <p:nvSpPr>
+          <p:cNvPr id="16" name="Rounded Rectangle 15"/>
+          <p:cNvSpPr/>
+          <p:nvPr/>
+        </p:nvSpPr>
+        <p:spPr>
+          <a:xfrm>
+            <a:off x="914400" y="3163824"/>
+            <a:ext cx="1737360" cy="2048256"/>
+          </a:xfrm>
+          <a:prstGeom prst="roundRect">
+            <a:avLst>
+              <a:gd name="adj" fmla="val 4000"/>
+            </a:avLst>
+          </a:prstGeom>
+          <a:solidFill>
+            <a:srgbClr val="3E4650"/>
+          </a:solidFill>
+          <a:ln>
+            <a:noFill/>
+          </a:ln>
+          <a:effectLst/>
+        </p:spPr>
+        <p:txBody>
+          <a:bodyPr rtlCol="0" anchor="ctr"/>
+          <a:lstStyle/>
+          <a:p>
+            <a:pPr algn="ctr"/>
+          </a:p>
+        </p:txBody>
+      </p:sp>
+      <p:sp>
+        <p:nvSpPr>
+          <p:cNvPr id="17" name="TextBox 16"/>
+          <p:cNvSpPr txBox="1"/>
+          <p:nvPr/>
+        </p:nvSpPr>
+        <p:spPr>
+          <a:xfrm>
+            <a:off x="1024128" y="3904487"/>
+            <a:ext cx="1517904" cy="566928"/>
+          </a:xfrm>
+          <a:prstGeom prst="rect">
+            <a:avLst/>
+          </a:prstGeom>
+          <a:noFill/>
+        </p:spPr>
+        <p:txBody>
+          <a:bodyPr wrap="square" lIns="0" rIns="0" tIns="0" bIns="0">
+            <a:spAutoFit/>
+          </a:bodyPr>
+          <a:lstStyle/>
+          <a:p>
+            <a:pPr algn="ctr"/>
+            <a:r>
+              <a:rPr sz="1500" b="1">
+                <a:solidFill>
+                  <a:srgbClr val="FFFFFF"/>
+                </a:solidFill>
+                <a:latin typeface="맑은 고딕"/>
+              </a:rPr>
+              <a:t>②</a:t>
+            </a:r>
+          </a:p>
+          <a:p>
+            <a:pPr algn="ctr">
+              <a:spcBef>
+                <a:spcPts val="300"/>
+              </a:spcBef>
+            </a:pPr>
+            <a:r>
+              <a:rPr sz="1100" b="1">
+                <a:solidFill>
+                  <a:srgbClr val="FFFFFF"/>
+                </a:solidFill>
+                <a:latin typeface="맑은 고딕"/>
+              </a:rPr>
+              <a:t>안테나 → 동체</a:t>
+            </a:r>
+          </a:p>
+          <a:p>
+            <a:pPr algn="ctr">
+              <a:spcBef>
+                <a:spcPts val="300"/>
+              </a:spcBef>
+            </a:pPr>
+            <a:r>
+              <a:rPr sz="750" b="0">
+                <a:solidFill>
+                  <a:srgbClr val="B4B4B4"/>
+                </a:solidFill>
+                <a:latin typeface="맑은 고딕"/>
+              </a:rPr>
+              <a:t>회전 + 평행이동</a:t>
+            </a:r>
+          </a:p>
+        </p:txBody>
+      </p:sp>
+      <p:sp>
+        <p:nvSpPr>
+          <p:cNvPr id="18" name="Rounded Rectangle 17"/>
+          <p:cNvSpPr/>
+          <p:nvPr/>
+        </p:nvSpPr>
+        <p:spPr>
+          <a:xfrm>
+            <a:off x="2798064" y="3163824"/>
+            <a:ext cx="3749039" cy="2048256"/>
+          </a:xfrm>
+          <a:prstGeom prst="roundRect">
+            <a:avLst>
+              <a:gd name="adj" fmla="val 4000"/>
+            </a:avLst>
+          </a:prstGeom>
+          <a:solidFill>
+            <a:srgbClr val="DCDCDC"/>
+          </a:solidFill>
+          <a:ln>
+            <a:noFill/>
+          </a:ln>
+          <a:effectLst/>
+        </p:spPr>
+        <p:txBody>
+          <a:bodyPr rtlCol="0" anchor="ctr"/>
+          <a:lstStyle/>
+          <a:p>
+            <a:pPr algn="ctr"/>
+          </a:p>
+        </p:txBody>
+      </p:sp>
+      <p:pic>
+        <p:nvPicPr>
+          <p:cNvPr id="19" name="Picture 18" descr="ant2body.png"/>
+          <p:cNvPicPr>
+            <a:picLocks noChangeAspect="1"/>
+          </p:cNvPicPr>
+          <p:nvPr/>
+        </p:nvPicPr>
+        <p:blipFill>
+          <a:blip r:embed="rId3"/>
+          <a:stretch>
+            <a:fillRect/>
+          </a:stretch>
+        </p:blipFill>
+        <p:spPr>
+          <a:xfrm>
+            <a:off x="2926080" y="3297538"/>
+            <a:ext cx="3493008" cy="537243"/>
+          </a:xfrm>
+          <a:prstGeom prst="rect">
+            <a:avLst/>
+          </a:prstGeom>
+        </p:spPr>
+      </p:pic>
+      <p:pic>
+        <p:nvPicPr>
+          <p:cNvPr id="20" name="Picture 19" descr="amat.png"/>
+          <p:cNvPicPr>
+            <a:picLocks noChangeAspect="1"/>
+          </p:cNvPicPr>
+          <p:nvPr/>
+        </p:nvPicPr>
+        <p:blipFill>
+          <a:blip r:embed="rId4"/>
+          <a:stretch>
+            <a:fillRect/>
+          </a:stretch>
+        </p:blipFill>
+        <p:spPr>
+          <a:xfrm>
+            <a:off x="3315018" y="3931920"/>
+            <a:ext cx="2715130" cy="1170432"/>
+          </a:xfrm>
+          <a:prstGeom prst="rect">
+            <a:avLst/>
+          </a:prstGeom>
+        </p:spPr>
+      </p:pic>
+      <p:sp>
+        <p:nvSpPr>
+          <p:cNvPr id="21" name="Rounded Rectangle 20"/>
+          <p:cNvSpPr/>
+          <p:nvPr/>
+        </p:nvSpPr>
+        <p:spPr>
+          <a:xfrm>
+            <a:off x="6693408" y="3163824"/>
+            <a:ext cx="4581144" cy="2048256"/>
+          </a:xfrm>
+          <a:prstGeom prst="roundRect">
+            <a:avLst>
+              <a:gd name="adj" fmla="val 2000"/>
+            </a:avLst>
+          </a:prstGeom>
+          <a:solidFill>
+            <a:srgbClr val="FFFFFF"/>
+          </a:solidFill>
+          <a:ln>
+            <a:noFill/>
+          </a:ln>
+          <a:effectLst/>
+        </p:spPr>
+        <p:txBody>
+          <a:bodyPr rtlCol="0" anchor="ctr"/>
+          <a:lstStyle/>
+          <a:p>
+            <a:pPr algn="ctr"/>
+          </a:p>
+        </p:txBody>
+      </p:sp>
+      <p:sp>
+        <p:nvSpPr>
+          <p:cNvPr id="22" name="TextBox 21"/>
+          <p:cNvSpPr txBox="1"/>
+          <p:nvPr/>
+        </p:nvSpPr>
+        <p:spPr>
+          <a:xfrm>
+            <a:off x="6839712" y="3246120"/>
+            <a:ext cx="4288536" cy="1901952"/>
+          </a:xfrm>
+          <a:prstGeom prst="rect">
+            <a:avLst/>
+          </a:prstGeom>
+          <a:noFill/>
+        </p:spPr>
+        <p:txBody>
+          <a:bodyPr wrap="square" lIns="0" rIns="0" tIns="0" bIns="0">
+            <a:spAutoFit/>
+          </a:bodyPr>
+          <a:lstStyle/>
+          <a:p>
+            <a:pPr>
+              <a:spcBef>
+                <a:spcPts val="0"/>
+              </a:spcBef>
+            </a:pPr>
+            <a:r>
+              <a:rPr sz="850" b="0">
+                <a:solidFill>
+                  <a:srgbClr val="777777"/>
+                </a:solidFill>
+                <a:latin typeface="Consolas"/>
+              </a:rPr>
+              <a:t>static matrix f_RotAntToBody(const ST_Mount m)</a:t>
+            </a:r>
+          </a:p>
+          <a:p>
+            <a:pPr>
+              <a:spcBef>
+                <a:spcPts val="150"/>
+              </a:spcBef>
+            </a:pPr>
+            <a:r>
+              <a:rPr sz="850" b="0">
+                <a:solidFill>
+                  <a:srgbClr val="1A1A1A"/>
+                </a:solidFill>
+                <a:latin typeface="Consolas"/>
+              </a:rPr>
+              <a:t>{  matrix stRz   = f_RotZ(m.dAz);      // 설치 방위</a:t>
+            </a:r>
+          </a:p>
+          <a:p>
+            <a:pPr>
+              <a:spcBef>
+                <a:spcPts val="150"/>
+              </a:spcBef>
+            </a:pPr>
+            <a:r>
+              <a:rPr sz="850" b="0">
+                <a:solidFill>
+                  <a:srgbClr val="1A1A1A"/>
+                </a:solidFill>
+                <a:latin typeface="Consolas"/>
+              </a:rPr>
+              <a:t>   matrix stRy   = f_RotY(m.dTilt);    // 백틸트</a:t>
+            </a:r>
+          </a:p>
+          <a:p>
+            <a:pPr>
+              <a:spcBef>
+                <a:spcPts val="150"/>
+              </a:spcBef>
+            </a:pPr>
+            <a:r>
+              <a:rPr sz="850" b="0">
+                <a:solidFill>
+                  <a:srgbClr val="1A1A1A"/>
+                </a:solidFill>
+                <a:latin typeface="Consolas"/>
+              </a:rPr>
+              <a:t>   matrix stAxis = f_RotAntAxisToBody();   // A</a:t>
+            </a:r>
+          </a:p>
+          <a:p>
+            <a:pPr>
+              <a:spcBef>
+                <a:spcPts val="150"/>
+              </a:spcBef>
+            </a:pPr>
+            <a:r>
+              <a:rPr sz="850" b="0">
+                <a:solidFill>
+                  <a:srgbClr val="1A1A1A"/>
+                </a:solidFill>
+                <a:latin typeface="Consolas"/>
+              </a:rPr>
+              <a:t>   matrix stMnt  = Matrix_Product2(&amp;stRz, &amp;stRy);</a:t>
+            </a:r>
+          </a:p>
+          <a:p>
+            <a:pPr>
+              <a:spcBef>
+                <a:spcPts val="150"/>
+              </a:spcBef>
+            </a:pPr>
+            <a:r>
+              <a:rPr sz="850" b="0">
+                <a:solidFill>
+                  <a:srgbClr val="1A1A1A"/>
+                </a:solidFill>
+                <a:latin typeface="Consolas"/>
+              </a:rPr>
+              <a:t>   return Matrix_Product2(&amp;stMnt, &amp;stAxis);  }</a:t>
+            </a:r>
+          </a:p>
+          <a:p>
+            <a:pPr>
+              <a:spcBef>
+                <a:spcPts val="150"/>
+              </a:spcBef>
+            </a:pPr>
+            <a:r>
+              <a:rPr sz="850" b="0">
+                <a:solidFill>
+                  <a:srgbClr val="1A1A1A"/>
+                </a:solidFill>
+                <a:latin typeface="Consolas"/>
+              </a:rPr>
+              <a:t/>
+            </a:r>
+          </a:p>
+          <a:p>
+            <a:pPr>
+              <a:spcBef>
+                <a:spcPts val="150"/>
+              </a:spcBef>
+            </a:pPr>
+            <a:r>
+              <a:rPr sz="850" b="0">
+                <a:solidFill>
+                  <a:srgbClr val="777777"/>
+                </a:solidFill>
+                <a:latin typeface="Consolas"/>
+              </a:rPr>
+              <a:t>ST_Vec3 f_AntToBody(...)</a:t>
+            </a:r>
+          </a:p>
+          <a:p>
+            <a:pPr>
+              <a:spcBef>
+                <a:spcPts val="150"/>
+              </a:spcBef>
+            </a:pPr>
+            <a:r>
+              <a:rPr sz="850" b="0">
+                <a:solidFill>
+                  <a:srgbClr val="1A1A1A"/>
+                </a:solidFill>
+                <a:latin typeface="Consolas"/>
+              </a:rPr>
+              <a:t>{  stRot = Matrix_Product2(&amp;stR, &amp;stP);   // R·p</a:t>
+            </a:r>
+          </a:p>
+          <a:p>
+            <a:pPr>
+              <a:spcBef>
+                <a:spcPts val="150"/>
+              </a:spcBef>
+            </a:pPr>
+            <a:r>
+              <a:rPr sz="850" b="0">
+                <a:solidFill>
+                  <a:srgbClr val="1A1A1A"/>
+                </a:solidFill>
+                <a:latin typeface="Consolas"/>
+              </a:rPr>
+              <a:t>   stOut = Matrix_Add(&amp;stRot, &amp;stOff);  }  // + 레버암</a:t>
+            </a:r>
+          </a:p>
+        </p:txBody>
+      </p:sp>
+      <p:sp>
+        <p:nvSpPr>
+          <p:cNvPr id="23" name="Rounded Rectangle 22"/>
+          <p:cNvSpPr/>
+          <p:nvPr/>
+        </p:nvSpPr>
+        <p:spPr>
+          <a:xfrm>
+            <a:off x="914400" y="5358384"/>
+            <a:ext cx="10360152" cy="493776"/>
+          </a:xfrm>
+          <a:prstGeom prst="roundRect">
+            <a:avLst>
+              <a:gd name="adj" fmla="val 4000"/>
+            </a:avLst>
+          </a:prstGeom>
+          <a:solidFill>
+            <a:srgbClr val="8E8E8E"/>
+          </a:solidFill>
+          <a:ln>
+            <a:noFill/>
+          </a:ln>
+          <a:effectLst/>
+        </p:spPr>
+        <p:txBody>
+          <a:bodyPr rtlCol="0" anchor="ctr"/>
+          <a:lstStyle/>
+          <a:p>
+            <a:pPr algn="ctr"/>
+          </a:p>
+        </p:txBody>
+      </p:sp>
+      <p:sp>
+        <p:nvSpPr>
+          <p:cNvPr id="24" name="TextBox 23"/>
+          <p:cNvSpPr txBox="1"/>
+          <p:nvPr/>
+        </p:nvSpPr>
+        <p:spPr>
+          <a:xfrm>
+            <a:off x="1133856" y="5449824"/>
+            <a:ext cx="9921240" cy="347472"/>
+          </a:xfrm>
+          <a:prstGeom prst="rect">
+            <a:avLst/>
+          </a:prstGeom>
+          <a:noFill/>
+        </p:spPr>
+        <p:txBody>
+          <a:bodyPr wrap="square" lIns="0" rIns="0" tIns="0" bIns="0">
+            <a:spAutoFit/>
+          </a:bodyPr>
+          <a:lstStyle/>
+          <a:p>
+            <a:r>
+              <a:rPr sz="1000" b="1">
+                <a:solidFill>
+                  <a:srgbClr val="FFFFFF"/>
+                </a:solidFill>
+                <a:latin typeface="맑은 고딕"/>
+              </a:rPr>
+              <a:t>이번 과제 값</a:t>
+            </a:r>
+          </a:p>
+          <a:p>
+            <a:pPr>
+              <a:spcBef>
+                <a:spcPts val="300"/>
+              </a:spcBef>
+            </a:pPr>
+            <a:r>
+              <a:rPr sz="850" b="0">
+                <a:solidFill>
+                  <a:srgbClr val="F0F0F0"/>
+                </a:solidFill>
+                <a:latin typeface="Consolas"/>
+              </a:rPr>
+              <a:t>p_ant  = ( +10,000.00,  0.00,  +17,320.51 ) m        →   p_body = ( +9,970.00,  +17,320.51,  −10.00 ) m       ( A 가 맨 오른쪽이라 벡터에 가장 먼저 걸린다 )</a:t>
+            </a:r>
+          </a:p>
+        </p:txBody>
+      </p:sp>
+    </p:spTree>
+  </p:cSld>
+  <p:clrMapOvr>
+    <a:masterClrMapping/>
+  </p:clrMapOvr>
+</p:sld>
+</file>
+
+<file path=ppt/slides/slide27.xml><?xml version="1.0" encoding="utf-8"?>
+<p:sld xmlns:a="http://schemas.openxmlformats.org/drawingml/2006/main" xmlns:p="http://schemas.openxmlformats.org/presentationml/2006/main" xmlns:r="http://schemas.openxmlformats.org/officeDocument/2006/relationships">
+  <p:cSld>
+    <p:spTree>
+      <p:nvGrpSpPr>
+        <p:cNvPr id="1" name=""/>
+        <p:cNvGrpSpPr/>
+        <p:nvPr/>
+      </p:nvGrpSpPr>
+      <p:grpSpPr/>
+      <p:sp>
+        <p:nvSpPr>
+          <p:cNvPr id="2" name="Shape 0"/>
+          <p:cNvSpPr/>
+          <p:nvPr/>
+        </p:nvSpPr>
+        <p:spPr>
+          <a:xfrm>
+            <a:off x="548640" y="384048"/>
+            <a:ext cx="11094415" cy="566928"/>
+          </a:xfrm>
+          <a:prstGeom prst="rect">
+            <a:avLst/>
+          </a:prstGeom>
+          <a:solidFill>
+            <a:srgbClr val="3E4650"/>
+          </a:solidFill>
+          <a:ln/>
+        </p:spPr>
+      </p:sp>
+      <p:sp>
+        <p:nvSpPr>
+          <p:cNvPr id="3" name="Text 1"/>
+          <p:cNvSpPr txBox="1"/>
+          <p:nvPr/>
+        </p:nvSpPr>
+        <p:spPr>
+          <a:xfrm>
+            <a:off x="749808" y="384048"/>
+            <a:ext cx="10692079" cy="566928"/>
+          </a:xfrm>
+          <a:prstGeom prst="rect">
+            <a:avLst/>
+          </a:prstGeom>
+          <a:noFill/>
+          <a:ln/>
+        </p:spPr>
+        <p:txBody>
+          <a:bodyPr wrap="square" lIns="0" tIns="0" rIns="0" bIns="0" rtlCol="0" anchor="ctr"/>
+          <a:lstStyle/>
+          <a:p>
+            <a:pPr marL="0" indent="0">
+              <a:buNone/>
+            </a:pPr>
+            <a:r>
+              <a:rPr lang="en-US" sz="2000" b="1" dirty="0">
+                <a:solidFill>
+                  <a:srgbClr val="FFFFFF"/>
+                </a:solidFill>
+                <a:latin typeface="맑은 고딕" pitchFamily="34" charset="0"/>
+                <a:ea typeface="맑은 고딕" pitchFamily="34" charset="-122"/>
+                <a:cs typeface="맑은 고딕" pitchFamily="34" charset="-120"/>
+              </a:rPr>
+              <a:t>03. 공식과 코드 ②    동체 → NED → ECEF</a:t>
+            </a:r>
+            <a:endParaRPr lang="en-US" sz="2000" dirty="0"/>
+          </a:p>
+        </p:txBody>
+      </p:sp>
+      <p:sp>
+        <p:nvSpPr>
+          <p:cNvPr id="4" name="Shape 2"/>
+          <p:cNvSpPr/>
+          <p:nvPr/>
+        </p:nvSpPr>
+        <p:spPr>
+          <a:xfrm>
+            <a:off x="548640" y="1097280"/>
+            <a:ext cx="11094415" cy="4864608"/>
+          </a:xfrm>
+          <a:prstGeom prst="rect">
+            <a:avLst/>
+          </a:prstGeom>
+          <a:solidFill>
+            <a:srgbClr val="F4F4F4"/>
+          </a:solidFill>
+          <a:ln/>
+        </p:spPr>
+      </p:sp>
+      <p:sp>
+        <p:nvSpPr>
+          <p:cNvPr id="5" name="Shape 3"/>
+          <p:cNvSpPr/>
+          <p:nvPr/>
+        </p:nvSpPr>
+        <p:spPr>
+          <a:xfrm>
+            <a:off x="548640" y="6199632"/>
+            <a:ext cx="11094415" cy="0"/>
+          </a:xfrm>
+          <a:prstGeom prst="line">
+            <a:avLst/>
+          </a:prstGeom>
+          <a:noFill/>
+          <a:ln w="9525">
+            <a:solidFill>
+              <a:srgbClr val="BFBFBF"/>
+            </a:solidFill>
+            <a:prstDash val="solid"/>
+          </a:ln>
+        </p:spPr>
+      </p:sp>
+      <p:sp>
+        <p:nvSpPr>
+          <p:cNvPr id="7" name="Text 5"/>
+          <p:cNvSpPr txBox="1"/>
+          <p:nvPr/>
+        </p:nvSpPr>
+        <p:spPr>
+          <a:xfrm>
+            <a:off x="0" y="6419088"/>
+            <a:ext cx="12191695" cy="219456"/>
+          </a:xfrm>
+          <a:prstGeom prst="rect">
+            <a:avLst/>
+          </a:prstGeom>
+          <a:noFill/>
+          <a:ln/>
+        </p:spPr>
+        <p:txBody>
+          <a:bodyPr wrap="square" lIns="0" tIns="0" rIns="0" bIns="0" rtlCol="0" anchor="ctr"/>
+          <a:lstStyle/>
+          <a:p>
+            <a:pPr marL="0" indent="0" algn="ctr">
+              <a:buNone/>
+            </a:pPr>
+            <a:r>
+              <a:rPr lang="en-US" sz="900" dirty="0">
+                <a:solidFill>
+                  <a:srgbClr val="A0A0A0"/>
+                </a:solidFill>
+                <a:latin typeface="Arial" pitchFamily="34" charset="0"/>
+                <a:ea typeface="Arial" pitchFamily="34" charset="-122"/>
+                <a:cs typeface="Arial" pitchFamily="34" charset="-120"/>
+              </a:rPr>
+              <a:t>27</a:t>
+            </a:r>
+            <a:endParaRPr lang="en-US" sz="900" dirty="0"/>
+          </a:p>
+        </p:txBody>
+      </p:sp>
+      <p:sp>
+        <p:nvSpPr>
+          <p:cNvPr id="8" name="TextBox 7"/>
+          <p:cNvSpPr txBox="1"/>
+          <p:nvPr/>
+        </p:nvSpPr>
+        <p:spPr>
+          <a:xfrm>
+            <a:off x="2798064" y="1335024"/>
+            <a:ext cx="3749039" cy="219456"/>
+          </a:xfrm>
+          <a:prstGeom prst="rect">
+            <a:avLst/>
+          </a:prstGeom>
+          <a:noFill/>
+        </p:spPr>
+        <p:txBody>
+          <a:bodyPr wrap="square" lIns="0" rIns="0" tIns="0" bIns="0">
+            <a:spAutoFit/>
+          </a:bodyPr>
+          <a:lstStyle/>
+          <a:p>
+            <a:r>
+              <a:rPr sz="1000" b="1">
+                <a:solidFill>
+                  <a:srgbClr val="888888"/>
+                </a:solidFill>
+                <a:latin typeface="맑은 고딕"/>
+              </a:rPr>
+              <a:t>공식</a:t>
+            </a:r>
+          </a:p>
+        </p:txBody>
+      </p:sp>
+      <p:sp>
+        <p:nvSpPr>
+          <p:cNvPr id="9" name="TextBox 8"/>
+          <p:cNvSpPr txBox="1"/>
+          <p:nvPr/>
+        </p:nvSpPr>
+        <p:spPr>
+          <a:xfrm>
+            <a:off x="6693408" y="1335024"/>
+            <a:ext cx="4581144" cy="219456"/>
+          </a:xfrm>
+          <a:prstGeom prst="rect">
+            <a:avLst/>
+          </a:prstGeom>
+          <a:noFill/>
+        </p:spPr>
+        <p:txBody>
+          <a:bodyPr wrap="square" lIns="0" rIns="0" tIns="0" bIns="0">
+            <a:spAutoFit/>
+          </a:bodyPr>
+          <a:lstStyle/>
+          <a:p>
+            <a:r>
+              <a:rPr sz="1000" b="1">
+                <a:solidFill>
+                  <a:srgbClr val="888888"/>
+                </a:solidFill>
+                <a:latin typeface="맑은 고딕"/>
+              </a:rPr>
+              <a:t>C 구현</a:t>
+            </a:r>
+          </a:p>
+        </p:txBody>
+      </p:sp>
+      <p:sp>
+        <p:nvSpPr>
+          <p:cNvPr id="10" name="Rounded Rectangle 9"/>
+          <p:cNvSpPr/>
+          <p:nvPr/>
+        </p:nvSpPr>
+        <p:spPr>
+          <a:xfrm>
+            <a:off x="914400" y="1591056"/>
+            <a:ext cx="1737360" cy="1371600"/>
+          </a:xfrm>
+          <a:prstGeom prst="roundRect">
+            <a:avLst>
+              <a:gd name="adj" fmla="val 4000"/>
+            </a:avLst>
+          </a:prstGeom>
+          <a:solidFill>
+            <a:srgbClr val="3E4650"/>
+          </a:solidFill>
+          <a:ln>
+            <a:noFill/>
+          </a:ln>
+          <a:effectLst/>
+        </p:spPr>
+        <p:txBody>
+          <a:bodyPr rtlCol="0" anchor="ctr"/>
+          <a:lstStyle/>
+          <a:p>
+            <a:pPr algn="ctr"/>
+          </a:p>
+        </p:txBody>
+      </p:sp>
+      <p:sp>
+        <p:nvSpPr>
+          <p:cNvPr id="11" name="TextBox 10"/>
+          <p:cNvSpPr txBox="1"/>
+          <p:nvPr/>
+        </p:nvSpPr>
+        <p:spPr>
+          <a:xfrm>
+            <a:off x="1024128" y="1993392"/>
+            <a:ext cx="1517904" cy="566928"/>
+          </a:xfrm>
+          <a:prstGeom prst="rect">
+            <a:avLst/>
+          </a:prstGeom>
+          <a:noFill/>
+        </p:spPr>
+        <p:txBody>
+          <a:bodyPr wrap="square" lIns="0" rIns="0" tIns="0" bIns="0">
+            <a:spAutoFit/>
+          </a:bodyPr>
+          <a:lstStyle/>
+          <a:p>
+            <a:pPr algn="ctr"/>
+            <a:r>
+              <a:rPr sz="1500" b="1">
+                <a:solidFill>
+                  <a:srgbClr val="FFFFFF"/>
+                </a:solidFill>
+                <a:latin typeface="맑은 고딕"/>
+              </a:rPr>
+              <a:t>③</a:t>
+            </a:r>
+          </a:p>
+          <a:p>
+            <a:pPr algn="ctr">
+              <a:spcBef>
+                <a:spcPts val="300"/>
+              </a:spcBef>
+            </a:pPr>
+            <a:r>
+              <a:rPr sz="1100" b="1">
+                <a:solidFill>
+                  <a:srgbClr val="FFFFFF"/>
+                </a:solidFill>
+                <a:latin typeface="맑은 고딕"/>
+              </a:rPr>
+              <a:t>동체 → NED</a:t>
+            </a:r>
+          </a:p>
+          <a:p>
+            <a:pPr algn="ctr">
+              <a:spcBef>
+                <a:spcPts val="300"/>
+              </a:spcBef>
+            </a:pPr>
+            <a:r>
+              <a:rPr sz="750" b="0">
+                <a:solidFill>
+                  <a:srgbClr val="B4B4B4"/>
+                </a:solidFill>
+                <a:latin typeface="맑은 고딕"/>
+              </a:rPr>
+              <a:t>회전만 (원점 같음)</a:t>
+            </a:r>
+          </a:p>
+        </p:txBody>
+      </p:sp>
+      <p:sp>
+        <p:nvSpPr>
+          <p:cNvPr id="12" name="Rounded Rectangle 11"/>
+          <p:cNvSpPr/>
+          <p:nvPr/>
+        </p:nvSpPr>
+        <p:spPr>
+          <a:xfrm>
+            <a:off x="2798064" y="1591056"/>
+            <a:ext cx="3749039" cy="1371600"/>
+          </a:xfrm>
+          <a:prstGeom prst="roundRect">
+            <a:avLst>
+              <a:gd name="adj" fmla="val 4000"/>
+            </a:avLst>
+          </a:prstGeom>
+          <a:solidFill>
+            <a:srgbClr val="DCDCDC"/>
+          </a:solidFill>
+          <a:ln>
+            <a:noFill/>
+          </a:ln>
+          <a:effectLst/>
+        </p:spPr>
+        <p:txBody>
+          <a:bodyPr rtlCol="0" anchor="ctr"/>
+          <a:lstStyle/>
+          <a:p>
+            <a:pPr algn="ctr"/>
+          </a:p>
+        </p:txBody>
+      </p:sp>
+      <p:pic>
+        <p:nvPicPr>
+          <p:cNvPr id="13" name="Picture 12" descr="body2ned.png"/>
+          <p:cNvPicPr>
+            <a:picLocks noChangeAspect="1"/>
+          </p:cNvPicPr>
+          <p:nvPr/>
+        </p:nvPicPr>
+        <p:blipFill>
+          <a:blip r:embed="rId2"/>
+          <a:stretch>
+            <a:fillRect/>
+          </a:stretch>
+        </p:blipFill>
+        <p:spPr>
+          <a:xfrm>
+            <a:off x="2926080" y="2164615"/>
+            <a:ext cx="3493008" cy="224481"/>
+          </a:xfrm>
+          <a:prstGeom prst="rect">
+            <a:avLst/>
+          </a:prstGeom>
+        </p:spPr>
+      </p:pic>
+      <p:sp>
+        <p:nvSpPr>
+          <p:cNvPr id="14" name="Rounded Rectangle 13"/>
+          <p:cNvSpPr/>
+          <p:nvPr/>
+        </p:nvSpPr>
+        <p:spPr>
+          <a:xfrm>
+            <a:off x="6693408" y="1591056"/>
+            <a:ext cx="4581144" cy="1371600"/>
+          </a:xfrm>
+          <a:prstGeom prst="roundRect">
+            <a:avLst>
+              <a:gd name="adj" fmla="val 2000"/>
+            </a:avLst>
+          </a:prstGeom>
+          <a:solidFill>
+            <a:srgbClr val="FFFFFF"/>
+          </a:solidFill>
+          <a:ln>
+            <a:noFill/>
+          </a:ln>
+          <a:effectLst/>
+        </p:spPr>
+        <p:txBody>
+          <a:bodyPr rtlCol="0" anchor="ctr"/>
+          <a:lstStyle/>
+          <a:p>
+            <a:pPr algn="ctr"/>
+          </a:p>
+        </p:txBody>
+      </p:sp>
+      <p:sp>
+        <p:nvSpPr>
+          <p:cNvPr id="15" name="TextBox 14"/>
+          <p:cNvSpPr txBox="1"/>
+          <p:nvPr/>
+        </p:nvSpPr>
+        <p:spPr>
+          <a:xfrm>
+            <a:off x="6839712" y="1673352"/>
+            <a:ext cx="4288536" cy="1225296"/>
+          </a:xfrm>
+          <a:prstGeom prst="rect">
+            <a:avLst/>
+          </a:prstGeom>
+          <a:noFill/>
+        </p:spPr>
+        <p:txBody>
+          <a:bodyPr wrap="square" lIns="0" rIns="0" tIns="0" bIns="0">
+            <a:spAutoFit/>
+          </a:bodyPr>
+          <a:lstStyle/>
+          <a:p>
+            <a:pPr>
+              <a:spcBef>
+                <a:spcPts val="0"/>
+              </a:spcBef>
+            </a:pPr>
+            <a:r>
+              <a:rPr sz="850" b="0">
+                <a:solidFill>
+                  <a:srgbClr val="777777"/>
+                </a:solidFill>
+                <a:latin typeface="Consolas"/>
+              </a:rPr>
+              <a:t>static matrix f_RotBodyToNed(const ST_Attitude a)</a:t>
+            </a:r>
+          </a:p>
+          <a:p>
+            <a:pPr>
+              <a:spcBef>
+                <a:spcPts val="150"/>
+              </a:spcBef>
+            </a:pPr>
+            <a:r>
+              <a:rPr sz="850" b="0">
+                <a:solidFill>
+                  <a:srgbClr val="1A1A1A"/>
+                </a:solidFill>
+                <a:latin typeface="Consolas"/>
+              </a:rPr>
+              <a:t>{  matrix stRz = f_RotZ(a.dYaw);</a:t>
+            </a:r>
+          </a:p>
+          <a:p>
+            <a:pPr>
+              <a:spcBef>
+                <a:spcPts val="150"/>
+              </a:spcBef>
+            </a:pPr>
+            <a:r>
+              <a:rPr sz="850" b="0">
+                <a:solidFill>
+                  <a:srgbClr val="1A1A1A"/>
+                </a:solidFill>
+                <a:latin typeface="Consolas"/>
+              </a:rPr>
+              <a:t>   matrix stRy = f_RotY(a.dPitch);</a:t>
+            </a:r>
+          </a:p>
+          <a:p>
+            <a:pPr>
+              <a:spcBef>
+                <a:spcPts val="150"/>
+              </a:spcBef>
+            </a:pPr>
+            <a:r>
+              <a:rPr sz="850" b="0">
+                <a:solidFill>
+                  <a:srgbClr val="1A1A1A"/>
+                </a:solidFill>
+                <a:latin typeface="Consolas"/>
+              </a:rPr>
+              <a:t>   matrix stRx = f_RotX(a.dRoll);</a:t>
+            </a:r>
+          </a:p>
+          <a:p>
+            <a:pPr>
+              <a:spcBef>
+                <a:spcPts val="150"/>
+              </a:spcBef>
+            </a:pPr>
+            <a:r>
+              <a:rPr sz="850" b="0">
+                <a:solidFill>
+                  <a:srgbClr val="1A1A1A"/>
+                </a:solidFill>
+                <a:latin typeface="Consolas"/>
+              </a:rPr>
+              <a:t>   return Matrix_Product3(&amp;stRz, &amp;stRy, &amp;stRx);  }</a:t>
+            </a:r>
+          </a:p>
+          <a:p>
+            <a:pPr>
+              <a:spcBef>
+                <a:spcPts val="150"/>
+              </a:spcBef>
+            </a:pPr>
+            <a:r>
+              <a:rPr sz="850" b="0">
+                <a:solidFill>
+                  <a:srgbClr val="777777"/>
+                </a:solidFill>
+                <a:latin typeface="Consolas"/>
+              </a:rPr>
+              <a:t>            // Product3 = (Rz·Ry)·Rx → Rx 가 먼저 걸림</a:t>
+            </a:r>
+          </a:p>
+        </p:txBody>
+      </p:sp>
+      <p:sp>
+        <p:nvSpPr>
+          <p:cNvPr id="16" name="Rounded Rectangle 15"/>
+          <p:cNvSpPr/>
+          <p:nvPr/>
+        </p:nvSpPr>
+        <p:spPr>
+          <a:xfrm>
+            <a:off x="914400" y="3108960"/>
+            <a:ext cx="1737360" cy="2103120"/>
+          </a:xfrm>
+          <a:prstGeom prst="roundRect">
+            <a:avLst>
+              <a:gd name="adj" fmla="val 4000"/>
+            </a:avLst>
+          </a:prstGeom>
+          <a:solidFill>
+            <a:srgbClr val="3E4650"/>
+          </a:solidFill>
+          <a:ln>
+            <a:noFill/>
+          </a:ln>
+          <a:effectLst/>
+        </p:spPr>
+        <p:txBody>
+          <a:bodyPr rtlCol="0" anchor="ctr"/>
+          <a:lstStyle/>
+          <a:p>
+            <a:pPr algn="ctr"/>
+          </a:p>
+        </p:txBody>
+      </p:sp>
+      <p:sp>
+        <p:nvSpPr>
+          <p:cNvPr id="17" name="TextBox 16"/>
+          <p:cNvSpPr txBox="1"/>
+          <p:nvPr/>
+        </p:nvSpPr>
+        <p:spPr>
+          <a:xfrm>
+            <a:off x="1024128" y="3877056"/>
+            <a:ext cx="1517904" cy="566928"/>
+          </a:xfrm>
+          <a:prstGeom prst="rect">
+            <a:avLst/>
+          </a:prstGeom>
+          <a:noFill/>
+        </p:spPr>
+        <p:txBody>
+          <a:bodyPr wrap="square" lIns="0" rIns="0" tIns="0" bIns="0">
+            <a:spAutoFit/>
+          </a:bodyPr>
+          <a:lstStyle/>
+          <a:p>
+            <a:pPr algn="ctr"/>
+            <a:r>
+              <a:rPr sz="1500" b="1">
+                <a:solidFill>
+                  <a:srgbClr val="FFFFFF"/>
+                </a:solidFill>
+                <a:latin typeface="맑은 고딕"/>
+              </a:rPr>
+              <a:t>④</a:t>
+            </a:r>
+          </a:p>
+          <a:p>
+            <a:pPr algn="ctr">
+              <a:spcBef>
+                <a:spcPts val="300"/>
+              </a:spcBef>
+            </a:pPr>
+            <a:r>
+              <a:rPr sz="1100" b="1">
+                <a:solidFill>
+                  <a:srgbClr val="FFFFFF"/>
+                </a:solidFill>
+                <a:latin typeface="맑은 고딕"/>
+              </a:rPr>
+              <a:t>NED → ECEF</a:t>
+            </a:r>
+          </a:p>
+          <a:p>
+            <a:pPr algn="ctr">
+              <a:spcBef>
+                <a:spcPts val="300"/>
+              </a:spcBef>
+            </a:pPr>
+            <a:r>
+              <a:rPr sz="750" b="0">
+                <a:solidFill>
+                  <a:srgbClr val="B4B4B4"/>
+                </a:solidFill>
+                <a:latin typeface="맑은 고딕"/>
+              </a:rPr>
+              <a:t>회전 + 평행이동</a:t>
+            </a:r>
+          </a:p>
+        </p:txBody>
+      </p:sp>
+      <p:sp>
+        <p:nvSpPr>
+          <p:cNvPr id="18" name="Rounded Rectangle 17"/>
+          <p:cNvSpPr/>
+          <p:nvPr/>
+        </p:nvSpPr>
+        <p:spPr>
+          <a:xfrm>
+            <a:off x="2798064" y="3108960"/>
+            <a:ext cx="3749039" cy="2103120"/>
+          </a:xfrm>
+          <a:prstGeom prst="roundRect">
+            <a:avLst>
+              <a:gd name="adj" fmla="val 4000"/>
+            </a:avLst>
+          </a:prstGeom>
+          <a:solidFill>
+            <a:srgbClr val="DCDCDC"/>
+          </a:solidFill>
+          <a:ln>
+            <a:noFill/>
+          </a:ln>
+          <a:effectLst/>
+        </p:spPr>
+        <p:txBody>
+          <a:bodyPr rtlCol="0" anchor="ctr"/>
+          <a:lstStyle/>
+          <a:p>
+            <a:pPr algn="ctr"/>
+          </a:p>
+        </p:txBody>
+      </p:sp>
+      <p:pic>
+        <p:nvPicPr>
+          <p:cNvPr id="19" name="Picture 18" descr="ned2ecef.png"/>
+          <p:cNvPicPr>
+            <a:picLocks noChangeAspect="1"/>
+          </p:cNvPicPr>
+          <p:nvPr/>
+        </p:nvPicPr>
+        <p:blipFill>
+          <a:blip r:embed="rId3"/>
+          <a:stretch>
+            <a:fillRect/>
+          </a:stretch>
+        </p:blipFill>
+        <p:spPr>
+          <a:xfrm>
+            <a:off x="2889504" y="4051313"/>
+            <a:ext cx="3566160" cy="218413"/>
+          </a:xfrm>
+          <a:prstGeom prst="rect">
+            <a:avLst/>
+          </a:prstGeom>
+        </p:spPr>
+      </p:pic>
+      <p:sp>
+        <p:nvSpPr>
+          <p:cNvPr id="20" name="Rounded Rectangle 19"/>
+          <p:cNvSpPr/>
+          <p:nvPr/>
+        </p:nvSpPr>
+        <p:spPr>
+          <a:xfrm>
+            <a:off x="6693408" y="3108960"/>
+            <a:ext cx="4581144" cy="2103120"/>
+          </a:xfrm>
+          <a:prstGeom prst="roundRect">
+            <a:avLst>
+              <a:gd name="adj" fmla="val 2000"/>
+            </a:avLst>
+          </a:prstGeom>
+          <a:solidFill>
+            <a:srgbClr val="FFFFFF"/>
+          </a:solidFill>
+          <a:ln>
+            <a:noFill/>
+          </a:ln>
+          <a:effectLst/>
+        </p:spPr>
+        <p:txBody>
+          <a:bodyPr rtlCol="0" anchor="ctr"/>
+          <a:lstStyle/>
+          <a:p>
+            <a:pPr algn="ctr"/>
+          </a:p>
+        </p:txBody>
+      </p:sp>
+      <p:sp>
+        <p:nvSpPr>
+          <p:cNvPr id="21" name="TextBox 20"/>
+          <p:cNvSpPr txBox="1"/>
+          <p:nvPr/>
+        </p:nvSpPr>
+        <p:spPr>
+          <a:xfrm>
+            <a:off x="6839712" y="3191256"/>
+            <a:ext cx="4288536" cy="1956815"/>
+          </a:xfrm>
+          <a:prstGeom prst="rect">
+            <a:avLst/>
+          </a:prstGeom>
+          <a:noFill/>
+        </p:spPr>
+        <p:txBody>
+          <a:bodyPr wrap="square" lIns="0" rIns="0" tIns="0" bIns="0">
+            <a:spAutoFit/>
+          </a:bodyPr>
+          <a:lstStyle/>
+          <a:p>
+            <a:pPr>
+              <a:spcBef>
+                <a:spcPts val="0"/>
+              </a:spcBef>
+            </a:pPr>
+            <a:r>
+              <a:rPr sz="850" b="0">
+                <a:solidFill>
+                  <a:srgbClr val="777777"/>
+                </a:solidFill>
+                <a:latin typeface="Consolas"/>
+              </a:rPr>
+              <a:t>static matrix f_RotNedToEcef(const ST_Lla o)</a:t>
+            </a:r>
+          </a:p>
+          <a:p>
+            <a:pPr>
+              <a:spcBef>
+                <a:spcPts val="150"/>
+              </a:spcBef>
+            </a:pPr>
+            <a:r>
+              <a:rPr sz="850" b="0">
+                <a:solidFill>
+                  <a:srgbClr val="1A1A1A"/>
+                </a:solidFill>
+                <a:latin typeface="Consolas"/>
+              </a:rPr>
+              <a:t>{  matrix stRz = f_RotZ(o.dLon);</a:t>
+            </a:r>
+          </a:p>
+          <a:p>
+            <a:pPr>
+              <a:spcBef>
+                <a:spcPts val="150"/>
+              </a:spcBef>
+            </a:pPr>
+            <a:r>
+              <a:rPr sz="850" b="0">
+                <a:solidFill>
+                  <a:srgbClr val="1A1A1A"/>
+                </a:solidFill>
+                <a:latin typeface="Consolas"/>
+              </a:rPr>
+              <a:t>   matrix stRy = f_RotY(-PI / 2.0 - o.dLat);</a:t>
+            </a:r>
+          </a:p>
+          <a:p>
+            <a:pPr>
+              <a:spcBef>
+                <a:spcPts val="150"/>
+              </a:spcBef>
+            </a:pPr>
+            <a:r>
+              <a:rPr sz="850" b="0">
+                <a:solidFill>
+                  <a:srgbClr val="1A1A1A"/>
+                </a:solidFill>
+                <a:latin typeface="Consolas"/>
+              </a:rPr>
+              <a:t>   return Matrix_Product2(&amp;stRz, &amp;stRy);  }</a:t>
+            </a:r>
+          </a:p>
+          <a:p>
+            <a:pPr>
+              <a:spcBef>
+                <a:spcPts val="150"/>
+              </a:spcBef>
+            </a:pPr>
+            <a:r>
+              <a:rPr sz="850" b="0">
+                <a:solidFill>
+                  <a:srgbClr val="1A1A1A"/>
+                </a:solidFill>
+                <a:latin typeface="Consolas"/>
+              </a:rPr>
+              <a:t/>
+            </a:r>
+          </a:p>
+          <a:p>
+            <a:pPr>
+              <a:spcBef>
+                <a:spcPts val="150"/>
+              </a:spcBef>
+            </a:pPr>
+            <a:r>
+              <a:rPr sz="850" b="0">
+                <a:solidFill>
+                  <a:srgbClr val="777777"/>
+                </a:solidFill>
+                <a:latin typeface="Consolas"/>
+              </a:rPr>
+              <a:t>ST_Vec3 f_NedToEcef(const ST_Lla o, const ST_Vec3 n)</a:t>
+            </a:r>
+          </a:p>
+          <a:p>
+            <a:pPr>
+              <a:spcBef>
+                <a:spcPts val="150"/>
+              </a:spcBef>
+            </a:pPr>
+            <a:r>
+              <a:rPr sz="850" b="0">
+                <a:solidFill>
+                  <a:srgbClr val="1A1A1A"/>
+                </a:solidFill>
+                <a:latin typeface="Consolas"/>
+              </a:rPr>
+              <a:t>{  stRot  = Matrix_Product2(&amp;stR, &amp;stP);</a:t>
+            </a:r>
+          </a:p>
+          <a:p>
+            <a:pPr>
+              <a:spcBef>
+                <a:spcPts val="150"/>
+              </a:spcBef>
+            </a:pPr>
+            <a:r>
+              <a:rPr sz="850" b="0">
+                <a:solidFill>
+                  <a:srgbClr val="1A1A1A"/>
+                </a:solidFill>
+                <a:latin typeface="Consolas"/>
+              </a:rPr>
+              <a:t>   stShip = f_ToMat(f_LlaToEcef(o));</a:t>
+            </a:r>
+          </a:p>
+          <a:p>
+            <a:pPr>
+              <a:spcBef>
+                <a:spcPts val="150"/>
+              </a:spcBef>
+            </a:pPr>
+            <a:r>
+              <a:rPr sz="850" b="0">
+                <a:solidFill>
+                  <a:srgbClr val="777777"/>
+                </a:solidFill>
+                <a:latin typeface="Consolas"/>
+              </a:rPr>
+              <a:t>            // 함선 ECEF 를 함수가 안에서 구한다</a:t>
+            </a:r>
+          </a:p>
+          <a:p>
+            <a:pPr>
+              <a:spcBef>
+                <a:spcPts val="150"/>
+              </a:spcBef>
+            </a:pPr>
+            <a:r>
+              <a:rPr sz="850" b="0">
+                <a:solidFill>
+                  <a:srgbClr val="1A1A1A"/>
+                </a:solidFill>
+                <a:latin typeface="Consolas"/>
+              </a:rPr>
+              <a:t>   stOut  = Matrix_Add(&amp;stRot, &amp;stShip);  }</a:t>
+            </a:r>
+          </a:p>
+        </p:txBody>
+      </p:sp>
+      <p:sp>
+        <p:nvSpPr>
+          <p:cNvPr id="22" name="Rounded Rectangle 21"/>
+          <p:cNvSpPr/>
+          <p:nvPr/>
+        </p:nvSpPr>
+        <p:spPr>
+          <a:xfrm>
+            <a:off x="914400" y="5358384"/>
+            <a:ext cx="10360152" cy="493776"/>
+          </a:xfrm>
+          <a:prstGeom prst="roundRect">
+            <a:avLst>
+              <a:gd name="adj" fmla="val 4000"/>
+            </a:avLst>
+          </a:prstGeom>
+          <a:solidFill>
+            <a:srgbClr val="8E8E8E"/>
+          </a:solidFill>
+          <a:ln>
+            <a:noFill/>
+          </a:ln>
+          <a:effectLst/>
+        </p:spPr>
+        <p:txBody>
+          <a:bodyPr rtlCol="0" anchor="ctr"/>
+          <a:lstStyle/>
+          <a:p>
+            <a:pPr algn="ctr"/>
+          </a:p>
+        </p:txBody>
+      </p:sp>
+      <p:sp>
+        <p:nvSpPr>
+          <p:cNvPr id="23" name="TextBox 22"/>
+          <p:cNvSpPr txBox="1"/>
+          <p:nvPr/>
+        </p:nvSpPr>
+        <p:spPr>
+          <a:xfrm>
+            <a:off x="1133856" y="5449824"/>
+            <a:ext cx="9921240" cy="347472"/>
+          </a:xfrm>
+          <a:prstGeom prst="rect">
+            <a:avLst/>
+          </a:prstGeom>
+          <a:noFill/>
+        </p:spPr>
+        <p:txBody>
+          <a:bodyPr wrap="square" lIns="0" rIns="0" tIns="0" bIns="0">
+            <a:spAutoFit/>
+          </a:bodyPr>
+          <a:lstStyle/>
+          <a:p>
+            <a:r>
+              <a:rPr sz="1000" b="1">
+                <a:solidFill>
+                  <a:srgbClr val="FFFFFF"/>
+                </a:solidFill>
+                <a:latin typeface="맑은 고딕"/>
+              </a:rPr>
+              <a:t>이번 과제 값</a:t>
+            </a:r>
+          </a:p>
+          <a:p>
+            <a:pPr>
+              <a:spcBef>
+                <a:spcPts val="300"/>
+              </a:spcBef>
+            </a:pPr>
+            <a:r>
+              <a:rPr sz="850" b="0">
+                <a:solidFill>
+                  <a:srgbClr val="F0F0F0"/>
+                </a:solidFill>
+                <a:latin typeface="Consolas"/>
+              </a:rPr>
+              <a:t>p_NED  = ( −5,197.59,  +19,297.30,  −10.00 ) m           p_ECEF = ( −3,132,053.79,  +4,078,527.19,  +3,760,545.95 ) m</a:t>
+            </a:r>
+          </a:p>
+        </p:txBody>
+      </p:sp>
+    </p:spTree>
+  </p:cSld>
+  <p:clrMapOvr>
+    <a:masterClrMapping/>
+  </p:clrMapOvr>
+</p:sld>
+</file>
+
+<file path=ppt/slides/slide28.xml><?xml version="1.0" encoding="utf-8"?>
+<p:sld xmlns:a="http://schemas.openxmlformats.org/drawingml/2006/main" xmlns:p="http://schemas.openxmlformats.org/presentationml/2006/main" xmlns:r="http://schemas.openxmlformats.org/officeDocument/2006/relationships">
+  <p:cSld>
+    <p:spTree>
+      <p:nvGrpSpPr>
+        <p:cNvPr id="1" name=""/>
+        <p:cNvGrpSpPr/>
+        <p:nvPr/>
+      </p:nvGrpSpPr>
+      <p:grpSpPr/>
+      <p:sp>
+        <p:nvSpPr>
+          <p:cNvPr id="2" name="Shape 0"/>
+          <p:cNvSpPr/>
+          <p:nvPr/>
+        </p:nvSpPr>
+        <p:spPr>
+          <a:xfrm>
+            <a:off x="548640" y="384048"/>
+            <a:ext cx="11094415" cy="566928"/>
+          </a:xfrm>
+          <a:prstGeom prst="rect">
+            <a:avLst/>
+          </a:prstGeom>
+          <a:solidFill>
+            <a:srgbClr val="3E4650"/>
+          </a:solidFill>
+          <a:ln/>
+        </p:spPr>
+      </p:sp>
+      <p:sp>
+        <p:nvSpPr>
+          <p:cNvPr id="3" name="Text 1"/>
+          <p:cNvSpPr txBox="1"/>
+          <p:nvPr/>
+        </p:nvSpPr>
+        <p:spPr>
+          <a:xfrm>
+            <a:off x="749808" y="384048"/>
+            <a:ext cx="10692079" cy="566928"/>
+          </a:xfrm>
+          <a:prstGeom prst="rect">
+            <a:avLst/>
+          </a:prstGeom>
+          <a:noFill/>
+          <a:ln/>
+        </p:spPr>
+        <p:txBody>
+          <a:bodyPr wrap="square" lIns="0" tIns="0" rIns="0" bIns="0" rtlCol="0" anchor="ctr"/>
+          <a:lstStyle/>
+          <a:p>
+            <a:pPr marL="0" indent="0">
+              <a:buNone/>
+            </a:pPr>
+            <a:r>
+              <a:rPr lang="en-US" sz="2000" b="1" dirty="0">
+                <a:solidFill>
+                  <a:srgbClr val="FFFFFF"/>
+                </a:solidFill>
+                <a:latin typeface="맑은 고딕" pitchFamily="34" charset="0"/>
+                <a:ea typeface="맑은 고딕" pitchFamily="34" charset="-122"/>
+                <a:cs typeface="맑은 고딕" pitchFamily="34" charset="-120"/>
+              </a:rPr>
+              <a:t>03. 공식과 코드 ③    ECEF ↔ LLA</a:t>
+            </a:r>
+            <a:endParaRPr lang="en-US" sz="2000" dirty="0"/>
+          </a:p>
+        </p:txBody>
+      </p:sp>
+      <p:sp>
+        <p:nvSpPr>
+          <p:cNvPr id="4" name="Shape 2"/>
+          <p:cNvSpPr/>
+          <p:nvPr/>
+        </p:nvSpPr>
+        <p:spPr>
+          <a:xfrm>
+            <a:off x="548640" y="1097280"/>
+            <a:ext cx="11094415" cy="4864608"/>
+          </a:xfrm>
+          <a:prstGeom prst="rect">
+            <a:avLst/>
+          </a:prstGeom>
+          <a:solidFill>
+            <a:srgbClr val="F4F4F4"/>
+          </a:solidFill>
+          <a:ln/>
+        </p:spPr>
+      </p:sp>
+      <p:sp>
+        <p:nvSpPr>
+          <p:cNvPr id="5" name="Shape 3"/>
+          <p:cNvSpPr/>
+          <p:nvPr/>
+        </p:nvSpPr>
+        <p:spPr>
+          <a:xfrm>
+            <a:off x="548640" y="6199632"/>
+            <a:ext cx="11094415" cy="0"/>
+          </a:xfrm>
+          <a:prstGeom prst="line">
+            <a:avLst/>
+          </a:prstGeom>
+          <a:noFill/>
+          <a:ln w="9525">
+            <a:solidFill>
+              <a:srgbClr val="BFBFBF"/>
+            </a:solidFill>
+            <a:prstDash val="solid"/>
+          </a:ln>
+        </p:spPr>
+      </p:sp>
+      <p:sp>
+        <p:nvSpPr>
+          <p:cNvPr id="7" name="Text 5"/>
+          <p:cNvSpPr txBox="1"/>
+          <p:nvPr/>
+        </p:nvSpPr>
+        <p:spPr>
+          <a:xfrm>
+            <a:off x="0" y="6419088"/>
+            <a:ext cx="12191695" cy="219456"/>
+          </a:xfrm>
+          <a:prstGeom prst="rect">
+            <a:avLst/>
+          </a:prstGeom>
+          <a:noFill/>
+          <a:ln/>
+        </p:spPr>
+        <p:txBody>
+          <a:bodyPr wrap="square" lIns="0" tIns="0" rIns="0" bIns="0" rtlCol="0" anchor="ctr"/>
+          <a:lstStyle/>
+          <a:p>
+            <a:pPr marL="0" indent="0" algn="ctr">
+              <a:buNone/>
+            </a:pPr>
+            <a:r>
+              <a:rPr lang="en-US" sz="900" dirty="0">
+                <a:solidFill>
+                  <a:srgbClr val="A0A0A0"/>
+                </a:solidFill>
+                <a:latin typeface="Arial" pitchFamily="34" charset="0"/>
+                <a:ea typeface="Arial" pitchFamily="34" charset="-122"/>
+                <a:cs typeface="Arial" pitchFamily="34" charset="-120"/>
+              </a:rPr>
+              <a:t>28</a:t>
+            </a:r>
+            <a:endParaRPr lang="en-US" sz="900" dirty="0"/>
+          </a:p>
+        </p:txBody>
+      </p:sp>
+      <p:sp>
+        <p:nvSpPr>
+          <p:cNvPr id="8" name="TextBox 7"/>
+          <p:cNvSpPr txBox="1"/>
+          <p:nvPr/>
+        </p:nvSpPr>
+        <p:spPr>
+          <a:xfrm>
+            <a:off x="2798064" y="1335024"/>
+            <a:ext cx="3749039" cy="219456"/>
+          </a:xfrm>
+          <a:prstGeom prst="rect">
+            <a:avLst/>
+          </a:prstGeom>
+          <a:noFill/>
+        </p:spPr>
+        <p:txBody>
+          <a:bodyPr wrap="square" lIns="0" rIns="0" tIns="0" bIns="0">
+            <a:spAutoFit/>
+          </a:bodyPr>
+          <a:lstStyle/>
+          <a:p>
+            <a:r>
+              <a:rPr sz="1000" b="1">
+                <a:solidFill>
+                  <a:srgbClr val="888888"/>
+                </a:solidFill>
+                <a:latin typeface="맑은 고딕"/>
+              </a:rPr>
+              <a:t>공식</a:t>
+            </a:r>
+          </a:p>
+        </p:txBody>
+      </p:sp>
+      <p:sp>
+        <p:nvSpPr>
+          <p:cNvPr id="9" name="TextBox 8"/>
+          <p:cNvSpPr txBox="1"/>
+          <p:nvPr/>
+        </p:nvSpPr>
+        <p:spPr>
+          <a:xfrm>
+            <a:off x="6693408" y="1335024"/>
+            <a:ext cx="4581144" cy="219456"/>
+          </a:xfrm>
+          <a:prstGeom prst="rect">
+            <a:avLst/>
+          </a:prstGeom>
+          <a:noFill/>
+        </p:spPr>
+        <p:txBody>
+          <a:bodyPr wrap="square" lIns="0" rIns="0" tIns="0" bIns="0">
+            <a:spAutoFit/>
+          </a:bodyPr>
+          <a:lstStyle/>
+          <a:p>
+            <a:r>
+              <a:rPr sz="1000" b="1">
+                <a:solidFill>
+                  <a:srgbClr val="888888"/>
+                </a:solidFill>
+                <a:latin typeface="맑은 고딕"/>
+              </a:rPr>
+              <a:t>C 구현</a:t>
+            </a:r>
+          </a:p>
+        </p:txBody>
+      </p:sp>
+      <p:sp>
+        <p:nvSpPr>
+          <p:cNvPr id="10" name="Rounded Rectangle 9"/>
+          <p:cNvSpPr/>
+          <p:nvPr/>
+        </p:nvSpPr>
+        <p:spPr>
+          <a:xfrm>
+            <a:off x="914400" y="1591056"/>
+            <a:ext cx="1737360" cy="1536192"/>
+          </a:xfrm>
+          <a:prstGeom prst="roundRect">
+            <a:avLst>
+              <a:gd name="adj" fmla="val 4000"/>
+            </a:avLst>
+          </a:prstGeom>
+          <a:solidFill>
+            <a:srgbClr val="3E4650"/>
+          </a:solidFill>
+          <a:ln>
+            <a:noFill/>
+          </a:ln>
+          <a:effectLst/>
+        </p:spPr>
+        <p:txBody>
+          <a:bodyPr rtlCol="0" anchor="ctr"/>
+          <a:lstStyle/>
+          <a:p>
+            <a:pPr algn="ctr"/>
+          </a:p>
+        </p:txBody>
+      </p:sp>
+      <p:sp>
+        <p:nvSpPr>
+          <p:cNvPr id="11" name="TextBox 10"/>
+          <p:cNvSpPr txBox="1"/>
+          <p:nvPr/>
+        </p:nvSpPr>
+        <p:spPr>
+          <a:xfrm>
+            <a:off x="1024128" y="2075688"/>
+            <a:ext cx="1517904" cy="566928"/>
+          </a:xfrm>
+          <a:prstGeom prst="rect">
+            <a:avLst/>
+          </a:prstGeom>
+          <a:noFill/>
+        </p:spPr>
+        <p:txBody>
+          <a:bodyPr wrap="square" lIns="0" rIns="0" tIns="0" bIns="0">
+            <a:spAutoFit/>
+          </a:bodyPr>
+          <a:lstStyle/>
+          <a:p>
+            <a:pPr algn="ctr"/>
+            <a:r>
+              <a:rPr sz="1500" b="1">
+                <a:solidFill>
+                  <a:srgbClr val="FFFFFF"/>
+                </a:solidFill>
+                <a:latin typeface="맑은 고딕"/>
+              </a:rPr>
+              <a:t>⑤</a:t>
+            </a:r>
+          </a:p>
+          <a:p>
+            <a:pPr algn="ctr">
+              <a:spcBef>
+                <a:spcPts val="300"/>
+              </a:spcBef>
+            </a:pPr>
+            <a:r>
+              <a:rPr sz="1100" b="1">
+                <a:solidFill>
+                  <a:srgbClr val="FFFFFF"/>
+                </a:solidFill>
+                <a:latin typeface="맑은 고딕"/>
+              </a:rPr>
+              <a:t>LLA → ECEF</a:t>
+            </a:r>
+          </a:p>
+          <a:p>
+            <a:pPr algn="ctr">
+              <a:spcBef>
+                <a:spcPts val="300"/>
+              </a:spcBef>
+            </a:pPr>
+            <a:r>
+              <a:rPr sz="750" b="0">
+                <a:solidFill>
+                  <a:srgbClr val="B4B4B4"/>
+                </a:solidFill>
+                <a:latin typeface="맑은 고딕"/>
+              </a:rPr>
+              <a:t>한 번에 나온다</a:t>
+            </a:r>
+          </a:p>
+        </p:txBody>
+      </p:sp>
+      <p:sp>
+        <p:nvSpPr>
+          <p:cNvPr id="12" name="Rounded Rectangle 11"/>
+          <p:cNvSpPr/>
+          <p:nvPr/>
+        </p:nvSpPr>
+        <p:spPr>
+          <a:xfrm>
+            <a:off x="2798064" y="1591056"/>
+            <a:ext cx="3749039" cy="1536192"/>
+          </a:xfrm>
+          <a:prstGeom prst="roundRect">
+            <a:avLst>
+              <a:gd name="adj" fmla="val 4000"/>
+            </a:avLst>
+          </a:prstGeom>
+          <a:solidFill>
+            <a:srgbClr val="DCDCDC"/>
+          </a:solidFill>
+          <a:ln>
+            <a:noFill/>
+          </a:ln>
+          <a:effectLst/>
+        </p:spPr>
+        <p:txBody>
+          <a:bodyPr rtlCol="0" anchor="ctr"/>
+          <a:lstStyle/>
+          <a:p>
+            <a:pPr algn="ctr"/>
+          </a:p>
+        </p:txBody>
+      </p:sp>
+      <p:pic>
+        <p:nvPicPr>
+          <p:cNvPr id="13" name="Picture 12" descr="lla2ecef.png"/>
+          <p:cNvPicPr>
+            <a:picLocks noChangeAspect="1"/>
+          </p:cNvPicPr>
+          <p:nvPr/>
+        </p:nvPicPr>
+        <p:blipFill>
+          <a:blip r:embed="rId2"/>
+          <a:stretch>
+            <a:fillRect/>
+          </a:stretch>
+        </p:blipFill>
+        <p:spPr>
+          <a:xfrm>
+            <a:off x="3556391" y="1700784"/>
+            <a:ext cx="2232385" cy="1316735"/>
+          </a:xfrm>
+          <a:prstGeom prst="rect">
+            <a:avLst/>
+          </a:prstGeom>
+        </p:spPr>
+      </p:pic>
+      <p:sp>
+        <p:nvSpPr>
+          <p:cNvPr id="14" name="Rounded Rectangle 13"/>
+          <p:cNvSpPr/>
+          <p:nvPr/>
+        </p:nvSpPr>
+        <p:spPr>
+          <a:xfrm>
+            <a:off x="6693408" y="1591056"/>
+            <a:ext cx="4581144" cy="1536192"/>
+          </a:xfrm>
+          <a:prstGeom prst="roundRect">
+            <a:avLst>
+              <a:gd name="adj" fmla="val 2000"/>
+            </a:avLst>
+          </a:prstGeom>
+          <a:solidFill>
+            <a:srgbClr val="FFFFFF"/>
+          </a:solidFill>
+          <a:ln>
+            <a:noFill/>
+          </a:ln>
+          <a:effectLst/>
+        </p:spPr>
+        <p:txBody>
+          <a:bodyPr rtlCol="0" anchor="ctr"/>
+          <a:lstStyle/>
+          <a:p>
+            <a:pPr algn="ctr"/>
+          </a:p>
+        </p:txBody>
+      </p:sp>
+      <p:sp>
+        <p:nvSpPr>
+          <p:cNvPr id="15" name="TextBox 14"/>
+          <p:cNvSpPr txBox="1"/>
+          <p:nvPr/>
+        </p:nvSpPr>
+        <p:spPr>
+          <a:xfrm>
+            <a:off x="6839712" y="1673352"/>
+            <a:ext cx="4288536" cy="1389888"/>
+          </a:xfrm>
+          <a:prstGeom prst="rect">
+            <a:avLst/>
+          </a:prstGeom>
+          <a:noFill/>
+        </p:spPr>
+        <p:txBody>
+          <a:bodyPr wrap="square" lIns="0" rIns="0" tIns="0" bIns="0">
+            <a:spAutoFit/>
+          </a:bodyPr>
+          <a:lstStyle/>
+          <a:p>
+            <a:pPr>
+              <a:spcBef>
+                <a:spcPts val="0"/>
+              </a:spcBef>
+            </a:pPr>
+            <a:r>
+              <a:rPr sz="850" b="0">
+                <a:solidFill>
+                  <a:srgbClr val="1A1A1A"/>
+                </a:solidFill>
+                <a:latin typeface="Consolas"/>
+              </a:rPr>
+              <a:t>dN = WGS84_A / sqrt(1.0 - WGS84_E2</a:t>
+            </a:r>
+          </a:p>
+          <a:p>
+            <a:pPr>
+              <a:spcBef>
+                <a:spcPts val="150"/>
+              </a:spcBef>
+            </a:pPr>
+            <a:r>
+              <a:rPr sz="850" b="0">
+                <a:solidFill>
+                  <a:srgbClr val="1A1A1A"/>
+                </a:solidFill>
+                <a:latin typeface="Consolas"/>
+              </a:rPr>
+              <a:t>                   * sin(dLat) * sin(dLat));</a:t>
+            </a:r>
+          </a:p>
+          <a:p>
+            <a:pPr>
+              <a:spcBef>
+                <a:spcPts val="150"/>
+              </a:spcBef>
+            </a:pPr>
+            <a:r>
+              <a:rPr sz="850" b="0">
+                <a:solidFill>
+                  <a:srgbClr val="1A1A1A"/>
+                </a:solidFill>
+                <a:latin typeface="Consolas"/>
+              </a:rPr>
+              <a:t>stEcef.dX = (dN + dAlt) * cos(dLat) * cos(dLon);</a:t>
+            </a:r>
+          </a:p>
+          <a:p>
+            <a:pPr>
+              <a:spcBef>
+                <a:spcPts val="150"/>
+              </a:spcBef>
+            </a:pPr>
+            <a:r>
+              <a:rPr sz="850" b="0">
+                <a:solidFill>
+                  <a:srgbClr val="1A1A1A"/>
+                </a:solidFill>
+                <a:latin typeface="Consolas"/>
+              </a:rPr>
+              <a:t>stEcef.dY = (dN + dAlt) * cos(dLat) * sin(dLon);</a:t>
+            </a:r>
+          </a:p>
+          <a:p>
+            <a:pPr>
+              <a:spcBef>
+                <a:spcPts val="150"/>
+              </a:spcBef>
+            </a:pPr>
+            <a:r>
+              <a:rPr sz="850" b="0">
+                <a:solidFill>
+                  <a:srgbClr val="1A1A1A"/>
+                </a:solidFill>
+                <a:latin typeface="Consolas"/>
+              </a:rPr>
+              <a:t>stEcef.dZ = (dN * (1.0 - WGS84_E2) + dAlt)</a:t>
+            </a:r>
+          </a:p>
+          <a:p>
+            <a:pPr>
+              <a:spcBef>
+                <a:spcPts val="150"/>
+              </a:spcBef>
+            </a:pPr>
+            <a:r>
+              <a:rPr sz="850" b="0">
+                <a:solidFill>
+                  <a:srgbClr val="1A1A1A"/>
+                </a:solidFill>
+                <a:latin typeface="Consolas"/>
+              </a:rPr>
+              <a:t>                        * sin(dLat);</a:t>
+            </a:r>
+          </a:p>
+          <a:p>
+            <a:pPr>
+              <a:spcBef>
+                <a:spcPts val="150"/>
+              </a:spcBef>
+            </a:pPr>
+            <a:r>
+              <a:rPr sz="850" b="0">
+                <a:solidFill>
+                  <a:srgbClr val="777777"/>
+                </a:solidFill>
+                <a:latin typeface="Consolas"/>
+              </a:rPr>
+              <a:t>        // z 에만 (1 - e²) — 극 쪽으로 눌린 만큼</a:t>
+            </a:r>
+          </a:p>
+        </p:txBody>
+      </p:sp>
+      <p:sp>
+        <p:nvSpPr>
+          <p:cNvPr id="16" name="Rounded Rectangle 15"/>
+          <p:cNvSpPr/>
+          <p:nvPr/>
+        </p:nvSpPr>
+        <p:spPr>
+          <a:xfrm>
+            <a:off x="914400" y="3273552"/>
+            <a:ext cx="1737360" cy="1938528"/>
+          </a:xfrm>
+          <a:prstGeom prst="roundRect">
+            <a:avLst>
+              <a:gd name="adj" fmla="val 4000"/>
+            </a:avLst>
+          </a:prstGeom>
+          <a:solidFill>
+            <a:srgbClr val="3E4650"/>
+          </a:solidFill>
+          <a:ln>
+            <a:noFill/>
+          </a:ln>
+          <a:effectLst/>
+        </p:spPr>
+        <p:txBody>
+          <a:bodyPr rtlCol="0" anchor="ctr"/>
+          <a:lstStyle/>
+          <a:p>
+            <a:pPr algn="ctr"/>
+          </a:p>
+        </p:txBody>
+      </p:sp>
+      <p:sp>
+        <p:nvSpPr>
+          <p:cNvPr id="17" name="TextBox 16"/>
+          <p:cNvSpPr txBox="1"/>
+          <p:nvPr/>
+        </p:nvSpPr>
+        <p:spPr>
+          <a:xfrm>
+            <a:off x="1024128" y="3959352"/>
+            <a:ext cx="1517904" cy="566928"/>
+          </a:xfrm>
+          <a:prstGeom prst="rect">
+            <a:avLst/>
+          </a:prstGeom>
+          <a:noFill/>
+        </p:spPr>
+        <p:txBody>
+          <a:bodyPr wrap="square" lIns="0" rIns="0" tIns="0" bIns="0">
+            <a:spAutoFit/>
+          </a:bodyPr>
+          <a:lstStyle/>
+          <a:p>
+            <a:pPr algn="ctr"/>
+            <a:r>
+              <a:rPr sz="1500" b="1">
+                <a:solidFill>
+                  <a:srgbClr val="FFFFFF"/>
+                </a:solidFill>
+                <a:latin typeface="맑은 고딕"/>
+              </a:rPr>
+              <a:t>⑥</a:t>
+            </a:r>
+          </a:p>
+          <a:p>
+            <a:pPr algn="ctr">
+              <a:spcBef>
+                <a:spcPts val="300"/>
+              </a:spcBef>
+            </a:pPr>
+            <a:r>
+              <a:rPr sz="1100" b="1">
+                <a:solidFill>
+                  <a:srgbClr val="FFFFFF"/>
+                </a:solidFill>
+                <a:latin typeface="맑은 고딕"/>
+              </a:rPr>
+              <a:t>ECEF → LLA</a:t>
+            </a:r>
+          </a:p>
+          <a:p>
+            <a:pPr algn="ctr">
+              <a:spcBef>
+                <a:spcPts val="300"/>
+              </a:spcBef>
+            </a:pPr>
+            <a:r>
+              <a:rPr sz="750" b="0">
+                <a:solidFill>
+                  <a:srgbClr val="B4B4B4"/>
+                </a:solidFill>
+                <a:latin typeface="맑은 고딕"/>
+              </a:rPr>
+              <a:t>위도·고도 반복</a:t>
+            </a:r>
+          </a:p>
+        </p:txBody>
+      </p:sp>
+      <p:sp>
+        <p:nvSpPr>
+          <p:cNvPr id="18" name="Rounded Rectangle 17"/>
+          <p:cNvSpPr/>
+          <p:nvPr/>
+        </p:nvSpPr>
+        <p:spPr>
+          <a:xfrm>
+            <a:off x="2798064" y="3273552"/>
+            <a:ext cx="3749039" cy="1938528"/>
+          </a:xfrm>
+          <a:prstGeom prst="roundRect">
+            <a:avLst>
+              <a:gd name="adj" fmla="val 4000"/>
+            </a:avLst>
+          </a:prstGeom>
+          <a:solidFill>
+            <a:srgbClr val="DCDCDC"/>
+          </a:solidFill>
+          <a:ln>
+            <a:noFill/>
+          </a:ln>
+          <a:effectLst/>
+        </p:spPr>
+        <p:txBody>
+          <a:bodyPr rtlCol="0" anchor="ctr"/>
+          <a:lstStyle/>
+          <a:p>
+            <a:pPr algn="ctr"/>
+          </a:p>
+        </p:txBody>
+      </p:sp>
+      <p:pic>
+        <p:nvPicPr>
+          <p:cNvPr id="19" name="Picture 18" descr="ecef2lla.png"/>
+          <p:cNvPicPr>
+            <a:picLocks noChangeAspect="1"/>
+          </p:cNvPicPr>
+          <p:nvPr/>
+        </p:nvPicPr>
+        <p:blipFill>
+          <a:blip r:embed="rId3"/>
+          <a:stretch>
+            <a:fillRect/>
+          </a:stretch>
+        </p:blipFill>
+        <p:spPr>
+          <a:xfrm>
+            <a:off x="2889504" y="3485720"/>
+            <a:ext cx="3547872" cy="1514190"/>
+          </a:xfrm>
+          <a:prstGeom prst="rect">
+            <a:avLst/>
+          </a:prstGeom>
+        </p:spPr>
+      </p:pic>
+      <p:sp>
+        <p:nvSpPr>
+          <p:cNvPr id="20" name="Rounded Rectangle 19"/>
+          <p:cNvSpPr/>
+          <p:nvPr/>
+        </p:nvSpPr>
+        <p:spPr>
+          <a:xfrm>
+            <a:off x="6693408" y="3273552"/>
+            <a:ext cx="4581144" cy="1938528"/>
+          </a:xfrm>
+          <a:prstGeom prst="roundRect">
+            <a:avLst>
+              <a:gd name="adj" fmla="val 2000"/>
+            </a:avLst>
+          </a:prstGeom>
+          <a:solidFill>
+            <a:srgbClr val="FFFFFF"/>
+          </a:solidFill>
+          <a:ln>
+            <a:noFill/>
+          </a:ln>
+          <a:effectLst/>
+        </p:spPr>
+        <p:txBody>
+          <a:bodyPr rtlCol="0" anchor="ctr"/>
+          <a:lstStyle/>
+          <a:p>
+            <a:pPr algn="ctr"/>
+          </a:p>
+        </p:txBody>
+      </p:sp>
+      <p:sp>
+        <p:nvSpPr>
+          <p:cNvPr id="21" name="TextBox 20"/>
+          <p:cNvSpPr txBox="1"/>
+          <p:nvPr/>
+        </p:nvSpPr>
+        <p:spPr>
+          <a:xfrm>
+            <a:off x="6839712" y="3355848"/>
+            <a:ext cx="4288536" cy="1792224"/>
+          </a:xfrm>
+          <a:prstGeom prst="rect">
+            <a:avLst/>
+          </a:prstGeom>
+          <a:noFill/>
+        </p:spPr>
+        <p:txBody>
+          <a:bodyPr wrap="square" lIns="0" rIns="0" tIns="0" bIns="0">
+            <a:spAutoFit/>
+          </a:bodyPr>
+          <a:lstStyle/>
+          <a:p>
+            <a:pPr>
+              <a:spcBef>
+                <a:spcPts val="0"/>
+              </a:spcBef>
+            </a:pPr>
+            <a:r>
+              <a:rPr sz="850" b="0">
+                <a:solidFill>
+                  <a:srgbClr val="1A1A1A"/>
+                </a:solidFill>
+                <a:latin typeface="Consolas"/>
+              </a:rPr>
+              <a:t>stLla.dLon = atan2(stEcef.dY, stEcef.dX);</a:t>
+            </a:r>
+          </a:p>
+          <a:p>
+            <a:pPr>
+              <a:spcBef>
+                <a:spcPts val="120"/>
+              </a:spcBef>
+            </a:pPr>
+            <a:r>
+              <a:rPr sz="850" b="0">
+                <a:solidFill>
+                  <a:srgbClr val="1A1A1A"/>
+                </a:solidFill>
+                <a:latin typeface="Consolas"/>
+              </a:rPr>
+              <a:t>dLat0 = atan2(stEcef.dZ, dP);   dAlt0 = 0.0;</a:t>
+            </a:r>
+          </a:p>
+          <a:p>
+            <a:pPr>
+              <a:spcBef>
+                <a:spcPts val="120"/>
+              </a:spcBef>
+            </a:pPr>
+            <a:r>
+              <a:rPr sz="850" b="0">
+                <a:solidFill>
+                  <a:srgbClr val="1A1A1A"/>
+                </a:solidFill>
+                <a:latin typeface="Consolas"/>
+              </a:rPr>
+              <a:t>for (i = 0; i &lt; LLA_ITER_MAX; i++) {</a:t>
+            </a:r>
+          </a:p>
+          <a:p>
+            <a:pPr>
+              <a:spcBef>
+                <a:spcPts val="120"/>
+              </a:spcBef>
+            </a:pPr>
+            <a:r>
+              <a:rPr sz="850" b="0">
+                <a:solidFill>
+                  <a:srgbClr val="1A1A1A"/>
+                </a:solidFill>
+                <a:latin typeface="Consolas"/>
+              </a:rPr>
+              <a:t>  dN   = WGS84_A / sqrt(1.0 - WGS84_E2</a:t>
+            </a:r>
+          </a:p>
+          <a:p>
+            <a:pPr>
+              <a:spcBef>
+                <a:spcPts val="120"/>
+              </a:spcBef>
+            </a:pPr>
+            <a:r>
+              <a:rPr sz="850" b="0">
+                <a:solidFill>
+                  <a:srgbClr val="1A1A1A"/>
+                </a:solidFill>
+                <a:latin typeface="Consolas"/>
+              </a:rPr>
+              <a:t>                     * sin(dLat0)*sin(dLat0));</a:t>
+            </a:r>
+          </a:p>
+          <a:p>
+            <a:pPr>
+              <a:spcBef>
+                <a:spcPts val="120"/>
+              </a:spcBef>
+            </a:pPr>
+            <a:r>
+              <a:rPr sz="850" b="0">
+                <a:solidFill>
+                  <a:srgbClr val="1A1A1A"/>
+                </a:solidFill>
+                <a:latin typeface="Consolas"/>
+              </a:rPr>
+              <a:t>  dAlt = dP / cos(dLat0) - dN;</a:t>
+            </a:r>
+          </a:p>
+          <a:p>
+            <a:pPr>
+              <a:spcBef>
+                <a:spcPts val="120"/>
+              </a:spcBef>
+            </a:pPr>
+            <a:r>
+              <a:rPr sz="850" b="0">
+                <a:solidFill>
+                  <a:srgbClr val="1A1A1A"/>
+                </a:solidFill>
+                <a:latin typeface="Consolas"/>
+              </a:rPr>
+              <a:t>  dLat = atan2(dZ * (dN + dAlt),</a:t>
+            </a:r>
+          </a:p>
+          <a:p>
+            <a:pPr>
+              <a:spcBef>
+                <a:spcPts val="120"/>
+              </a:spcBef>
+            </a:pPr>
+            <a:r>
+              <a:rPr sz="850" b="0">
+                <a:solidFill>
+                  <a:srgbClr val="1A1A1A"/>
+                </a:solidFill>
+                <a:latin typeface="Consolas"/>
+              </a:rPr>
+              <a:t>           dP * (dN * (1.0 - WGS84_E2) + dAlt));</a:t>
+            </a:r>
+          </a:p>
+          <a:p>
+            <a:pPr>
+              <a:spcBef>
+                <a:spcPts val="120"/>
+              </a:spcBef>
+            </a:pPr>
+            <a:r>
+              <a:rPr sz="850" b="0">
+                <a:solidFill>
+                  <a:srgbClr val="1A1A1A"/>
+                </a:solidFill>
+                <a:latin typeface="Consolas"/>
+              </a:rPr>
+              <a:t>  if (fabs(dLat - dLat0) &lt; LLA_TOL_LAT &amp;&amp;</a:t>
+            </a:r>
+          </a:p>
+          <a:p>
+            <a:pPr>
+              <a:spcBef>
+                <a:spcPts val="120"/>
+              </a:spcBef>
+            </a:pPr>
+            <a:r>
+              <a:rPr sz="850" b="0">
+                <a:solidFill>
+                  <a:srgbClr val="1A1A1A"/>
+                </a:solidFill>
+                <a:latin typeface="Consolas"/>
+              </a:rPr>
+              <a:t>      fabs(dAlt - dAlt0) &lt; LLA_TOL_ALT)  break;</a:t>
+            </a:r>
+          </a:p>
+          <a:p>
+            <a:pPr>
+              <a:spcBef>
+                <a:spcPts val="120"/>
+              </a:spcBef>
+            </a:pPr>
+            <a:r>
+              <a:rPr sz="850" b="0">
+                <a:solidFill>
+                  <a:srgbClr val="1A1A1A"/>
+                </a:solidFill>
+                <a:latin typeface="Consolas"/>
+              </a:rPr>
+              <a:t>  dLat0 = dLat;   dAlt0 = dAlt;   }</a:t>
+            </a:r>
+          </a:p>
+        </p:txBody>
+      </p:sp>
+      <p:sp>
+        <p:nvSpPr>
+          <p:cNvPr id="22" name="Rounded Rectangle 21"/>
+          <p:cNvSpPr/>
+          <p:nvPr/>
+        </p:nvSpPr>
+        <p:spPr>
+          <a:xfrm>
+            <a:off x="914400" y="5358384"/>
+            <a:ext cx="10360152" cy="493776"/>
+          </a:xfrm>
+          <a:prstGeom prst="roundRect">
+            <a:avLst>
+              <a:gd name="adj" fmla="val 4000"/>
+            </a:avLst>
+          </a:prstGeom>
+          <a:solidFill>
+            <a:srgbClr val="8E8E8E"/>
+          </a:solidFill>
+          <a:ln>
+            <a:noFill/>
+          </a:ln>
+          <a:effectLst/>
+        </p:spPr>
+        <p:txBody>
+          <a:bodyPr rtlCol="0" anchor="ctr"/>
+          <a:lstStyle/>
+          <a:p>
+            <a:pPr algn="ctr"/>
+          </a:p>
+        </p:txBody>
+      </p:sp>
+      <p:sp>
+        <p:nvSpPr>
+          <p:cNvPr id="23" name="TextBox 22"/>
+          <p:cNvSpPr txBox="1"/>
+          <p:nvPr/>
+        </p:nvSpPr>
+        <p:spPr>
+          <a:xfrm>
+            <a:off x="1133856" y="5431536"/>
+            <a:ext cx="9921240" cy="384048"/>
+          </a:xfrm>
+          <a:prstGeom prst="rect">
+            <a:avLst/>
+          </a:prstGeom>
+          <a:noFill/>
+        </p:spPr>
+        <p:txBody>
+          <a:bodyPr wrap="square" lIns="0" rIns="0" tIns="0" bIns="0">
+            <a:spAutoFit/>
+          </a:bodyPr>
+          <a:lstStyle/>
+          <a:p>
+            <a:r>
+              <a:rPr sz="900" b="1">
+                <a:solidFill>
+                  <a:srgbClr val="FFFFFF"/>
+                </a:solidFill>
+                <a:latin typeface="맑은 고딕"/>
+              </a:rPr>
+              <a:t>반복 경과   위도 [deg]</a:t>
+            </a:r>
+          </a:p>
+          <a:p>
+            <a:pPr>
+              <a:spcBef>
+                <a:spcPts val="300"/>
+              </a:spcBef>
+            </a:pPr>
+            <a:r>
+              <a:rPr sz="850" b="0">
+                <a:solidFill>
+                  <a:srgbClr val="F0F0F0"/>
+                </a:solidFill>
+                <a:latin typeface="Consolas"/>
+              </a:rPr>
+              <a:t>초기 36.177411  →  ① 36.361399  →  ② 36.360966  →  ③ 36.3609672  →  ④⑤ 36.360967176  →  ⑥ 변화 2e−16, break        ( 고도 41.2824 m · 최대 10 회 · 허용오차 1e−12 rad )</a:t>
+            </a:r>
+          </a:p>
+        </p:txBody>
+      </p:sp>
+    </p:spTree>
+  </p:cSld>
+  <p:clrMapOvr>
+    <a:masterClrMapping/>
+  </p:clrMapOvr>
+</p:sld>
+</file>
+
+<file path=ppt/slides/slide29.xml><?xml version="1.0" encoding="utf-8"?>
+<p:sld xmlns:a="http://schemas.openxmlformats.org/drawingml/2006/main" xmlns:p="http://schemas.openxmlformats.org/presentationml/2006/main" xmlns:r="http://schemas.openxmlformats.org/officeDocument/2006/relationships">
+  <p:cSld>
+    <p:spTree>
+      <p:nvGrpSpPr>
+        <p:cNvPr id="1" name=""/>
+        <p:cNvGrpSpPr/>
+        <p:nvPr/>
+      </p:nvGrpSpPr>
+      <p:grpSpPr/>
+      <p:sp>
+        <p:nvSpPr>
+          <p:cNvPr id="2" name="Shape 0"/>
+          <p:cNvSpPr/>
+          <p:nvPr/>
+        </p:nvSpPr>
+        <p:spPr>
+          <a:xfrm>
+            <a:off x="548640" y="384048"/>
+            <a:ext cx="11094415" cy="566928"/>
+          </a:xfrm>
+          <a:prstGeom prst="rect">
+            <a:avLst/>
+          </a:prstGeom>
+          <a:solidFill>
+            <a:srgbClr val="3E4650"/>
+          </a:solidFill>
+          <a:ln/>
+        </p:spPr>
+      </p:sp>
+      <p:sp>
+        <p:nvSpPr>
+          <p:cNvPr id="3" name="Text 1"/>
+          <p:cNvSpPr txBox="1"/>
+          <p:nvPr/>
+        </p:nvSpPr>
+        <p:spPr>
+          <a:xfrm>
+            <a:off x="749808" y="384048"/>
+            <a:ext cx="10692079" cy="566928"/>
+          </a:xfrm>
+          <a:prstGeom prst="rect">
+            <a:avLst/>
+          </a:prstGeom>
+          <a:noFill/>
+          <a:ln/>
+        </p:spPr>
+        <p:txBody>
+          <a:bodyPr wrap="square" lIns="0" tIns="0" rIns="0" bIns="0" rtlCol="0" anchor="ctr"/>
+          <a:lstStyle/>
+          <a:p>
+            <a:pPr marL="0" indent="0">
+              <a:buNone/>
+            </a:pPr>
+            <a:r>
+              <a:rPr lang="en-US" sz="2000" b="1" dirty="0">
+                <a:solidFill>
+                  <a:srgbClr val="FFFFFF"/>
+                </a:solidFill>
+                <a:latin typeface="맑은 고딕" pitchFamily="34" charset="0"/>
+                <a:ea typeface="맑은 고딕" pitchFamily="34" charset="-122"/>
+                <a:cs typeface="맑은 고딕" pitchFamily="34" charset="-120"/>
+              </a:rPr>
+              <a:t>03. 공식과 코드 ④    역변환</a:t>
+            </a:r>
+            <a:endParaRPr lang="en-US" sz="2000" dirty="0"/>
+          </a:p>
+        </p:txBody>
+      </p:sp>
+      <p:sp>
+        <p:nvSpPr>
+          <p:cNvPr id="4" name="Shape 2"/>
+          <p:cNvSpPr/>
+          <p:nvPr/>
+        </p:nvSpPr>
+        <p:spPr>
+          <a:xfrm>
+            <a:off x="548640" y="1097280"/>
+            <a:ext cx="11094415" cy="4864608"/>
+          </a:xfrm>
+          <a:prstGeom prst="rect">
+            <a:avLst/>
+          </a:prstGeom>
+          <a:solidFill>
+            <a:srgbClr val="F4F4F4"/>
+          </a:solidFill>
+          <a:ln/>
+        </p:spPr>
+      </p:sp>
+      <p:sp>
+        <p:nvSpPr>
+          <p:cNvPr id="5" name="Shape 3"/>
+          <p:cNvSpPr/>
+          <p:nvPr/>
+        </p:nvSpPr>
+        <p:spPr>
+          <a:xfrm>
+            <a:off x="548640" y="6199632"/>
+            <a:ext cx="11094415" cy="0"/>
+          </a:xfrm>
+          <a:prstGeom prst="line">
+            <a:avLst/>
+          </a:prstGeom>
+          <a:noFill/>
+          <a:ln w="9525">
+            <a:solidFill>
+              <a:srgbClr val="BFBFBF"/>
+            </a:solidFill>
+            <a:prstDash val="solid"/>
+          </a:ln>
+        </p:spPr>
+      </p:sp>
+      <p:sp>
+        <p:nvSpPr>
+          <p:cNvPr id="7" name="Text 5"/>
+          <p:cNvSpPr txBox="1"/>
+          <p:nvPr/>
+        </p:nvSpPr>
+        <p:spPr>
+          <a:xfrm>
+            <a:off x="0" y="6419088"/>
+            <a:ext cx="12191695" cy="219456"/>
+          </a:xfrm>
+          <a:prstGeom prst="rect">
+            <a:avLst/>
+          </a:prstGeom>
+          <a:noFill/>
+          <a:ln/>
+        </p:spPr>
+        <p:txBody>
+          <a:bodyPr wrap="square" lIns="0" tIns="0" rIns="0" bIns="0" rtlCol="0" anchor="ctr"/>
+          <a:lstStyle/>
+          <a:p>
+            <a:pPr marL="0" indent="0" algn="ctr">
+              <a:buNone/>
+            </a:pPr>
+            <a:r>
+              <a:rPr lang="en-US" sz="900" dirty="0">
+                <a:solidFill>
+                  <a:srgbClr val="A0A0A0"/>
+                </a:solidFill>
+                <a:latin typeface="Arial" pitchFamily="34" charset="0"/>
+                <a:ea typeface="Arial" pitchFamily="34" charset="-122"/>
+                <a:cs typeface="Arial" pitchFamily="34" charset="-120"/>
+              </a:rPr>
+              <a:t>29</a:t>
+            </a:r>
+            <a:endParaRPr lang="en-US" sz="900" dirty="0"/>
+          </a:p>
+        </p:txBody>
+      </p:sp>
+      <p:sp>
+        <p:nvSpPr>
+          <p:cNvPr id="8" name="Shape 6"/>
+          <p:cNvSpPr/>
+          <p:nvPr/>
+        </p:nvSpPr>
+        <p:spPr>
+          <a:xfrm>
+            <a:off x="786384" y="1335024"/>
+            <a:ext cx="50292" cy="274320"/>
+          </a:xfrm>
+          <a:prstGeom prst="rect">
+            <a:avLst/>
+          </a:prstGeom>
+          <a:solidFill>
+            <a:srgbClr val="3E4650"/>
+          </a:solidFill>
+          <a:ln/>
+        </p:spPr>
+      </p:sp>
+      <p:sp>
+        <p:nvSpPr>
+          <p:cNvPr id="9" name="Text 7"/>
+          <p:cNvSpPr txBox="1"/>
+          <p:nvPr/>
+        </p:nvSpPr>
+        <p:spPr>
+          <a:xfrm>
+            <a:off x="932688" y="1298448"/>
+            <a:ext cx="10271455" cy="347472"/>
+          </a:xfrm>
+          <a:prstGeom prst="rect">
+            <a:avLst/>
+          </a:prstGeom>
+          <a:noFill/>
+          <a:ln/>
+        </p:spPr>
+        <p:txBody>
+          <a:bodyPr wrap="square" lIns="0" tIns="0" rIns="0" bIns="0" rtlCol="0" anchor="ctr"/>
+          <a:lstStyle/>
+          <a:p>
+            <a:pPr marL="0" indent="0">
+              <a:buNone/>
+            </a:pPr>
+            <a:r>
+              <a:rPr lang="en-US" sz="1450" b="1" dirty="0">
+                <a:solidFill>
+                  <a:srgbClr val="1A1A1A"/>
+                </a:solidFill>
+                <a:latin typeface="맑은 고딕" pitchFamily="34" charset="0"/>
+                <a:ea typeface="맑은 고딕" pitchFamily="34" charset="-122"/>
+                <a:cs typeface="맑은 고딕" pitchFamily="34" charset="-120"/>
+              </a:rPr>
+              <a:t>새로 만드는 공식이 없다. 회전은 전치, 이동은 빼기, 그리고 순서를 거꾸로.</a:t>
+            </a:r>
+            <a:endParaRPr lang="en-US" sz="1450" dirty="0"/>
+          </a:p>
+        </p:txBody>
+      </p:sp>
+      <p:sp>
+        <p:nvSpPr>
+          <p:cNvPr id="10" name="Rounded Rectangle 9"/>
+          <p:cNvSpPr/>
+          <p:nvPr/>
+        </p:nvSpPr>
+        <p:spPr>
+          <a:xfrm>
+            <a:off x="914400" y="1773936"/>
+            <a:ext cx="4160520" cy="932688"/>
+          </a:xfrm>
+          <a:prstGeom prst="roundRect">
+            <a:avLst>
+              <a:gd name="adj" fmla="val 4000"/>
+            </a:avLst>
+          </a:prstGeom>
+          <a:solidFill>
+            <a:srgbClr val="DCDCDC"/>
+          </a:solidFill>
+          <a:ln>
+            <a:noFill/>
+          </a:ln>
+          <a:effectLst/>
+        </p:spPr>
+        <p:txBody>
+          <a:bodyPr rtlCol="0" anchor="ctr"/>
+          <a:lstStyle/>
+          <a:p>
+            <a:pPr algn="ctr"/>
+          </a:p>
+        </p:txBody>
+      </p:sp>
+      <p:pic>
+        <p:nvPicPr>
+          <p:cNvPr id="11" name="Picture 10" descr="inverse.png"/>
+          <p:cNvPicPr>
+            <a:picLocks noChangeAspect="1"/>
+          </p:cNvPicPr>
+          <p:nvPr/>
+        </p:nvPicPr>
+        <p:blipFill>
+          <a:blip r:embed="rId2"/>
+          <a:stretch>
+            <a:fillRect/>
+          </a:stretch>
+        </p:blipFill>
+        <p:spPr>
+          <a:xfrm>
+            <a:off x="1500110" y="1865376"/>
+            <a:ext cx="2989099" cy="749808"/>
+          </a:xfrm>
+          <a:prstGeom prst="rect">
+            <a:avLst/>
+          </a:prstGeom>
+        </p:spPr>
+      </p:pic>
+      <p:sp>
+        <p:nvSpPr>
+          <p:cNvPr id="12" name="Rounded Rectangle 11"/>
+          <p:cNvSpPr/>
+          <p:nvPr/>
+        </p:nvSpPr>
+        <p:spPr>
+          <a:xfrm>
+            <a:off x="5285232" y="1773936"/>
+            <a:ext cx="5989320" cy="932688"/>
+          </a:xfrm>
+          <a:prstGeom prst="roundRect">
+            <a:avLst>
+              <a:gd name="adj" fmla="val 4000"/>
+            </a:avLst>
+          </a:prstGeom>
+          <a:solidFill>
+            <a:srgbClr val="DCDCDC"/>
+          </a:solidFill>
+          <a:ln>
+            <a:noFill/>
+          </a:ln>
+          <a:effectLst/>
+        </p:spPr>
+        <p:txBody>
+          <a:bodyPr rtlCol="0" anchor="ctr"/>
+          <a:lstStyle/>
+          <a:p>
+            <a:pPr algn="ctr"/>
+          </a:p>
+        </p:txBody>
+      </p:sp>
+      <p:sp>
+        <p:nvSpPr>
+          <p:cNvPr id="13" name="TextBox 12"/>
+          <p:cNvSpPr txBox="1"/>
+          <p:nvPr/>
+        </p:nvSpPr>
+        <p:spPr>
+          <a:xfrm>
+            <a:off x="5468112" y="1874519"/>
+            <a:ext cx="5623559" cy="768096"/>
+          </a:xfrm>
+          <a:prstGeom prst="rect">
+            <a:avLst/>
+          </a:prstGeom>
+          <a:noFill/>
+        </p:spPr>
+        <p:txBody>
+          <a:bodyPr wrap="square" lIns="0" rIns="0" tIns="0" bIns="0">
+            <a:spAutoFit/>
+          </a:bodyPr>
+          <a:lstStyle/>
+          <a:p>
+            <a:r>
+              <a:rPr sz="1150" b="1">
+                <a:solidFill>
+                  <a:srgbClr val="1A1A1A"/>
+                </a:solidFill>
+                <a:latin typeface="맑은 고딕"/>
+              </a:rPr>
+              <a:t>순서까지 뒤집어야 한다</a:t>
+            </a:r>
+          </a:p>
+          <a:p>
+            <a:pPr>
+              <a:spcBef>
+                <a:spcPts val="400"/>
+              </a:spcBef>
+            </a:pPr>
+            <a:r>
+              <a:rPr sz="900" b="0">
+                <a:solidFill>
+                  <a:srgbClr val="555555"/>
+                </a:solidFill>
+                <a:latin typeface="맑은 고딕"/>
+              </a:rPr>
+              <a:t>레버암은 동체 좌표계에서 잰 값이다. 그래서 동체 좌표에서 먼저 빼고, 그다음에 안테나 축으로 되돌린다.</a:t>
+            </a:r>
+          </a:p>
+          <a:p>
+            <a:pPr>
+              <a:spcBef>
+                <a:spcPts val="200"/>
+              </a:spcBef>
+            </a:pPr>
+            <a:r>
+              <a:rPr sz="900" b="0">
+                <a:solidFill>
+                  <a:srgbClr val="555555"/>
+                </a:solidFill>
+                <a:latin typeface="맑은 고딕"/>
+              </a:rPr>
+              <a:t>두 줄을 바꾸면 레버암이 엉뚱한 좌표계에서 빠져 결과가 틀어진다.</a:t>
+            </a:r>
+          </a:p>
+        </p:txBody>
+      </p:sp>
+      <p:sp>
+        <p:nvSpPr>
+          <p:cNvPr id="14" name="TextBox 13"/>
+          <p:cNvSpPr txBox="1"/>
+          <p:nvPr/>
+        </p:nvSpPr>
+        <p:spPr>
+          <a:xfrm>
+            <a:off x="914400" y="2871216"/>
+            <a:ext cx="5074920" cy="219456"/>
+          </a:xfrm>
+          <a:prstGeom prst="rect">
+            <a:avLst/>
+          </a:prstGeom>
+          <a:noFill/>
+        </p:spPr>
+        <p:txBody>
+          <a:bodyPr wrap="square" lIns="0" rIns="0" tIns="0" bIns="0">
+            <a:spAutoFit/>
+          </a:bodyPr>
+          <a:lstStyle/>
+          <a:p>
+            <a:r>
+              <a:rPr sz="1050" b="1">
+                <a:solidFill>
+                  <a:srgbClr val="1A1A1A"/>
+                </a:solidFill>
+                <a:latin typeface="맑은 고딕"/>
+              </a:rPr>
+              <a:t>정변환   f_AntToBody</a:t>
+            </a:r>
+          </a:p>
+        </p:txBody>
+      </p:sp>
+      <p:sp>
+        <p:nvSpPr>
+          <p:cNvPr id="15" name="TextBox 14"/>
+          <p:cNvSpPr txBox="1"/>
+          <p:nvPr/>
+        </p:nvSpPr>
+        <p:spPr>
+          <a:xfrm>
+            <a:off x="6199632" y="2871216"/>
+            <a:ext cx="5074920" cy="219456"/>
+          </a:xfrm>
+          <a:prstGeom prst="rect">
+            <a:avLst/>
+          </a:prstGeom>
+          <a:noFill/>
+        </p:spPr>
+        <p:txBody>
+          <a:bodyPr wrap="square" lIns="0" rIns="0" tIns="0" bIns="0">
+            <a:spAutoFit/>
+          </a:bodyPr>
+          <a:lstStyle/>
+          <a:p>
+            <a:r>
+              <a:rPr sz="1050" b="1">
+                <a:solidFill>
+                  <a:srgbClr val="1A1A1A"/>
+                </a:solidFill>
+                <a:latin typeface="맑은 고딕"/>
+              </a:rPr>
+              <a:t>역변환   f_BodyToAnt</a:t>
+            </a:r>
+          </a:p>
+        </p:txBody>
+      </p:sp>
+      <p:sp>
+        <p:nvSpPr>
+          <p:cNvPr id="16" name="Rounded Rectangle 15"/>
+          <p:cNvSpPr/>
+          <p:nvPr/>
+        </p:nvSpPr>
+        <p:spPr>
+          <a:xfrm>
+            <a:off x="914400" y="3127248"/>
+            <a:ext cx="5074920" cy="1097280"/>
+          </a:xfrm>
+          <a:prstGeom prst="roundRect">
+            <a:avLst>
+              <a:gd name="adj" fmla="val 2000"/>
+            </a:avLst>
+          </a:prstGeom>
+          <a:solidFill>
+            <a:srgbClr val="FFFFFF"/>
+          </a:solidFill>
+          <a:ln>
+            <a:noFill/>
+          </a:ln>
+          <a:effectLst/>
+        </p:spPr>
+        <p:txBody>
+          <a:bodyPr rtlCol="0" anchor="ctr"/>
+          <a:lstStyle/>
+          <a:p>
+            <a:pPr algn="ctr"/>
+          </a:p>
+        </p:txBody>
+      </p:sp>
+      <p:sp>
+        <p:nvSpPr>
+          <p:cNvPr id="17" name="TextBox 16"/>
+          <p:cNvSpPr txBox="1"/>
+          <p:nvPr/>
+        </p:nvSpPr>
+        <p:spPr>
+          <a:xfrm>
+            <a:off x="1060704" y="3209544"/>
+            <a:ext cx="4782312" cy="950976"/>
+          </a:xfrm>
+          <a:prstGeom prst="rect">
+            <a:avLst/>
+          </a:prstGeom>
+          <a:noFill/>
+        </p:spPr>
+        <p:txBody>
+          <a:bodyPr wrap="square" lIns="0" rIns="0" tIns="0" bIns="0">
+            <a:spAutoFit/>
+          </a:bodyPr>
+          <a:lstStyle/>
+          <a:p>
+            <a:pPr>
+              <a:spcBef>
+                <a:spcPts val="0"/>
+              </a:spcBef>
+            </a:pPr>
+            <a:r>
+              <a:rPr sz="850" b="0">
+                <a:solidFill>
+                  <a:srgbClr val="1A1A1A"/>
+                </a:solidFill>
+                <a:latin typeface="Consolas"/>
+              </a:rPr>
+              <a:t>stR   = f_RotAntToBody(stMount);</a:t>
+            </a:r>
+          </a:p>
+          <a:p>
+            <a:pPr>
+              <a:spcBef>
+                <a:spcPts val="220"/>
+              </a:spcBef>
+            </a:pPr>
+            <a:r>
+              <a:rPr sz="850" b="0">
+                <a:solidFill>
+                  <a:srgbClr val="1A1A1A"/>
+                </a:solidFill>
+                <a:latin typeface="Consolas"/>
+              </a:rPr>
+              <a:t>stRot = Matrix_Product2(&amp;stR, &amp;stP);      // ① 회전</a:t>
+            </a:r>
+          </a:p>
+          <a:p>
+            <a:pPr>
+              <a:spcBef>
+                <a:spcPts val="220"/>
+              </a:spcBef>
+            </a:pPr>
+            <a:r>
+              <a:rPr sz="850" b="0">
+                <a:solidFill>
+                  <a:srgbClr val="1A1A1A"/>
+                </a:solidFill>
+                <a:latin typeface="Consolas"/>
+              </a:rPr>
+              <a:t>stOut = Matrix_Add(&amp;stRot, &amp;stOff);       // ② 더하기</a:t>
+            </a:r>
+          </a:p>
+        </p:txBody>
+      </p:sp>
+      <p:sp>
+        <p:nvSpPr>
+          <p:cNvPr id="18" name="Rounded Rectangle 17"/>
+          <p:cNvSpPr/>
+          <p:nvPr/>
+        </p:nvSpPr>
+        <p:spPr>
+          <a:xfrm>
+            <a:off x="6199632" y="3127248"/>
+            <a:ext cx="5074920" cy="1097280"/>
+          </a:xfrm>
+          <a:prstGeom prst="roundRect">
+            <a:avLst>
+              <a:gd name="adj" fmla="val 2000"/>
+            </a:avLst>
+          </a:prstGeom>
+          <a:solidFill>
+            <a:srgbClr val="FFFFFF"/>
+          </a:solidFill>
+          <a:ln>
+            <a:noFill/>
+          </a:ln>
+          <a:effectLst/>
+        </p:spPr>
+        <p:txBody>
+          <a:bodyPr rtlCol="0" anchor="ctr"/>
+          <a:lstStyle/>
+          <a:p>
+            <a:pPr algn="ctr"/>
+          </a:p>
+        </p:txBody>
+      </p:sp>
+      <p:sp>
+        <p:nvSpPr>
+          <p:cNvPr id="19" name="TextBox 18"/>
+          <p:cNvSpPr txBox="1"/>
+          <p:nvPr/>
+        </p:nvSpPr>
+        <p:spPr>
+          <a:xfrm>
+            <a:off x="6345936" y="3209544"/>
+            <a:ext cx="4782312" cy="950976"/>
+          </a:xfrm>
+          <a:prstGeom prst="rect">
+            <a:avLst/>
+          </a:prstGeom>
+          <a:noFill/>
+        </p:spPr>
+        <p:txBody>
+          <a:bodyPr wrap="square" lIns="0" rIns="0" tIns="0" bIns="0">
+            <a:spAutoFit/>
+          </a:bodyPr>
+          <a:lstStyle/>
+          <a:p>
+            <a:pPr>
+              <a:spcBef>
+                <a:spcPts val="0"/>
+              </a:spcBef>
+            </a:pPr>
+            <a:r>
+              <a:rPr sz="850" b="0">
+                <a:solidFill>
+                  <a:srgbClr val="1A1A1A"/>
+                </a:solidFill>
+                <a:latin typeface="Consolas"/>
+              </a:rPr>
+              <a:t>stRt   = Matrix_Transpose(&amp;stR);          // 전치</a:t>
+            </a:r>
+          </a:p>
+          <a:p>
+            <a:pPr>
+              <a:spcBef>
+                <a:spcPts val="220"/>
+              </a:spcBef>
+            </a:pPr>
+            <a:r>
+              <a:rPr sz="850" b="0">
+                <a:solidFill>
+                  <a:srgbClr val="1A1A1A"/>
+                </a:solidFill>
+                <a:latin typeface="Consolas"/>
+              </a:rPr>
+              <a:t>stDiff = Matrix_Subtract(&amp;stP, &amp;stOff);   // ① 빼기</a:t>
+            </a:r>
+          </a:p>
+          <a:p>
+            <a:pPr>
+              <a:spcBef>
+                <a:spcPts val="220"/>
+              </a:spcBef>
+            </a:pPr>
+            <a:r>
+              <a:rPr sz="850" b="0">
+                <a:solidFill>
+                  <a:srgbClr val="1A1A1A"/>
+                </a:solidFill>
+                <a:latin typeface="Consolas"/>
+              </a:rPr>
+              <a:t>stOut  = Matrix_Product2(&amp;stRt, &amp;stDiff); // ② 회전</a:t>
+            </a:r>
+          </a:p>
+        </p:txBody>
+      </p:sp>
+      <p:sp>
+        <p:nvSpPr>
+          <p:cNvPr id="20" name="TextBox 19"/>
+          <p:cNvSpPr txBox="1"/>
+          <p:nvPr/>
+        </p:nvSpPr>
+        <p:spPr>
+          <a:xfrm>
+            <a:off x="914400" y="4370832"/>
+            <a:ext cx="4160520" cy="219456"/>
+          </a:xfrm>
+          <a:prstGeom prst="rect">
+            <a:avLst/>
+          </a:prstGeom>
+          <a:noFill/>
+        </p:spPr>
+        <p:txBody>
+          <a:bodyPr wrap="square" lIns="0" rIns="0" tIns="0" bIns="0">
+            <a:spAutoFit/>
+          </a:bodyPr>
+          <a:lstStyle/>
+          <a:p>
+            <a:r>
+              <a:rPr sz="1050" b="1">
+                <a:solidFill>
+                  <a:srgbClr val="1A1A1A"/>
+                </a:solidFill>
+                <a:latin typeface="맑은 고딕"/>
+              </a:rPr>
+              <a:t>직교 → 극좌표   f_XyzToPolar</a:t>
+            </a:r>
+          </a:p>
+        </p:txBody>
+      </p:sp>
+      <p:sp>
+        <p:nvSpPr>
+          <p:cNvPr id="21" name="Rounded Rectangle 20"/>
+          <p:cNvSpPr/>
+          <p:nvPr/>
+        </p:nvSpPr>
+        <p:spPr>
+          <a:xfrm>
+            <a:off x="914400" y="4626864"/>
+            <a:ext cx="4160520" cy="1133856"/>
+          </a:xfrm>
+          <a:prstGeom prst="roundRect">
+            <a:avLst>
+              <a:gd name="adj" fmla="val 4000"/>
+            </a:avLst>
+          </a:prstGeom>
+          <a:solidFill>
+            <a:srgbClr val="DCDCDC"/>
+          </a:solidFill>
+          <a:ln>
+            <a:noFill/>
+          </a:ln>
+          <a:effectLst/>
+        </p:spPr>
+        <p:txBody>
+          <a:bodyPr rtlCol="0" anchor="ctr"/>
+          <a:lstStyle/>
+          <a:p>
+            <a:pPr algn="ctr"/>
+          </a:p>
+        </p:txBody>
+      </p:sp>
+      <p:pic>
+        <p:nvPicPr>
+          <p:cNvPr id="22" name="Picture 21" descr="xyz2polar.png"/>
+          <p:cNvPicPr>
+            <a:picLocks noChangeAspect="1"/>
+          </p:cNvPicPr>
+          <p:nvPr/>
+        </p:nvPicPr>
+        <p:blipFill>
+          <a:blip r:embed="rId3"/>
+          <a:stretch>
+            <a:fillRect/>
+          </a:stretch>
+        </p:blipFill>
+        <p:spPr>
+          <a:xfrm>
+            <a:off x="1907698" y="4718304"/>
+            <a:ext cx="2173923" cy="950976"/>
+          </a:xfrm>
+          <a:prstGeom prst="rect">
+            <a:avLst/>
+          </a:prstGeom>
+        </p:spPr>
+      </p:pic>
+      <p:sp>
+        <p:nvSpPr>
+          <p:cNvPr id="23" name="Rounded Rectangle 22"/>
+          <p:cNvSpPr/>
+          <p:nvPr/>
+        </p:nvSpPr>
+        <p:spPr>
+          <a:xfrm>
+            <a:off x="5285232" y="4626864"/>
+            <a:ext cx="3566160" cy="1133856"/>
+          </a:xfrm>
+          <a:prstGeom prst="roundRect">
+            <a:avLst>
+              <a:gd name="adj" fmla="val 2000"/>
+            </a:avLst>
+          </a:prstGeom>
+          <a:solidFill>
+            <a:srgbClr val="FFFFFF"/>
+          </a:solidFill>
+          <a:ln>
+            <a:noFill/>
+          </a:ln>
+          <a:effectLst/>
+        </p:spPr>
+        <p:txBody>
+          <a:bodyPr rtlCol="0" anchor="ctr"/>
+          <a:lstStyle/>
+          <a:p>
+            <a:pPr algn="ctr"/>
+          </a:p>
+        </p:txBody>
+      </p:sp>
+      <p:sp>
+        <p:nvSpPr>
+          <p:cNvPr id="24" name="TextBox 23"/>
+          <p:cNvSpPr txBox="1"/>
+          <p:nvPr/>
+        </p:nvSpPr>
+        <p:spPr>
+          <a:xfrm>
+            <a:off x="5431536" y="4709159"/>
+            <a:ext cx="3273552" cy="987552"/>
+          </a:xfrm>
+          <a:prstGeom prst="rect">
+            <a:avLst/>
+          </a:prstGeom>
+          <a:noFill/>
+        </p:spPr>
+        <p:txBody>
+          <a:bodyPr wrap="square" lIns="0" rIns="0" tIns="0" bIns="0">
+            <a:spAutoFit/>
+          </a:bodyPr>
+          <a:lstStyle/>
+          <a:p>
+            <a:pPr>
+              <a:spcBef>
+                <a:spcPts val="0"/>
+              </a:spcBef>
+            </a:pPr>
+            <a:r>
+              <a:rPr sz="850" b="0">
+                <a:solidFill>
+                  <a:srgbClr val="1A1A1A"/>
+                </a:solidFill>
+                <a:latin typeface="Consolas"/>
+              </a:rPr>
+              <a:t>dXz = sqrt(dX*dX + dZ*dZ);</a:t>
+            </a:r>
+          </a:p>
+          <a:p>
+            <a:pPr>
+              <a:spcBef>
+                <a:spcPts val="180"/>
+              </a:spcBef>
+            </a:pPr>
+            <a:r>
+              <a:rPr sz="850" b="0">
+                <a:solidFill>
+                  <a:srgbClr val="1A1A1A"/>
+                </a:solidFill>
+                <a:latin typeface="Consolas"/>
+              </a:rPr>
+              <a:t>dRange = sqrt(dXz*dXz + dY*dY);</a:t>
+            </a:r>
+          </a:p>
+          <a:p>
+            <a:pPr>
+              <a:spcBef>
+                <a:spcPts val="180"/>
+              </a:spcBef>
+            </a:pPr>
+            <a:r>
+              <a:rPr sz="850" b="0">
+                <a:solidFill>
+                  <a:srgbClr val="1A1A1A"/>
+                </a:solidFill>
+                <a:latin typeface="Consolas"/>
+              </a:rPr>
+              <a:t>dAz    = atan2(stXyz.dX, stXyz.dZ);</a:t>
+            </a:r>
+          </a:p>
+          <a:p>
+            <a:pPr>
+              <a:spcBef>
+                <a:spcPts val="180"/>
+              </a:spcBef>
+            </a:pPr>
+            <a:r>
+              <a:rPr sz="850" b="0">
+                <a:solidFill>
+                  <a:srgbClr val="1A1A1A"/>
+                </a:solidFill>
+                <a:latin typeface="Consolas"/>
+              </a:rPr>
+              <a:t>dEl    = atan2(stXyz.dY, dXz);</a:t>
+            </a:r>
+          </a:p>
+        </p:txBody>
+      </p:sp>
+      <p:sp>
+        <p:nvSpPr>
+          <p:cNvPr id="25" name="Rounded Rectangle 24"/>
+          <p:cNvSpPr/>
+          <p:nvPr/>
+        </p:nvSpPr>
+        <p:spPr>
+          <a:xfrm>
+            <a:off x="9052560" y="4626864"/>
+            <a:ext cx="2221992" cy="1133856"/>
+          </a:xfrm>
+          <a:prstGeom prst="roundRect">
+            <a:avLst>
+              <a:gd name="adj" fmla="val 4000"/>
+            </a:avLst>
+          </a:prstGeom>
+          <a:solidFill>
+            <a:srgbClr val="DCDCDC"/>
+          </a:solidFill>
+          <a:ln>
+            <a:noFill/>
+          </a:ln>
+          <a:effectLst/>
+        </p:spPr>
+        <p:txBody>
+          <a:bodyPr rtlCol="0" anchor="ctr"/>
+          <a:lstStyle/>
+          <a:p>
+            <a:pPr algn="ctr"/>
+          </a:p>
+        </p:txBody>
+      </p:sp>
+      <p:sp>
+        <p:nvSpPr>
+          <p:cNvPr id="26" name="TextBox 25"/>
+          <p:cNvSpPr txBox="1"/>
+          <p:nvPr/>
+        </p:nvSpPr>
+        <p:spPr>
+          <a:xfrm>
+            <a:off x="9235440" y="4727448"/>
+            <a:ext cx="1856232" cy="969264"/>
+          </a:xfrm>
+          <a:prstGeom prst="rect">
+            <a:avLst/>
+          </a:prstGeom>
+          <a:noFill/>
+        </p:spPr>
+        <p:txBody>
+          <a:bodyPr wrap="square" lIns="0" rIns="0" tIns="0" bIns="0">
+            <a:spAutoFit/>
+          </a:bodyPr>
+          <a:lstStyle/>
+          <a:p>
+            <a:r>
+              <a:rPr sz="1150" b="1">
+                <a:solidFill>
+                  <a:srgbClr val="1A1A1A"/>
+                </a:solidFill>
+                <a:latin typeface="맑은 고딕"/>
+              </a:rPr>
+              <a:t>asin 이 아니라 atan2</a:t>
+            </a:r>
+          </a:p>
+          <a:p>
+            <a:pPr>
+              <a:spcBef>
+                <a:spcPts val="400"/>
+              </a:spcBef>
+            </a:pPr>
+            <a:r>
+              <a:rPr sz="819" b="0">
+                <a:solidFill>
+                  <a:srgbClr val="555555"/>
+                </a:solidFill>
+                <a:latin typeface="맑은 고딕"/>
+              </a:rPr>
+              <a:t>반올림으로 인자가 1 을 조금만 넘어도 asin 은 NaN 을 뱉는다.</a:t>
+            </a:r>
+          </a:p>
+          <a:p>
+            <a:pPr>
+              <a:spcBef>
+                <a:spcPts val="200"/>
+              </a:spcBef>
+            </a:pPr>
+            <a:r>
+              <a:rPr sz="819" b="0">
+                <a:solidFill>
+                  <a:srgbClr val="555555"/>
+                </a:solidFill>
+                <a:latin typeface="맑은 고딕"/>
+              </a:rPr>
+              <a:t>atan2 는 그런 구간이 없고 사분면까지 가려 준다.</a:t>
+            </a:r>
+          </a:p>
+        </p:txBody>
+      </p:sp>
+    </p:spTree>
+  </p:cSld>
+  <p:clrMapOvr>
+    <a:masterClrMapping/>
+  </p:clrMapOvr>
+</p:sld>
+</file>
+
 <file path=ppt/slides/slide3.xml><?xml version="1.0" encoding="utf-8"?>
 <p:sld xmlns:a="http://schemas.openxmlformats.org/drawingml/2006/main" xmlns:r="http://schemas.openxmlformats.org/officeDocument/2006/relationships" xmlns:p="http://schemas.openxmlformats.org/presentationml/2006/main">
   <p:cSld name="Slide 3">
@@ -30383,6 +36994,1527 @@
               <a:t>회전행렬의 유도와 성질</a:t>
             </a:r>
             <a:endParaRPr lang="en-US" sz="1350" dirty="0"/>
+          </a:p>
+        </p:txBody>
+      </p:sp>
+    </p:spTree>
+  </p:cSld>
+  <p:clrMapOvr>
+    <a:masterClrMapping/>
+  </p:clrMapOvr>
+</p:sld>
+</file>
+
+<file path=ppt/slides/slide30.xml><?xml version="1.0" encoding="utf-8"?>
+<p:sld xmlns:a="http://schemas.openxmlformats.org/drawingml/2006/main" xmlns:p="http://schemas.openxmlformats.org/presentationml/2006/main" xmlns:r="http://schemas.openxmlformats.org/officeDocument/2006/relationships">
+  <p:cSld>
+    <p:spTree>
+      <p:nvGrpSpPr>
+        <p:cNvPr id="1" name=""/>
+        <p:cNvGrpSpPr/>
+        <p:nvPr/>
+      </p:nvGrpSpPr>
+      <p:grpSpPr/>
+      <p:sp>
+        <p:nvSpPr>
+          <p:cNvPr id="2" name="Shape 0"/>
+          <p:cNvSpPr/>
+          <p:nvPr/>
+        </p:nvSpPr>
+        <p:spPr>
+          <a:xfrm>
+            <a:off x="548640" y="384048"/>
+            <a:ext cx="11094415" cy="566928"/>
+          </a:xfrm>
+          <a:prstGeom prst="rect">
+            <a:avLst/>
+          </a:prstGeom>
+          <a:solidFill>
+            <a:srgbClr val="3E4650"/>
+          </a:solidFill>
+          <a:ln/>
+        </p:spPr>
+      </p:sp>
+      <p:sp>
+        <p:nvSpPr>
+          <p:cNvPr id="3" name="Text 1"/>
+          <p:cNvSpPr txBox="1"/>
+          <p:nvPr/>
+        </p:nvSpPr>
+        <p:spPr>
+          <a:xfrm>
+            <a:off x="749808" y="384048"/>
+            <a:ext cx="10692079" cy="566928"/>
+          </a:xfrm>
+          <a:prstGeom prst="rect">
+            <a:avLst/>
+          </a:prstGeom>
+          <a:noFill/>
+          <a:ln/>
+        </p:spPr>
+        <p:txBody>
+          <a:bodyPr wrap="square" lIns="0" tIns="0" rIns="0" bIns="0" rtlCol="0" anchor="ctr"/>
+          <a:lstStyle/>
+          <a:p>
+            <a:pPr marL="0" indent="0">
+              <a:buNone/>
+            </a:pPr>
+            <a:r>
+              <a:rPr lang="en-US" sz="2000" b="1" dirty="0">
+                <a:solidFill>
+                  <a:srgbClr val="FFFFFF"/>
+                </a:solidFill>
+                <a:latin typeface="맑은 고딕" pitchFamily="34" charset="0"/>
+                <a:ea typeface="맑은 고딕" pitchFamily="34" charset="-122"/>
+                <a:cs typeface="맑은 고딕" pitchFamily="34" charset="-120"/>
+              </a:rPr>
+              <a:t>03. 실행 결과</a:t>
+            </a:r>
+            <a:endParaRPr lang="en-US" sz="2000" dirty="0"/>
+          </a:p>
+        </p:txBody>
+      </p:sp>
+      <p:sp>
+        <p:nvSpPr>
+          <p:cNvPr id="4" name="Shape 2"/>
+          <p:cNvSpPr/>
+          <p:nvPr/>
+        </p:nvSpPr>
+        <p:spPr>
+          <a:xfrm>
+            <a:off x="548640" y="1097280"/>
+            <a:ext cx="11094415" cy="4864608"/>
+          </a:xfrm>
+          <a:prstGeom prst="rect">
+            <a:avLst/>
+          </a:prstGeom>
+          <a:solidFill>
+            <a:srgbClr val="F4F4F4"/>
+          </a:solidFill>
+          <a:ln/>
+        </p:spPr>
+      </p:sp>
+      <p:sp>
+        <p:nvSpPr>
+          <p:cNvPr id="5" name="Shape 3"/>
+          <p:cNvSpPr/>
+          <p:nvPr/>
+        </p:nvSpPr>
+        <p:spPr>
+          <a:xfrm>
+            <a:off x="548640" y="6199632"/>
+            <a:ext cx="11094415" cy="0"/>
+          </a:xfrm>
+          <a:prstGeom prst="line">
+            <a:avLst/>
+          </a:prstGeom>
+          <a:noFill/>
+          <a:ln w="9525">
+            <a:solidFill>
+              <a:srgbClr val="BFBFBF"/>
+            </a:solidFill>
+            <a:prstDash val="solid"/>
+          </a:ln>
+        </p:spPr>
+      </p:sp>
+      <p:sp>
+        <p:nvSpPr>
+          <p:cNvPr id="7" name="Text 5"/>
+          <p:cNvSpPr txBox="1"/>
+          <p:nvPr/>
+        </p:nvSpPr>
+        <p:spPr>
+          <a:xfrm>
+            <a:off x="0" y="6419088"/>
+            <a:ext cx="12191695" cy="219456"/>
+          </a:xfrm>
+          <a:prstGeom prst="rect">
+            <a:avLst/>
+          </a:prstGeom>
+          <a:noFill/>
+          <a:ln/>
+        </p:spPr>
+        <p:txBody>
+          <a:bodyPr wrap="square" lIns="0" tIns="0" rIns="0" bIns="0" rtlCol="0" anchor="ctr"/>
+          <a:lstStyle/>
+          <a:p>
+            <a:pPr marL="0" indent="0" algn="ctr">
+              <a:buNone/>
+            </a:pPr>
+            <a:r>
+              <a:rPr lang="en-US" sz="900" dirty="0">
+                <a:solidFill>
+                  <a:srgbClr val="A0A0A0"/>
+                </a:solidFill>
+                <a:latin typeface="Arial" pitchFamily="34" charset="0"/>
+                <a:ea typeface="Arial" pitchFamily="34" charset="-122"/>
+                <a:cs typeface="Arial" pitchFamily="34" charset="-120"/>
+              </a:rPr>
+              <a:t>30</a:t>
+            </a:r>
+            <a:endParaRPr lang="en-US" sz="900" dirty="0"/>
+          </a:p>
+        </p:txBody>
+      </p:sp>
+      <p:sp>
+        <p:nvSpPr>
+          <p:cNvPr id="8" name="Shape 6"/>
+          <p:cNvSpPr/>
+          <p:nvPr/>
+        </p:nvSpPr>
+        <p:spPr>
+          <a:xfrm>
+            <a:off x="786384" y="1335024"/>
+            <a:ext cx="50292" cy="274320"/>
+          </a:xfrm>
+          <a:prstGeom prst="rect">
+            <a:avLst/>
+          </a:prstGeom>
+          <a:solidFill>
+            <a:srgbClr val="3E4650"/>
+          </a:solidFill>
+          <a:ln/>
+        </p:spPr>
+      </p:sp>
+      <p:sp>
+        <p:nvSpPr>
+          <p:cNvPr id="9" name="Text 7"/>
+          <p:cNvSpPr txBox="1"/>
+          <p:nvPr/>
+        </p:nvSpPr>
+        <p:spPr>
+          <a:xfrm>
+            <a:off x="932688" y="1298448"/>
+            <a:ext cx="10271455" cy="347472"/>
+          </a:xfrm>
+          <a:prstGeom prst="rect">
+            <a:avLst/>
+          </a:prstGeom>
+          <a:noFill/>
+          <a:ln/>
+        </p:spPr>
+        <p:txBody>
+          <a:bodyPr wrap="square" lIns="0" tIns="0" rIns="0" bIns="0" rtlCol="0" anchor="ctr"/>
+          <a:lstStyle/>
+          <a:p>
+            <a:pPr marL="0" indent="0">
+              <a:buNone/>
+            </a:pPr>
+            <a:r>
+              <a:rPr lang="en-US" sz="1450" b="1" dirty="0">
+                <a:solidFill>
+                  <a:srgbClr val="1A1A1A"/>
+                </a:solidFill>
+                <a:latin typeface="맑은 고딕" pitchFamily="34" charset="0"/>
+                <a:ea typeface="맑은 고딕" pitchFamily="34" charset="-122"/>
+                <a:cs typeface="맑은 고딕" pitchFamily="34" charset="-120"/>
+              </a:rPr>
+              <a:t>radar_coord.exe 를 그대로 돌린 화면. 발표자료 p.20 ~ p.22 의 손계산과 전 단계가 일치한다.</a:t>
+            </a:r>
+            <a:endParaRPr lang="en-US" sz="1450" dirty="0"/>
+          </a:p>
+        </p:txBody>
+      </p:sp>
+      <p:sp>
+        <p:nvSpPr>
+          <p:cNvPr id="10" name="Rounded Rectangle 9"/>
+          <p:cNvSpPr/>
+          <p:nvPr/>
+        </p:nvSpPr>
+        <p:spPr>
+          <a:xfrm>
+            <a:off x="914400" y="1773936"/>
+            <a:ext cx="6903720" cy="3749039"/>
+          </a:xfrm>
+          <a:prstGeom prst="roundRect">
+            <a:avLst>
+              <a:gd name="adj" fmla="val 2000"/>
+            </a:avLst>
+          </a:prstGeom>
+          <a:solidFill>
+            <a:srgbClr val="FFFFFF"/>
+          </a:solidFill>
+          <a:ln>
+            <a:noFill/>
+          </a:ln>
+          <a:effectLst/>
+        </p:spPr>
+        <p:txBody>
+          <a:bodyPr rtlCol="0" anchor="ctr"/>
+          <a:lstStyle/>
+          <a:p>
+            <a:pPr algn="ctr"/>
+          </a:p>
+        </p:txBody>
+      </p:sp>
+      <p:sp>
+        <p:nvSpPr>
+          <p:cNvPr id="11" name="TextBox 10"/>
+          <p:cNvSpPr txBox="1"/>
+          <p:nvPr/>
+        </p:nvSpPr>
+        <p:spPr>
+          <a:xfrm>
+            <a:off x="1060704" y="1856231"/>
+            <a:ext cx="6611112" cy="3602735"/>
+          </a:xfrm>
+          <a:prstGeom prst="rect">
+            <a:avLst/>
+          </a:prstGeom>
+          <a:noFill/>
+        </p:spPr>
+        <p:txBody>
+          <a:bodyPr wrap="square" lIns="0" rIns="0" tIns="0" bIns="0">
+            <a:spAutoFit/>
+          </a:bodyPr>
+          <a:lstStyle/>
+          <a:p>
+            <a:pPr>
+              <a:spcBef>
+                <a:spcPts val="0"/>
+              </a:spcBef>
+            </a:pPr>
+            <a:r>
+              <a:rPr sz="850" b="0">
+                <a:solidFill>
+                  <a:srgbClr val="1A1A1A"/>
+                </a:solidFill>
+                <a:latin typeface="Consolas"/>
+              </a:rPr>
+              <a:t>[입력]</a:t>
+            </a:r>
+          </a:p>
+          <a:p>
+            <a:pPr>
+              <a:spcBef>
+                <a:spcPts val="150"/>
+              </a:spcBef>
+            </a:pPr>
+            <a:r>
+              <a:rPr sz="850" b="0">
+                <a:solidFill>
+                  <a:srgbClr val="1A1A1A"/>
+                </a:solidFill>
+                <a:latin typeface="Consolas"/>
+              </a:rPr>
+              <a:t>  측정값       R = 20000.0 m, Az = 30.000 deg, El = 0.000 deg</a:t>
+            </a:r>
+          </a:p>
+          <a:p>
+            <a:pPr>
+              <a:spcBef>
+                <a:spcPts val="150"/>
+              </a:spcBef>
+            </a:pPr>
+            <a:r>
+              <a:rPr sz="850" b="0">
+                <a:solidFill>
+                  <a:srgbClr val="1A1A1A"/>
+                </a:solidFill>
+                <a:latin typeface="Consolas"/>
+              </a:rPr>
+              <a:t>  플랫폼 위치  lat = 36.408000 deg, lon = 127.307000 deg, alt = 0.0 m</a:t>
+            </a:r>
+          </a:p>
+          <a:p>
+            <a:pPr>
+              <a:spcBef>
+                <a:spcPts val="150"/>
+              </a:spcBef>
+            </a:pPr>
+            <a:r>
+              <a:rPr sz="850" b="0">
+                <a:solidFill>
+                  <a:srgbClr val="1A1A1A"/>
+                </a:solidFill>
+                <a:latin typeface="Consolas"/>
+              </a:rPr>
+              <a:t>  플랫폼 자세  (r, y, p) = (0.000, 45.000, 0.000) deg</a:t>
+            </a:r>
+          </a:p>
+          <a:p>
+            <a:pPr>
+              <a:spcBef>
+                <a:spcPts val="150"/>
+              </a:spcBef>
+            </a:pPr>
+            <a:r>
+              <a:rPr sz="850" b="0">
+                <a:solidFill>
+                  <a:srgbClr val="1A1A1A"/>
+                </a:solidFill>
+                <a:latin typeface="Consolas"/>
+              </a:rPr>
+              <a:t>  안테나 설치  az = 90.000 deg, tilt = 0.000 deg, offset = (-30.0, 0.0, -10.0) m</a:t>
+            </a:r>
+          </a:p>
+          <a:p>
+            <a:pPr>
+              <a:spcBef>
+                <a:spcPts val="150"/>
+              </a:spcBef>
+            </a:pPr>
+            <a:r>
+              <a:rPr sz="850" b="0">
+                <a:solidFill>
+                  <a:srgbClr val="1A1A1A"/>
+                </a:solidFill>
+                <a:latin typeface="Consolas"/>
+              </a:rPr>
+              <a:t/>
+            </a:r>
+          </a:p>
+          <a:p>
+            <a:pPr>
+              <a:spcBef>
+                <a:spcPts val="150"/>
+              </a:spcBef>
+            </a:pPr>
+            <a:r>
+              <a:rPr sz="850" b="0">
+                <a:solidFill>
+                  <a:srgbClr val="1A1A1A"/>
+                </a:solidFill>
+                <a:latin typeface="Consolas"/>
+              </a:rPr>
+              <a:t>[정변환]</a:t>
+            </a:r>
+          </a:p>
+          <a:p>
+            <a:pPr>
+              <a:spcBef>
+                <a:spcPts val="150"/>
+              </a:spcBef>
+            </a:pPr>
+            <a:r>
+              <a:rPr sz="850" b="0">
+                <a:solidFill>
+                  <a:srgbClr val="1A1A1A"/>
+                </a:solidFill>
+                <a:latin typeface="Consolas"/>
+              </a:rPr>
+              <a:t>  1) 극좌표 -&gt; 안테나 직교      10000.0000        0.0000    17320.5081  [m]</a:t>
+            </a:r>
+          </a:p>
+          <a:p>
+            <a:pPr>
+              <a:spcBef>
+                <a:spcPts val="150"/>
+              </a:spcBef>
+            </a:pPr>
+            <a:r>
+              <a:rPr sz="850" b="0">
+                <a:solidFill>
+                  <a:srgbClr val="1A1A1A"/>
+                </a:solidFill>
+                <a:latin typeface="Consolas"/>
+              </a:rPr>
+              <a:t>  2) 안테나 -&gt; 동체              9970.0000    17320.5081      -10.0000  [m]</a:t>
+            </a:r>
+          </a:p>
+          <a:p>
+            <a:pPr>
+              <a:spcBef>
+                <a:spcPts val="150"/>
+              </a:spcBef>
+            </a:pPr>
+            <a:r>
+              <a:rPr sz="850" b="0">
+                <a:solidFill>
+                  <a:srgbClr val="1A1A1A"/>
+                </a:solidFill>
+                <a:latin typeface="Consolas"/>
+              </a:rPr>
+              <a:t>  3) 동체 -&gt; NED                -5197.5941    19297.3033      -10.0000  [m]</a:t>
+            </a:r>
+          </a:p>
+          <a:p>
+            <a:pPr>
+              <a:spcBef>
+                <a:spcPts val="150"/>
+              </a:spcBef>
+            </a:pPr>
+            <a:r>
+              <a:rPr sz="850" b="0">
+                <a:solidFill>
+                  <a:srgbClr val="1A1A1A"/>
+                </a:solidFill>
+                <a:latin typeface="Consolas"/>
+              </a:rPr>
+              <a:t>  4) NED -&gt; ECEF            -3132053.7872  4078527.1919  3760545.9526  [m]</a:t>
+            </a:r>
+          </a:p>
+          <a:p>
+            <a:pPr>
+              <a:spcBef>
+                <a:spcPts val="150"/>
+              </a:spcBef>
+            </a:pPr>
+            <a:r>
+              <a:rPr sz="850" b="0">
+                <a:solidFill>
+                  <a:srgbClr val="1A1A1A"/>
+                </a:solidFill>
+                <a:latin typeface="Consolas"/>
+              </a:rPr>
+              <a:t>     함선 ECEF              -3114830.1107  4087762.8525  3764723.0978  [m]</a:t>
+            </a:r>
+          </a:p>
+          <a:p>
+            <a:pPr>
+              <a:spcBef>
+                <a:spcPts val="150"/>
+              </a:spcBef>
+            </a:pPr>
+            <a:r>
+              <a:rPr sz="850" b="0">
+                <a:solidFill>
+                  <a:srgbClr val="1A1A1A"/>
+                </a:solidFill>
+                <a:latin typeface="Consolas"/>
+              </a:rPr>
+              <a:t>  5) ECEF -&gt; LLA</a:t>
+            </a:r>
+          </a:p>
+          <a:p>
+            <a:pPr>
+              <a:spcBef>
+                <a:spcPts val="150"/>
+              </a:spcBef>
+            </a:pPr>
+            <a:r>
+              <a:rPr sz="850" b="0">
+                <a:solidFill>
+                  <a:srgbClr val="1A1A1A"/>
+                </a:solidFill>
+                <a:latin typeface="Consolas"/>
+              </a:rPr>
+              <a:t>      lat = 36.360967176 deg, lon = 127.522008441 deg, alt = 41.2824 m</a:t>
+            </a:r>
+          </a:p>
+          <a:p>
+            <a:pPr>
+              <a:spcBef>
+                <a:spcPts val="150"/>
+              </a:spcBef>
+            </a:pPr>
+            <a:r>
+              <a:rPr sz="850" b="0">
+                <a:solidFill>
+                  <a:srgbClr val="1A1A1A"/>
+                </a:solidFill>
+                <a:latin typeface="Consolas"/>
+              </a:rPr>
+              <a:t/>
+            </a:r>
+          </a:p>
+          <a:p>
+            <a:pPr>
+              <a:spcBef>
+                <a:spcPts val="150"/>
+              </a:spcBef>
+            </a:pPr>
+            <a:r>
+              <a:rPr sz="850" b="0">
+                <a:solidFill>
+                  <a:srgbClr val="1A1A1A"/>
+                </a:solidFill>
+                <a:latin typeface="Consolas"/>
+              </a:rPr>
+              <a:t>[역변환]        ( 정변환의 값을 그대로 되짚어 온다 )</a:t>
+            </a:r>
+          </a:p>
+          <a:p>
+            <a:pPr>
+              <a:spcBef>
+                <a:spcPts val="150"/>
+              </a:spcBef>
+            </a:pPr>
+            <a:r>
+              <a:rPr sz="850" b="0">
+                <a:solidFill>
+                  <a:srgbClr val="1A1A1A"/>
+                </a:solidFill>
+                <a:latin typeface="Consolas"/>
+              </a:rPr>
+              <a:t>  2) ECEF -&gt; NED                -5197.5941    19297.3033      -10.0000  [m]</a:t>
+            </a:r>
+          </a:p>
+          <a:p>
+            <a:pPr>
+              <a:spcBef>
+                <a:spcPts val="150"/>
+              </a:spcBef>
+            </a:pPr>
+            <a:r>
+              <a:rPr sz="850" b="0">
+                <a:solidFill>
+                  <a:srgbClr val="1A1A1A"/>
+                </a:solidFill>
+                <a:latin typeface="Consolas"/>
+              </a:rPr>
+              <a:t>  3) NED -&gt; 동체                 9970.0000    17320.5081      -10.0000  [m]</a:t>
+            </a:r>
+          </a:p>
+          <a:p>
+            <a:pPr>
+              <a:spcBef>
+                <a:spcPts val="150"/>
+              </a:spcBef>
+            </a:pPr>
+            <a:r>
+              <a:rPr sz="850" b="0">
+                <a:solidFill>
+                  <a:srgbClr val="1A1A1A"/>
+                </a:solidFill>
+                <a:latin typeface="Consolas"/>
+              </a:rPr>
+              <a:t>  4) 동체 -&gt; 안테나 직교        10000.0000        0.0000    17320.5081  [m]</a:t>
+            </a:r>
+          </a:p>
+          <a:p>
+            <a:pPr>
+              <a:spcBef>
+                <a:spcPts val="150"/>
+              </a:spcBef>
+            </a:pPr>
+            <a:r>
+              <a:rPr sz="850" b="0">
+                <a:solidFill>
+                  <a:srgbClr val="1A1A1A"/>
+                </a:solidFill>
+                <a:latin typeface="Consolas"/>
+              </a:rPr>
+              <a:t>  5) R = 20000.000000 m, Az = 30.000000000 deg, El = 0.000000000 deg</a:t>
+            </a:r>
+          </a:p>
+          <a:p>
+            <a:pPr>
+              <a:spcBef>
+                <a:spcPts val="150"/>
+              </a:spcBef>
+            </a:pPr>
+            <a:r>
+              <a:rPr sz="850" b="0">
+                <a:solidFill>
+                  <a:srgbClr val="1A1A1A"/>
+                </a:solidFill>
+                <a:latin typeface="Consolas"/>
+              </a:rPr>
+              <a:t>      입력과 차이  dR = 6.8e-10 m, dAz = 6.8e-13 deg, dEl = 3.8e-12 deg</a:t>
+            </a:r>
+          </a:p>
+        </p:txBody>
+      </p:sp>
+      <p:sp>
+        <p:nvSpPr>
+          <p:cNvPr id="12" name="Rounded Rectangle 11"/>
+          <p:cNvSpPr/>
+          <p:nvPr/>
+        </p:nvSpPr>
+        <p:spPr>
+          <a:xfrm>
+            <a:off x="8001000" y="1773936"/>
+            <a:ext cx="3273552" cy="1188720"/>
+          </a:xfrm>
+          <a:prstGeom prst="roundRect">
+            <a:avLst>
+              <a:gd name="adj" fmla="val 4000"/>
+            </a:avLst>
+          </a:prstGeom>
+          <a:solidFill>
+            <a:srgbClr val="DCDCDC"/>
+          </a:solidFill>
+          <a:ln>
+            <a:noFill/>
+          </a:ln>
+          <a:effectLst/>
+        </p:spPr>
+        <p:txBody>
+          <a:bodyPr rtlCol="0" anchor="ctr"/>
+          <a:lstStyle/>
+          <a:p>
+            <a:pPr algn="ctr"/>
+          </a:p>
+        </p:txBody>
+      </p:sp>
+      <p:sp>
+        <p:nvSpPr>
+          <p:cNvPr id="13" name="TextBox 12"/>
+          <p:cNvSpPr txBox="1"/>
+          <p:nvPr/>
+        </p:nvSpPr>
+        <p:spPr>
+          <a:xfrm>
+            <a:off x="8183879" y="1874519"/>
+            <a:ext cx="2907792" cy="1024128"/>
+          </a:xfrm>
+          <a:prstGeom prst="rect">
+            <a:avLst/>
+          </a:prstGeom>
+          <a:noFill/>
+        </p:spPr>
+        <p:txBody>
+          <a:bodyPr wrap="square" lIns="0" rIns="0" tIns="0" bIns="0">
+            <a:spAutoFit/>
+          </a:bodyPr>
+          <a:lstStyle/>
+          <a:p>
+            <a:r>
+              <a:rPr sz="1200" b="1">
+                <a:solidFill>
+                  <a:srgbClr val="1A1A1A"/>
+                </a:solidFill>
+                <a:latin typeface="맑은 고딕"/>
+              </a:rPr>
+              <a:t>왕복 오차가 말해 주는 것</a:t>
+            </a:r>
+          </a:p>
+          <a:p>
+            <a:pPr>
+              <a:spcBef>
+                <a:spcPts val="400"/>
+              </a:spcBef>
+            </a:pPr>
+            <a:r>
+              <a:rPr sz="900" b="0">
+                <a:solidFill>
+                  <a:srgbClr val="555555"/>
+                </a:solidFill>
+                <a:latin typeface="맑은 고딕"/>
+              </a:rPr>
+              <a:t>거리 오차 0.68 nm — 배정도 실수의 반올림 한계.</a:t>
+            </a:r>
+          </a:p>
+          <a:p>
+            <a:pPr>
+              <a:spcBef>
+                <a:spcPts val="200"/>
+              </a:spcBef>
+            </a:pPr>
+            <a:r>
+              <a:rPr sz="900" b="0">
+                <a:solidFill>
+                  <a:srgbClr val="555555"/>
+                </a:solidFill>
+                <a:latin typeface="맑은 고딕"/>
+              </a:rPr>
+              <a:t>정변환과 역변환이 서로 정확한 역이라는 뜻이다.</a:t>
+            </a:r>
+          </a:p>
+        </p:txBody>
+      </p:sp>
+      <p:sp>
+        <p:nvSpPr>
+          <p:cNvPr id="14" name="Rounded Rectangle 13"/>
+          <p:cNvSpPr/>
+          <p:nvPr/>
+        </p:nvSpPr>
+        <p:spPr>
+          <a:xfrm>
+            <a:off x="8001000" y="3035808"/>
+            <a:ext cx="3273552" cy="1188720"/>
+          </a:xfrm>
+          <a:prstGeom prst="roundRect">
+            <a:avLst>
+              <a:gd name="adj" fmla="val 4000"/>
+            </a:avLst>
+          </a:prstGeom>
+          <a:solidFill>
+            <a:srgbClr val="DCDCDC"/>
+          </a:solidFill>
+          <a:ln>
+            <a:noFill/>
+          </a:ln>
+          <a:effectLst/>
+        </p:spPr>
+        <p:txBody>
+          <a:bodyPr rtlCol="0" anchor="ctr"/>
+          <a:lstStyle/>
+          <a:p>
+            <a:pPr algn="ctr"/>
+          </a:p>
+        </p:txBody>
+      </p:sp>
+      <p:sp>
+        <p:nvSpPr>
+          <p:cNvPr id="15" name="TextBox 14"/>
+          <p:cNvSpPr txBox="1"/>
+          <p:nvPr/>
+        </p:nvSpPr>
+        <p:spPr>
+          <a:xfrm>
+            <a:off x="8183879" y="3136391"/>
+            <a:ext cx="2907792" cy="1024128"/>
+          </a:xfrm>
+          <a:prstGeom prst="rect">
+            <a:avLst/>
+          </a:prstGeom>
+          <a:noFill/>
+        </p:spPr>
+        <p:txBody>
+          <a:bodyPr wrap="square" lIns="0" rIns="0" tIns="0" bIns="0">
+            <a:spAutoFit/>
+          </a:bodyPr>
+          <a:lstStyle/>
+          <a:p>
+            <a:r>
+              <a:rPr sz="1200" b="1">
+                <a:solidFill>
+                  <a:srgbClr val="1A1A1A"/>
+                </a:solidFill>
+                <a:latin typeface="맑은 고딕"/>
+              </a:rPr>
+              <a:t>과제 최종 출력 2가지</a:t>
+            </a:r>
+          </a:p>
+          <a:p>
+            <a:pPr>
+              <a:spcBef>
+                <a:spcPts val="400"/>
+              </a:spcBef>
+            </a:pPr>
+            <a:r>
+              <a:rPr sz="900" b="0">
+                <a:solidFill>
+                  <a:srgbClr val="555555"/>
+                </a:solidFill>
+                <a:latin typeface="맑은 고딕"/>
+              </a:rPr>
+              <a:t>①  36.360967 °N,  127.522008 °E,  41.3 m</a:t>
+            </a:r>
+          </a:p>
+          <a:p>
+            <a:pPr>
+              <a:spcBef>
+                <a:spcPts val="200"/>
+              </a:spcBef>
+            </a:pPr>
+            <a:r>
+              <a:rPr sz="900" b="0">
+                <a:solidFill>
+                  <a:srgbClr val="555555"/>
+                </a:solidFill>
+                <a:latin typeface="맑은 고딕"/>
+              </a:rPr>
+              <a:t>②  R 20000.0 m,  Az 30.000°,  El 0.000°</a:t>
+            </a:r>
+          </a:p>
+        </p:txBody>
+      </p:sp>
+      <p:sp>
+        <p:nvSpPr>
+          <p:cNvPr id="16" name="Rounded Rectangle 15"/>
+          <p:cNvSpPr/>
+          <p:nvPr/>
+        </p:nvSpPr>
+        <p:spPr>
+          <a:xfrm>
+            <a:off x="8001000" y="4297680"/>
+            <a:ext cx="3273552" cy="1225296"/>
+          </a:xfrm>
+          <a:prstGeom prst="roundRect">
+            <a:avLst>
+              <a:gd name="adj" fmla="val 4000"/>
+            </a:avLst>
+          </a:prstGeom>
+          <a:solidFill>
+            <a:srgbClr val="DCDCDC"/>
+          </a:solidFill>
+          <a:ln>
+            <a:noFill/>
+          </a:ln>
+          <a:effectLst/>
+        </p:spPr>
+        <p:txBody>
+          <a:bodyPr rtlCol="0" anchor="ctr"/>
+          <a:lstStyle/>
+          <a:p>
+            <a:pPr algn="ctr"/>
+          </a:p>
+        </p:txBody>
+      </p:sp>
+      <p:sp>
+        <p:nvSpPr>
+          <p:cNvPr id="17" name="TextBox 16"/>
+          <p:cNvSpPr txBox="1"/>
+          <p:nvPr/>
+        </p:nvSpPr>
+        <p:spPr>
+          <a:xfrm>
+            <a:off x="8183879" y="4398264"/>
+            <a:ext cx="2907792" cy="1060704"/>
+          </a:xfrm>
+          <a:prstGeom prst="rect">
+            <a:avLst/>
+          </a:prstGeom>
+          <a:noFill/>
+        </p:spPr>
+        <p:txBody>
+          <a:bodyPr wrap="square" lIns="0" rIns="0" tIns="0" bIns="0">
+            <a:spAutoFit/>
+          </a:bodyPr>
+          <a:lstStyle/>
+          <a:p>
+            <a:r>
+              <a:rPr sz="1200" b="1">
+                <a:solidFill>
+                  <a:srgbClr val="1A1A1A"/>
+                </a:solidFill>
+                <a:latin typeface="맑은 고딕"/>
+              </a:rPr>
+              <a:t>고도가 41.3 m 인 이유</a:t>
+            </a:r>
+          </a:p>
+          <a:p>
+            <a:pPr>
+              <a:spcBef>
+                <a:spcPts val="400"/>
+              </a:spcBef>
+            </a:pPr>
+            <a:r>
+              <a:rPr sz="900" b="0">
+                <a:solidFill>
+                  <a:srgbClr val="555555"/>
+                </a:solidFill>
+                <a:latin typeface="맑은 고딕"/>
+              </a:rPr>
+              <a:t>표적은 수평면에서 10 m 위인데, 20 km 앞이라</a:t>
+            </a:r>
+          </a:p>
+          <a:p>
+            <a:pPr>
+              <a:spcBef>
+                <a:spcPts val="200"/>
+              </a:spcBef>
+            </a:pPr>
+            <a:r>
+              <a:rPr sz="900" b="0">
+                <a:solidFill>
+                  <a:srgbClr val="555555"/>
+                </a:solidFill>
+                <a:latin typeface="맑은 고딕"/>
+              </a:rPr>
+              <a:t>지구가 31.3 m 만큼 휘어 내려간다.</a:t>
+            </a:r>
+          </a:p>
+          <a:p>
+            <a:pPr>
+              <a:spcBef>
+                <a:spcPts val="200"/>
+              </a:spcBef>
+            </a:pPr>
+            <a:r>
+              <a:rPr sz="900" b="0">
+                <a:solidFill>
+                  <a:srgbClr val="555555"/>
+                </a:solidFill>
+                <a:latin typeface="맑은 고딕"/>
+              </a:rPr>
+              <a:t>10 + 31.3 ≒ 41.3 m.</a:t>
+            </a:r>
+          </a:p>
+        </p:txBody>
+      </p:sp>
+    </p:spTree>
+  </p:cSld>
+  <p:clrMapOvr>
+    <a:masterClrMapping/>
+  </p:clrMapOvr>
+</p:sld>
+</file>
+
+<file path=ppt/slides/slide31.xml><?xml version="1.0" encoding="utf-8"?>
+<p:sld xmlns:a="http://schemas.openxmlformats.org/drawingml/2006/main" xmlns:p="http://schemas.openxmlformats.org/presentationml/2006/main" xmlns:r="http://schemas.openxmlformats.org/officeDocument/2006/relationships">
+  <p:cSld>
+    <p:spTree>
+      <p:nvGrpSpPr>
+        <p:cNvPr id="1" name=""/>
+        <p:cNvGrpSpPr/>
+        <p:nvPr/>
+      </p:nvGrpSpPr>
+      <p:grpSpPr/>
+      <p:sp>
+        <p:nvSpPr>
+          <p:cNvPr id="2" name="Shape 0"/>
+          <p:cNvSpPr/>
+          <p:nvPr/>
+        </p:nvSpPr>
+        <p:spPr>
+          <a:xfrm>
+            <a:off x="548640" y="384048"/>
+            <a:ext cx="11094415" cy="566928"/>
+          </a:xfrm>
+          <a:prstGeom prst="rect">
+            <a:avLst/>
+          </a:prstGeom>
+          <a:solidFill>
+            <a:srgbClr val="3E4650"/>
+          </a:solidFill>
+          <a:ln/>
+        </p:spPr>
+      </p:sp>
+      <p:sp>
+        <p:nvSpPr>
+          <p:cNvPr id="3" name="Text 1"/>
+          <p:cNvSpPr txBox="1"/>
+          <p:nvPr/>
+        </p:nvSpPr>
+        <p:spPr>
+          <a:xfrm>
+            <a:off x="749808" y="384048"/>
+            <a:ext cx="10692079" cy="566928"/>
+          </a:xfrm>
+          <a:prstGeom prst="rect">
+            <a:avLst/>
+          </a:prstGeom>
+          <a:noFill/>
+          <a:ln/>
+        </p:spPr>
+        <p:txBody>
+          <a:bodyPr wrap="square" lIns="0" tIns="0" rIns="0" bIns="0" rtlCol="0" anchor="ctr"/>
+          <a:lstStyle/>
+          <a:p>
+            <a:pPr marL="0" indent="0">
+              <a:buNone/>
+            </a:pPr>
+            <a:r>
+              <a:rPr lang="en-US" sz="2000" b="1" dirty="0">
+                <a:solidFill>
+                  <a:srgbClr val="FFFFFF"/>
+                </a:solidFill>
+                <a:latin typeface="맑은 고딕" pitchFamily="34" charset="0"/>
+                <a:ea typeface="맑은 고딕" pitchFamily="34" charset="-122"/>
+                <a:cs typeface="맑은 고딕" pitchFamily="34" charset="-120"/>
+              </a:rPr>
+              <a:t>03. UI 화면에서 확인</a:t>
+            </a:r>
+            <a:endParaRPr lang="en-US" sz="2000" dirty="0"/>
+          </a:p>
+        </p:txBody>
+      </p:sp>
+      <p:sp>
+        <p:nvSpPr>
+          <p:cNvPr id="4" name="Shape 2"/>
+          <p:cNvSpPr/>
+          <p:nvPr/>
+        </p:nvSpPr>
+        <p:spPr>
+          <a:xfrm>
+            <a:off x="548640" y="1097280"/>
+            <a:ext cx="11094415" cy="4864608"/>
+          </a:xfrm>
+          <a:prstGeom prst="rect">
+            <a:avLst/>
+          </a:prstGeom>
+          <a:solidFill>
+            <a:srgbClr val="F4F4F4"/>
+          </a:solidFill>
+          <a:ln/>
+        </p:spPr>
+      </p:sp>
+      <p:sp>
+        <p:nvSpPr>
+          <p:cNvPr id="5" name="Shape 3"/>
+          <p:cNvSpPr/>
+          <p:nvPr/>
+        </p:nvSpPr>
+        <p:spPr>
+          <a:xfrm>
+            <a:off x="548640" y="6199632"/>
+            <a:ext cx="11094415" cy="0"/>
+          </a:xfrm>
+          <a:prstGeom prst="line">
+            <a:avLst/>
+          </a:prstGeom>
+          <a:noFill/>
+          <a:ln w="9525">
+            <a:solidFill>
+              <a:srgbClr val="BFBFBF"/>
+            </a:solidFill>
+            <a:prstDash val="solid"/>
+          </a:ln>
+        </p:spPr>
+      </p:sp>
+      <p:sp>
+        <p:nvSpPr>
+          <p:cNvPr id="7" name="Text 5"/>
+          <p:cNvSpPr txBox="1"/>
+          <p:nvPr/>
+        </p:nvSpPr>
+        <p:spPr>
+          <a:xfrm>
+            <a:off x="0" y="6419088"/>
+            <a:ext cx="12191695" cy="219456"/>
+          </a:xfrm>
+          <a:prstGeom prst="rect">
+            <a:avLst/>
+          </a:prstGeom>
+          <a:noFill/>
+          <a:ln/>
+        </p:spPr>
+        <p:txBody>
+          <a:bodyPr wrap="square" lIns="0" tIns="0" rIns="0" bIns="0" rtlCol="0" anchor="ctr"/>
+          <a:lstStyle/>
+          <a:p>
+            <a:pPr marL="0" indent="0" algn="ctr">
+              <a:buNone/>
+            </a:pPr>
+            <a:r>
+              <a:rPr lang="en-US" sz="900" dirty="0">
+                <a:solidFill>
+                  <a:srgbClr val="A0A0A0"/>
+                </a:solidFill>
+                <a:latin typeface="Arial" pitchFamily="34" charset="0"/>
+                <a:ea typeface="Arial" pitchFamily="34" charset="-122"/>
+                <a:cs typeface="Arial" pitchFamily="34" charset="-120"/>
+              </a:rPr>
+              <a:t>31</a:t>
+            </a:r>
+            <a:endParaRPr lang="en-US" sz="900" dirty="0"/>
+          </a:p>
+        </p:txBody>
+      </p:sp>
+      <p:sp>
+        <p:nvSpPr>
+          <p:cNvPr id="8" name="Shape 6"/>
+          <p:cNvSpPr/>
+          <p:nvPr/>
+        </p:nvSpPr>
+        <p:spPr>
+          <a:xfrm>
+            <a:off x="786384" y="1335024"/>
+            <a:ext cx="50292" cy="274320"/>
+          </a:xfrm>
+          <a:prstGeom prst="rect">
+            <a:avLst/>
+          </a:prstGeom>
+          <a:solidFill>
+            <a:srgbClr val="3E4650"/>
+          </a:solidFill>
+          <a:ln/>
+        </p:spPr>
+      </p:sp>
+      <p:sp>
+        <p:nvSpPr>
+          <p:cNvPr id="9" name="Text 7"/>
+          <p:cNvSpPr txBox="1"/>
+          <p:nvPr/>
+        </p:nvSpPr>
+        <p:spPr>
+          <a:xfrm>
+            <a:off x="932688" y="1298448"/>
+            <a:ext cx="10271455" cy="347472"/>
+          </a:xfrm>
+          <a:prstGeom prst="rect">
+            <a:avLst/>
+          </a:prstGeom>
+          <a:noFill/>
+          <a:ln/>
+        </p:spPr>
+        <p:txBody>
+          <a:bodyPr wrap="square" lIns="0" tIns="0" rIns="0" bIns="0" rtlCol="0" anchor="ctr"/>
+          <a:lstStyle/>
+          <a:p>
+            <a:pPr marL="0" indent="0">
+              <a:buNone/>
+            </a:pPr>
+            <a:r>
+              <a:rPr lang="en-US" sz="1450" b="1" dirty="0">
+                <a:solidFill>
+                  <a:srgbClr val="1A1A1A"/>
+                </a:solidFill>
+                <a:latin typeface="맑은 고딕" pitchFamily="34" charset="0"/>
+                <a:ea typeface="맑은 고딕" pitchFamily="34" charset="-122"/>
+                <a:cs typeface="맑은 고딕" pitchFamily="34" charset="-120"/>
+              </a:rPr>
+              <a:t>CoordUI 는 같은 CoordCore 를 호출한다. 입력을 바꾸면 단계별 값이 그 자리에서 다시 계산된다.</a:t>
+            </a:r>
+            <a:endParaRPr lang="en-US" sz="1450" dirty="0"/>
+          </a:p>
+        </p:txBody>
+      </p:sp>
+      <p:pic>
+        <p:nvPicPr>
+          <p:cNvPr id="10" name="Picture 9" descr="coordui.png"/>
+          <p:cNvPicPr>
+            <a:picLocks noChangeAspect="1"/>
+          </p:cNvPicPr>
+          <p:nvPr/>
+        </p:nvPicPr>
+        <p:blipFill>
+          <a:blip r:embed="rId2"/>
+          <a:stretch>
+            <a:fillRect/>
+          </a:stretch>
+        </p:blipFill>
+        <p:spPr>
+          <a:xfrm>
+            <a:off x="914400" y="1773936"/>
+            <a:ext cx="7589520" cy="3858837"/>
+          </a:xfrm>
+          <a:prstGeom prst="rect">
+            <a:avLst/>
+          </a:prstGeom>
+        </p:spPr>
+      </p:pic>
+      <p:sp>
+        <p:nvSpPr>
+          <p:cNvPr id="11" name="Rounded Rectangle 10"/>
+          <p:cNvSpPr/>
+          <p:nvPr/>
+        </p:nvSpPr>
+        <p:spPr>
+          <a:xfrm>
+            <a:off x="8778240" y="1773936"/>
+            <a:ext cx="2496312" cy="1188720"/>
+          </a:xfrm>
+          <a:prstGeom prst="roundRect">
+            <a:avLst>
+              <a:gd name="adj" fmla="val 4000"/>
+            </a:avLst>
+          </a:prstGeom>
+          <a:solidFill>
+            <a:srgbClr val="DCDCDC"/>
+          </a:solidFill>
+          <a:ln>
+            <a:noFill/>
+          </a:ln>
+          <a:effectLst/>
+        </p:spPr>
+        <p:txBody>
+          <a:bodyPr rtlCol="0" anchor="ctr"/>
+          <a:lstStyle/>
+          <a:p>
+            <a:pPr algn="ctr"/>
+          </a:p>
+        </p:txBody>
+      </p:sp>
+      <p:sp>
+        <p:nvSpPr>
+          <p:cNvPr id="12" name="TextBox 11"/>
+          <p:cNvSpPr txBox="1"/>
+          <p:nvPr/>
+        </p:nvSpPr>
+        <p:spPr>
+          <a:xfrm>
+            <a:off x="8961119" y="1874519"/>
+            <a:ext cx="2130552" cy="1024128"/>
+          </a:xfrm>
+          <a:prstGeom prst="rect">
+            <a:avLst/>
+          </a:prstGeom>
+          <a:noFill/>
+        </p:spPr>
+        <p:txBody>
+          <a:bodyPr wrap="square" lIns="0" rIns="0" tIns="0" bIns="0">
+            <a:spAutoFit/>
+          </a:bodyPr>
+          <a:lstStyle/>
+          <a:p>
+            <a:r>
+              <a:rPr sz="1100" b="1">
+                <a:solidFill>
+                  <a:srgbClr val="1A1A1A"/>
+                </a:solidFill>
+                <a:latin typeface="맑은 고딕"/>
+              </a:rPr>
+              <a:t>① 입력</a:t>
+            </a:r>
+          </a:p>
+          <a:p>
+            <a:pPr>
+              <a:spcBef>
+                <a:spcPts val="400"/>
+              </a:spcBef>
+            </a:pPr>
+            <a:r>
+              <a:rPr sz="819" b="0">
+                <a:solidFill>
+                  <a:srgbClr val="555555"/>
+                </a:solidFill>
+                <a:latin typeface="맑은 고딕"/>
+              </a:rPr>
+              <a:t>측정값 · 플랫폼 위치 · 자세 · 안테나 설치를 그대로 넣는다.</a:t>
+            </a:r>
+          </a:p>
+          <a:p>
+            <a:pPr>
+              <a:spcBef>
+                <a:spcPts val="200"/>
+              </a:spcBef>
+            </a:pPr>
+            <a:r>
+              <a:rPr sz="819" b="0">
+                <a:solidFill>
+                  <a:srgbClr val="555555"/>
+                </a:solidFill>
+                <a:latin typeface="맑은 고딕"/>
+              </a:rPr>
+              <a:t>roll / pitch / yaw 는 슬라이더로도 바꾼다.</a:t>
+            </a:r>
+          </a:p>
+        </p:txBody>
+      </p:sp>
+      <p:sp>
+        <p:nvSpPr>
+          <p:cNvPr id="13" name="Rounded Rectangle 12"/>
+          <p:cNvSpPr/>
+          <p:nvPr/>
+        </p:nvSpPr>
+        <p:spPr>
+          <a:xfrm>
+            <a:off x="8778240" y="3090672"/>
+            <a:ext cx="2496312" cy="1188720"/>
+          </a:xfrm>
+          <a:prstGeom prst="roundRect">
+            <a:avLst>
+              <a:gd name="adj" fmla="val 4000"/>
+            </a:avLst>
+          </a:prstGeom>
+          <a:solidFill>
+            <a:srgbClr val="DCDCDC"/>
+          </a:solidFill>
+          <a:ln>
+            <a:noFill/>
+          </a:ln>
+          <a:effectLst/>
+        </p:spPr>
+        <p:txBody>
+          <a:bodyPr rtlCol="0" anchor="ctr"/>
+          <a:lstStyle/>
+          <a:p>
+            <a:pPr algn="ctr"/>
+          </a:p>
+        </p:txBody>
+      </p:sp>
+      <p:sp>
+        <p:nvSpPr>
+          <p:cNvPr id="14" name="TextBox 13"/>
+          <p:cNvSpPr txBox="1"/>
+          <p:nvPr/>
+        </p:nvSpPr>
+        <p:spPr>
+          <a:xfrm>
+            <a:off x="8961119" y="3191256"/>
+            <a:ext cx="2130552" cy="1024128"/>
+          </a:xfrm>
+          <a:prstGeom prst="rect">
+            <a:avLst/>
+          </a:prstGeom>
+          <a:noFill/>
+        </p:spPr>
+        <p:txBody>
+          <a:bodyPr wrap="square" lIns="0" rIns="0" tIns="0" bIns="0">
+            <a:spAutoFit/>
+          </a:bodyPr>
+          <a:lstStyle/>
+          <a:p>
+            <a:r>
+              <a:rPr sz="1100" b="1">
+                <a:solidFill>
+                  <a:srgbClr val="1A1A1A"/>
+                </a:solidFill>
+                <a:latin typeface="맑은 고딕"/>
+              </a:rPr>
+              <a:t>② 단계별 결과</a:t>
+            </a:r>
+          </a:p>
+          <a:p>
+            <a:pPr>
+              <a:spcBef>
+                <a:spcPts val="400"/>
+              </a:spcBef>
+            </a:pPr>
+            <a:r>
+              <a:rPr sz="819" b="0">
+                <a:solidFill>
+                  <a:srgbClr val="555555"/>
+                </a:solidFill>
+                <a:latin typeface="맑은 고딕"/>
+              </a:rPr>
+              <a:t>정변환 5 단계와 역변환 5 단계가 한 표에 나온다.</a:t>
+            </a:r>
+          </a:p>
+          <a:p>
+            <a:pPr>
+              <a:spcBef>
+                <a:spcPts val="200"/>
+              </a:spcBef>
+            </a:pPr>
+            <a:r>
+              <a:rPr sz="819" b="0">
+                <a:solidFill>
+                  <a:srgbClr val="555555"/>
+                </a:solidFill>
+                <a:latin typeface="맑은 고딕"/>
+              </a:rPr>
+              <a:t>콘솔 출력과 값이 같다.</a:t>
+            </a:r>
+          </a:p>
+        </p:txBody>
+      </p:sp>
+      <p:sp>
+        <p:nvSpPr>
+          <p:cNvPr id="15" name="Rounded Rectangle 14"/>
+          <p:cNvSpPr/>
+          <p:nvPr/>
+        </p:nvSpPr>
+        <p:spPr>
+          <a:xfrm>
+            <a:off x="8778240" y="4407408"/>
+            <a:ext cx="2496312" cy="1225296"/>
+          </a:xfrm>
+          <a:prstGeom prst="roundRect">
+            <a:avLst>
+              <a:gd name="adj" fmla="val 4000"/>
+            </a:avLst>
+          </a:prstGeom>
+          <a:solidFill>
+            <a:srgbClr val="DCDCDC"/>
+          </a:solidFill>
+          <a:ln>
+            <a:noFill/>
+          </a:ln>
+          <a:effectLst/>
+        </p:spPr>
+        <p:txBody>
+          <a:bodyPr rtlCol="0" anchor="ctr"/>
+          <a:lstStyle/>
+          <a:p>
+            <a:pPr algn="ctr"/>
+          </a:p>
+        </p:txBody>
+      </p:sp>
+      <p:sp>
+        <p:nvSpPr>
+          <p:cNvPr id="16" name="TextBox 15"/>
+          <p:cNvSpPr txBox="1"/>
+          <p:nvPr/>
+        </p:nvSpPr>
+        <p:spPr>
+          <a:xfrm>
+            <a:off x="8961119" y="4507992"/>
+            <a:ext cx="2130552" cy="1060704"/>
+          </a:xfrm>
+          <a:prstGeom prst="rect">
+            <a:avLst/>
+          </a:prstGeom>
+          <a:noFill/>
+        </p:spPr>
+        <p:txBody>
+          <a:bodyPr wrap="square" lIns="0" rIns="0" tIns="0" bIns="0">
+            <a:spAutoFit/>
+          </a:bodyPr>
+          <a:lstStyle/>
+          <a:p>
+            <a:r>
+              <a:rPr sz="1100" b="1">
+                <a:solidFill>
+                  <a:srgbClr val="1A1A1A"/>
+                </a:solidFill>
+                <a:latin typeface="맑은 고딕"/>
+              </a:rPr>
+              <a:t>③ 최종 출력</a:t>
+            </a:r>
+          </a:p>
+          <a:p>
+            <a:pPr>
+              <a:spcBef>
+                <a:spcPts val="400"/>
+              </a:spcBef>
+            </a:pPr>
+            <a:r>
+              <a:rPr sz="819" b="0">
+                <a:solidFill>
+                  <a:srgbClr val="555555"/>
+                </a:solidFill>
+                <a:latin typeface="맑은 고딕"/>
+              </a:rPr>
+              <a:t>표적 위/경/고도와 안테나 극좌표,</a:t>
+            </a:r>
+          </a:p>
+          <a:p>
+            <a:pPr>
+              <a:spcBef>
+                <a:spcPts val="200"/>
+              </a:spcBef>
+            </a:pPr>
+            <a:r>
+              <a:rPr sz="819" b="0">
+                <a:solidFill>
+                  <a:srgbClr val="555555"/>
+                </a:solidFill>
+                <a:latin typeface="맑은 고딕"/>
+              </a:rPr>
+              <a:t>그리고 왕복오차까지 한 눈에 확인된다.</a:t>
+            </a:r>
+          </a:p>
+        </p:txBody>
+      </p:sp>
+      <p:sp>
+        <p:nvSpPr>
+          <p:cNvPr id="17" name="Rounded Rectangle 16"/>
+          <p:cNvSpPr/>
+          <p:nvPr/>
+        </p:nvSpPr>
+        <p:spPr>
+          <a:xfrm>
+            <a:off x="914400" y="5504688"/>
+            <a:ext cx="7589520" cy="329184"/>
+          </a:xfrm>
+          <a:prstGeom prst="roundRect">
+            <a:avLst>
+              <a:gd name="adj" fmla="val 4000"/>
+            </a:avLst>
+          </a:prstGeom>
+          <a:solidFill>
+            <a:srgbClr val="8E8E8E"/>
+          </a:solidFill>
+          <a:ln>
+            <a:noFill/>
+          </a:ln>
+          <a:effectLst/>
+        </p:spPr>
+        <p:txBody>
+          <a:bodyPr rtlCol="0" anchor="ctr"/>
+          <a:lstStyle/>
+          <a:p>
+            <a:pPr algn="ctr"/>
+          </a:p>
+        </p:txBody>
+      </p:sp>
+      <p:sp>
+        <p:nvSpPr>
+          <p:cNvPr id="18" name="TextBox 17"/>
+          <p:cNvSpPr txBox="1"/>
+          <p:nvPr/>
+        </p:nvSpPr>
+        <p:spPr>
+          <a:xfrm>
+            <a:off x="1097280" y="5559552"/>
+            <a:ext cx="7315200" cy="237744"/>
+          </a:xfrm>
+          <a:prstGeom prst="rect">
+            <a:avLst/>
+          </a:prstGeom>
+          <a:noFill/>
+        </p:spPr>
+        <p:txBody>
+          <a:bodyPr wrap="square" lIns="0" rIns="0" tIns="0" bIns="0">
+            <a:spAutoFit/>
+          </a:bodyPr>
+          <a:lstStyle/>
+          <a:p>
+            <a:r>
+              <a:rPr sz="900" b="1">
+                <a:solidFill>
+                  <a:srgbClr val="FFFFFF"/>
+                </a:solidFill>
+                <a:latin typeface="맑은 고딕"/>
+              </a:rPr>
+              <a:t>표에 찍힌 값이 발표자료 p.20 ~ p.22 · 앞 장 콘솔 출력과 모두 같다.</a:t>
+            </a:r>
           </a:p>
         </p:txBody>
       </p:sp>
